--- a/exports/FE-Credit-IT-Delivery-Framework-Slides.pptx
+++ b/exports/FE-Credit-IT-Delivery-Framework-Slides.pptx
@@ -35,6 +35,8 @@
     <p:sldId id="283" r:id="rId34"/>
     <p:sldId id="284" r:id="rId35"/>
     <p:sldId id="285" r:id="rId36"/>
+    <p:sldId id="286" r:id="rId37"/>
+    <p:sldId id="287" r:id="rId38"/>
   </p:sldIdLst>
   <p:sldSz cx="12191695" cy="6858000" type="screen4x3"/>
   <p:notesSz cx="6858000" cy="9144000"/>
@@ -3198,7 +3200,7 @@
           <a:lstStyle/>
           <a:p>
             <a:r>
-              <a:t>Phase 3 — IT Triage &amp; Product Backlog</a:t>
+              <a:t>Phase 2 — BRD &amp; Quality Gate</a:t>
             </a:r>
           </a:p>
         </p:txBody>
@@ -3219,28 +3221,32 @@
           <a:lstStyle/>
           <a:p>
             <a:r>
-              <a:t>IT Product / Portfolio (≤5 business days)</a:t>
-            </a:r>
-          </a:p>
-          <a:p>
-            <a:r>
-              <a:t>  • Fit with strategy and capacity</a:t>
-            </a:r>
-          </a:p>
-          <a:p>
-            <a:r>
-              <a:t>  • Priority vs regulatory / revenue / risk</a:t>
-            </a:r>
-          </a:p>
-          <a:p>
-            <a:r>
-              <a:t>  • Decision: Approved for FSD | Deferred | Rejected (with reason)</a:t>
-            </a:r>
-          </a:p>
-          <a:p/>
-          <a:p>
-            <a:r>
-              <a:t>Approved BRD → Product Backlog item (Epic) in Jira</a:t>
+              <a:t>Business drafts BRD → Sponsor (Director+) signs</a:t>
+            </a:r>
+          </a:p>
+          <a:p>
+            <a:r>
+              <a:t>BA quality review (≤2 business days)</a:t>
+            </a:r>
+          </a:p>
+          <a:p>
+            <a:r>
+              <a:t>  • Score ≥ 80% on quality rubric</a:t>
+            </a:r>
+          </a:p>
+          <a:p>
+            <a:r>
+              <a:t>  • Mandatory sections complete</a:t>
+            </a:r>
+          </a:p>
+          <a:p>
+            <a:r>
+              <a:t>  • Compliance Section N → auto-route GRC / IT-Security</a:t>
+            </a:r>
+          </a:p>
+          <a:p>
+            <a:r>
+              <a:t>Outcome: Accepted to triage | Returned | Deferred</a:t>
             </a:r>
           </a:p>
         </p:txBody>
@@ -3279,810 +3285,49 @@
           <a:lstStyle/>
           <a:p>
             <a:r>
-              <a:t>Agile/Scrum Inside the Pipeline</a:t>
-            </a:r>
-          </a:p>
-        </p:txBody>
-      </p:sp>
-      <p:sp>
-        <p:nvSpPr>
-          <p:cNvPr id="3" name="TextBox 2"/>
-          <p:cNvSpPr txBox="1"/>
-          <p:nvPr/>
-        </p:nvSpPr>
-        <p:spPr>
-          <a:xfrm>
-            <a:off x="457200" y="1051560"/>
-            <a:ext cx="11247120" cy="365760"/>
-          </a:xfrm>
-          <a:prstGeom prst="rect">
-            <a:avLst/>
-          </a:prstGeom>
-          <a:noFill/>
-        </p:spPr>
-        <p:txBody>
-          <a:bodyPr wrap="none">
-            <a:spAutoFit/>
-          </a:bodyPr>
-          <a:lstStyle/>
-          <a:p>
-            <a:pPr>
-              <a:defRPr sz="1400">
-                <a:solidFill>
-                  <a:srgbClr val="555555"/>
-                </a:solidFill>
-              </a:defRPr>
-            </a:pPr>
-            <a:r>
-              <a:t>FSD feeds Product Backlog; Ship requires governance gates green</a:t>
-            </a:r>
-          </a:p>
-        </p:txBody>
-      </p:sp>
-      <p:sp>
-        <p:nvSpPr>
-          <p:cNvPr id="4" name="Rounded Rectangle 3"/>
-          <p:cNvSpPr/>
-          <p:nvPr/>
-        </p:nvSpPr>
-        <p:spPr>
-          <a:xfrm>
-            <a:off x="609447" y="2743200"/>
-            <a:ext cx="1131570" cy="868680"/>
-          </a:xfrm>
-          <a:prstGeom prst="roundRect">
-            <a:avLst/>
-          </a:prstGeom>
-          <a:solidFill>
-            <a:srgbClr val="1F4E79"/>
-          </a:solidFill>
-          <a:ln>
-            <a:solidFill>
-              <a:srgbClr val="FFFFFF"/>
-            </a:solidFill>
-          </a:ln>
-        </p:spPr>
-        <p:style>
-          <a:lnRef idx="1">
-            <a:schemeClr val="accent1"/>
-          </a:lnRef>
-          <a:fillRef idx="3">
-            <a:schemeClr val="accent1"/>
-          </a:fillRef>
-          <a:effectRef idx="2">
-            <a:schemeClr val="accent1"/>
-          </a:effectRef>
-          <a:fontRef idx="minor">
-            <a:schemeClr val="lt1"/>
-          </a:fontRef>
-        </p:style>
-        <p:txBody>
-          <a:bodyPr rtlCol="0" anchor="ctr" wrap="square"/>
-          <a:lstStyle/>
-          <a:p>
-            <a:pPr algn="l">
-              <a:defRPr sz="1100" b="1">
-                <a:solidFill>
-                  <a:srgbClr val="FFFFFF"/>
-                </a:solidFill>
-              </a:defRPr>
-            </a:pPr>
-            <a:r>
-              <a:t>Product</a:t>
-            </a:r>
-          </a:p>
-          <a:p>
-            <a:r>
-              <a:t>Backlog</a:t>
-            </a:r>
-          </a:p>
-        </p:txBody>
-      </p:sp>
-      <p:sp>
-        <p:nvSpPr>
-          <p:cNvPr id="5" name="Right Arrow 4"/>
-          <p:cNvSpPr/>
-          <p:nvPr/>
-        </p:nvSpPr>
-        <p:spPr>
-          <a:xfrm>
-            <a:off x="1741017" y="2971800"/>
-            <a:ext cx="274320" cy="320040"/>
-          </a:xfrm>
-          <a:prstGeom prst="rightArrow">
-            <a:avLst/>
-          </a:prstGeom>
-          <a:solidFill>
-            <a:srgbClr val="BFBFBF"/>
-          </a:solidFill>
-          <a:ln>
-            <a:noFill/>
-          </a:ln>
-        </p:spPr>
-        <p:style>
-          <a:lnRef idx="1">
-            <a:schemeClr val="accent1"/>
-          </a:lnRef>
-          <a:fillRef idx="3">
-            <a:schemeClr val="accent1"/>
-          </a:fillRef>
-          <a:effectRef idx="2">
-            <a:schemeClr val="accent1"/>
-          </a:effectRef>
-          <a:fontRef idx="minor">
-            <a:schemeClr val="lt1"/>
-          </a:fontRef>
-        </p:style>
-        <p:txBody>
-          <a:bodyPr rtlCol="0" anchor="ctr"/>
-          <a:lstStyle/>
-          <a:p>
-            <a:pPr algn="ctr"/>
-          </a:p>
-        </p:txBody>
-      </p:sp>
-      <p:sp>
-        <p:nvSpPr>
-          <p:cNvPr id="6" name="Rounded Rectangle 5"/>
-          <p:cNvSpPr/>
-          <p:nvPr/>
-        </p:nvSpPr>
-        <p:spPr>
-          <a:xfrm>
-            <a:off x="2015337" y="2743200"/>
-            <a:ext cx="1131570" cy="868680"/>
-          </a:xfrm>
-          <a:prstGeom prst="roundRect">
-            <a:avLst/>
-          </a:prstGeom>
-          <a:solidFill>
-            <a:srgbClr val="2E75B6"/>
-          </a:solidFill>
-          <a:ln>
-            <a:solidFill>
-              <a:srgbClr val="FFFFFF"/>
-            </a:solidFill>
-          </a:ln>
-        </p:spPr>
-        <p:style>
-          <a:lnRef idx="1">
-            <a:schemeClr val="accent1"/>
-          </a:lnRef>
-          <a:fillRef idx="3">
-            <a:schemeClr val="accent1"/>
-          </a:fillRef>
-          <a:effectRef idx="2">
-            <a:schemeClr val="accent1"/>
-          </a:effectRef>
-          <a:fontRef idx="minor">
-            <a:schemeClr val="lt1"/>
-          </a:fontRef>
-        </p:style>
-        <p:txBody>
-          <a:bodyPr rtlCol="0" anchor="ctr" wrap="square"/>
-          <a:lstStyle/>
-          <a:p>
-            <a:pPr algn="l">
-              <a:defRPr sz="1100" b="1">
-                <a:solidFill>
-                  <a:srgbClr val="FFFFFF"/>
-                </a:solidFill>
-              </a:defRPr>
-            </a:pPr>
-            <a:r>
-              <a:t>Sprint</a:t>
-            </a:r>
-          </a:p>
-          <a:p>
-            <a:r>
-              <a:t>Planning</a:t>
-            </a:r>
-          </a:p>
-        </p:txBody>
-      </p:sp>
-      <p:sp>
-        <p:nvSpPr>
-          <p:cNvPr id="7" name="Right Arrow 6"/>
-          <p:cNvSpPr/>
-          <p:nvPr/>
-        </p:nvSpPr>
-        <p:spPr>
-          <a:xfrm>
-            <a:off x="3146907" y="2971800"/>
-            <a:ext cx="274320" cy="320040"/>
-          </a:xfrm>
-          <a:prstGeom prst="rightArrow">
-            <a:avLst/>
-          </a:prstGeom>
-          <a:solidFill>
-            <a:srgbClr val="BFBFBF"/>
-          </a:solidFill>
-          <a:ln>
-            <a:noFill/>
-          </a:ln>
-        </p:spPr>
-        <p:style>
-          <a:lnRef idx="1">
-            <a:schemeClr val="accent1"/>
-          </a:lnRef>
-          <a:fillRef idx="3">
-            <a:schemeClr val="accent1"/>
-          </a:fillRef>
-          <a:effectRef idx="2">
-            <a:schemeClr val="accent1"/>
-          </a:effectRef>
-          <a:fontRef idx="minor">
-            <a:schemeClr val="lt1"/>
-          </a:fontRef>
-        </p:style>
-        <p:txBody>
-          <a:bodyPr rtlCol="0" anchor="ctr"/>
-          <a:lstStyle/>
-          <a:p>
-            <a:pPr algn="ctr"/>
-          </a:p>
-        </p:txBody>
-      </p:sp>
-      <p:sp>
-        <p:nvSpPr>
-          <p:cNvPr id="8" name="Rounded Rectangle 7"/>
-          <p:cNvSpPr/>
-          <p:nvPr/>
-        </p:nvSpPr>
-        <p:spPr>
-          <a:xfrm>
-            <a:off x="3421227" y="2743200"/>
-            <a:ext cx="1131570" cy="868680"/>
-          </a:xfrm>
-          <a:prstGeom prst="roundRect">
-            <a:avLst/>
-          </a:prstGeom>
-          <a:solidFill>
-            <a:srgbClr val="5B9BD5"/>
-          </a:solidFill>
-          <a:ln>
-            <a:solidFill>
-              <a:srgbClr val="FFFFFF"/>
-            </a:solidFill>
-          </a:ln>
-        </p:spPr>
-        <p:style>
-          <a:lnRef idx="1">
-            <a:schemeClr val="accent1"/>
-          </a:lnRef>
-          <a:fillRef idx="3">
-            <a:schemeClr val="accent1"/>
-          </a:fillRef>
-          <a:effectRef idx="2">
-            <a:schemeClr val="accent1"/>
-          </a:effectRef>
-          <a:fontRef idx="minor">
-            <a:schemeClr val="lt1"/>
-          </a:fontRef>
-        </p:style>
-        <p:txBody>
-          <a:bodyPr rtlCol="0" anchor="ctr" wrap="square"/>
-          <a:lstStyle/>
-          <a:p>
-            <a:pPr algn="l">
-              <a:defRPr sz="1100" b="1">
-                <a:solidFill>
-                  <a:srgbClr val="FFFFFF"/>
-                </a:solidFill>
-              </a:defRPr>
-            </a:pPr>
-            <a:r>
-              <a:t>Daily</a:t>
-            </a:r>
-          </a:p>
-          <a:p>
-            <a:r>
-              <a:t>Build</a:t>
-            </a:r>
-          </a:p>
-        </p:txBody>
-      </p:sp>
-      <p:sp>
-        <p:nvSpPr>
-          <p:cNvPr id="9" name="Right Arrow 8"/>
-          <p:cNvSpPr/>
-          <p:nvPr/>
-        </p:nvSpPr>
-        <p:spPr>
-          <a:xfrm>
-            <a:off x="4552797" y="2971800"/>
-            <a:ext cx="274320" cy="320040"/>
-          </a:xfrm>
-          <a:prstGeom prst="rightArrow">
-            <a:avLst/>
-          </a:prstGeom>
-          <a:solidFill>
-            <a:srgbClr val="BFBFBF"/>
-          </a:solidFill>
-          <a:ln>
-            <a:noFill/>
-          </a:ln>
-        </p:spPr>
-        <p:style>
-          <a:lnRef idx="1">
-            <a:schemeClr val="accent1"/>
-          </a:lnRef>
-          <a:fillRef idx="3">
-            <a:schemeClr val="accent1"/>
-          </a:fillRef>
-          <a:effectRef idx="2">
-            <a:schemeClr val="accent1"/>
-          </a:effectRef>
-          <a:fontRef idx="minor">
-            <a:schemeClr val="lt1"/>
-          </a:fontRef>
-        </p:style>
-        <p:txBody>
-          <a:bodyPr rtlCol="0" anchor="ctr"/>
-          <a:lstStyle/>
-          <a:p>
-            <a:pPr algn="ctr"/>
-          </a:p>
-        </p:txBody>
-      </p:sp>
-      <p:sp>
-        <p:nvSpPr>
-          <p:cNvPr id="10" name="Rounded Rectangle 9"/>
-          <p:cNvSpPr/>
-          <p:nvPr/>
-        </p:nvSpPr>
-        <p:spPr>
-          <a:xfrm>
-            <a:off x="4827117" y="2743200"/>
-            <a:ext cx="1131570" cy="868680"/>
-          </a:xfrm>
-          <a:prstGeom prst="roundRect">
-            <a:avLst/>
-          </a:prstGeom>
-          <a:solidFill>
-            <a:srgbClr val="70AD47"/>
-          </a:solidFill>
-          <a:ln>
-            <a:solidFill>
-              <a:srgbClr val="FFFFFF"/>
-            </a:solidFill>
-          </a:ln>
-        </p:spPr>
-        <p:style>
-          <a:lnRef idx="1">
-            <a:schemeClr val="accent1"/>
-          </a:lnRef>
-          <a:fillRef idx="3">
-            <a:schemeClr val="accent1"/>
-          </a:fillRef>
-          <a:effectRef idx="2">
-            <a:schemeClr val="accent1"/>
-          </a:effectRef>
-          <a:fontRef idx="minor">
-            <a:schemeClr val="lt1"/>
-          </a:fontRef>
-        </p:style>
-        <p:txBody>
-          <a:bodyPr rtlCol="0" anchor="ctr" wrap="square"/>
-          <a:lstStyle/>
-          <a:p>
-            <a:pPr algn="l">
-              <a:defRPr sz="1100" b="1">
-                <a:solidFill>
-                  <a:srgbClr val="FFFFFF"/>
-                </a:solidFill>
-              </a:defRPr>
-            </a:pPr>
-            <a:r>
-              <a:t>SIT in</a:t>
-            </a:r>
-          </a:p>
-          <a:p>
-            <a:r>
-              <a:t>Sprint</a:t>
-            </a:r>
-          </a:p>
-        </p:txBody>
-      </p:sp>
-      <p:sp>
-        <p:nvSpPr>
-          <p:cNvPr id="11" name="Right Arrow 10"/>
-          <p:cNvSpPr/>
-          <p:nvPr/>
-        </p:nvSpPr>
-        <p:spPr>
-          <a:xfrm>
-            <a:off x="5958687" y="2971800"/>
-            <a:ext cx="274320" cy="320040"/>
-          </a:xfrm>
-          <a:prstGeom prst="rightArrow">
-            <a:avLst/>
-          </a:prstGeom>
-          <a:solidFill>
-            <a:srgbClr val="BFBFBF"/>
-          </a:solidFill>
-          <a:ln>
-            <a:noFill/>
-          </a:ln>
-        </p:spPr>
-        <p:style>
-          <a:lnRef idx="1">
-            <a:schemeClr val="accent1"/>
-          </a:lnRef>
-          <a:fillRef idx="3">
-            <a:schemeClr val="accent1"/>
-          </a:fillRef>
-          <a:effectRef idx="2">
-            <a:schemeClr val="accent1"/>
-          </a:effectRef>
-          <a:fontRef idx="minor">
-            <a:schemeClr val="lt1"/>
-          </a:fontRef>
-        </p:style>
-        <p:txBody>
-          <a:bodyPr rtlCol="0" anchor="ctr"/>
-          <a:lstStyle/>
-          <a:p>
-            <a:pPr algn="ctr"/>
-          </a:p>
-        </p:txBody>
-      </p:sp>
-      <p:sp>
-        <p:nvSpPr>
-          <p:cNvPr id="12" name="Rounded Rectangle 11"/>
-          <p:cNvSpPr/>
-          <p:nvPr/>
-        </p:nvSpPr>
-        <p:spPr>
-          <a:xfrm>
-            <a:off x="6233007" y="2743200"/>
-            <a:ext cx="1131570" cy="868680"/>
-          </a:xfrm>
-          <a:prstGeom prst="roundRect">
-            <a:avLst/>
-          </a:prstGeom>
-          <a:solidFill>
-            <a:srgbClr val="ED7D31"/>
-          </a:solidFill>
-          <a:ln>
-            <a:solidFill>
-              <a:srgbClr val="FFFFFF"/>
-            </a:solidFill>
-          </a:ln>
-        </p:spPr>
-        <p:style>
-          <a:lnRef idx="1">
-            <a:schemeClr val="accent1"/>
-          </a:lnRef>
-          <a:fillRef idx="3">
-            <a:schemeClr val="accent1"/>
-          </a:fillRef>
-          <a:effectRef idx="2">
-            <a:schemeClr val="accent1"/>
-          </a:effectRef>
-          <a:fontRef idx="minor">
-            <a:schemeClr val="lt1"/>
-          </a:fontRef>
-        </p:style>
-        <p:txBody>
-          <a:bodyPr rtlCol="0" anchor="ctr" wrap="square"/>
-          <a:lstStyle/>
-          <a:p>
-            <a:pPr algn="l">
-              <a:defRPr sz="1100" b="1">
-                <a:solidFill>
-                  <a:srgbClr val="FFFFFF"/>
-                </a:solidFill>
-              </a:defRPr>
-            </a:pPr>
-            <a:r>
-              <a:t>Sprint</a:t>
-            </a:r>
-          </a:p>
-          <a:p>
-            <a:r>
-              <a:t>Review</a:t>
-            </a:r>
-          </a:p>
-        </p:txBody>
-      </p:sp>
-      <p:sp>
-        <p:nvSpPr>
-          <p:cNvPr id="13" name="Right Arrow 12"/>
-          <p:cNvSpPr/>
-          <p:nvPr/>
-        </p:nvSpPr>
-        <p:spPr>
-          <a:xfrm>
-            <a:off x="7364577" y="2971800"/>
-            <a:ext cx="274320" cy="320040"/>
-          </a:xfrm>
-          <a:prstGeom prst="rightArrow">
-            <a:avLst/>
-          </a:prstGeom>
-          <a:solidFill>
-            <a:srgbClr val="BFBFBF"/>
-          </a:solidFill>
-          <a:ln>
-            <a:noFill/>
-          </a:ln>
-        </p:spPr>
-        <p:style>
-          <a:lnRef idx="1">
-            <a:schemeClr val="accent1"/>
-          </a:lnRef>
-          <a:fillRef idx="3">
-            <a:schemeClr val="accent1"/>
-          </a:fillRef>
-          <a:effectRef idx="2">
-            <a:schemeClr val="accent1"/>
-          </a:effectRef>
-          <a:fontRef idx="minor">
-            <a:schemeClr val="lt1"/>
-          </a:fontRef>
-        </p:style>
-        <p:txBody>
-          <a:bodyPr rtlCol="0" anchor="ctr"/>
-          <a:lstStyle/>
-          <a:p>
-            <a:pPr algn="ctr"/>
-          </a:p>
-        </p:txBody>
-      </p:sp>
-      <p:sp>
-        <p:nvSpPr>
-          <p:cNvPr id="14" name="Rounded Rectangle 13"/>
-          <p:cNvSpPr/>
-          <p:nvPr/>
-        </p:nvSpPr>
-        <p:spPr>
-          <a:xfrm>
-            <a:off x="7638897" y="2743200"/>
-            <a:ext cx="1131570" cy="868680"/>
-          </a:xfrm>
-          <a:prstGeom prst="roundRect">
-            <a:avLst/>
-          </a:prstGeom>
-          <a:solidFill>
-            <a:srgbClr val="A5A5A5"/>
-          </a:solidFill>
-          <a:ln>
-            <a:solidFill>
-              <a:srgbClr val="FFFFFF"/>
-            </a:solidFill>
-          </a:ln>
-        </p:spPr>
-        <p:style>
-          <a:lnRef idx="1">
-            <a:schemeClr val="accent1"/>
-          </a:lnRef>
-          <a:fillRef idx="3">
-            <a:schemeClr val="accent1"/>
-          </a:fillRef>
-          <a:effectRef idx="2">
-            <a:schemeClr val="accent1"/>
-          </a:effectRef>
-          <a:fontRef idx="minor">
-            <a:schemeClr val="lt1"/>
-          </a:fontRef>
-        </p:style>
-        <p:txBody>
-          <a:bodyPr rtlCol="0" anchor="ctr" wrap="square"/>
-          <a:lstStyle/>
-          <a:p>
-            <a:pPr algn="l">
-              <a:defRPr sz="1100" b="1">
-                <a:solidFill>
-                  <a:srgbClr val="FFFFFF"/>
-                </a:solidFill>
-              </a:defRPr>
-            </a:pPr>
-            <a:r>
-              <a:t>UAT</a:t>
-            </a:r>
-          </a:p>
-          <a:p>
-            <a:r>
-              <a:t>Window</a:t>
-            </a:r>
-          </a:p>
-        </p:txBody>
-      </p:sp>
-      <p:sp>
-        <p:nvSpPr>
-          <p:cNvPr id="15" name="Right Arrow 14"/>
-          <p:cNvSpPr/>
-          <p:nvPr/>
-        </p:nvSpPr>
-        <p:spPr>
-          <a:xfrm>
-            <a:off x="8770467" y="2971800"/>
-            <a:ext cx="274320" cy="320040"/>
-          </a:xfrm>
-          <a:prstGeom prst="rightArrow">
-            <a:avLst/>
-          </a:prstGeom>
-          <a:solidFill>
-            <a:srgbClr val="BFBFBF"/>
-          </a:solidFill>
-          <a:ln>
-            <a:noFill/>
-          </a:ln>
-        </p:spPr>
-        <p:style>
-          <a:lnRef idx="1">
-            <a:schemeClr val="accent1"/>
-          </a:lnRef>
-          <a:fillRef idx="3">
-            <a:schemeClr val="accent1"/>
-          </a:fillRef>
-          <a:effectRef idx="2">
-            <a:schemeClr val="accent1"/>
-          </a:effectRef>
-          <a:fontRef idx="minor">
-            <a:schemeClr val="lt1"/>
-          </a:fontRef>
-        </p:style>
-        <p:txBody>
-          <a:bodyPr rtlCol="0" anchor="ctr"/>
-          <a:lstStyle/>
-          <a:p>
-            <a:pPr algn="ctr"/>
-          </a:p>
-        </p:txBody>
-      </p:sp>
-      <p:sp>
-        <p:nvSpPr>
-          <p:cNvPr id="16" name="Rounded Rectangle 15"/>
-          <p:cNvSpPr/>
-          <p:nvPr/>
-        </p:nvSpPr>
-        <p:spPr>
-          <a:xfrm>
-            <a:off x="9044787" y="2743200"/>
-            <a:ext cx="1131570" cy="868680"/>
-          </a:xfrm>
-          <a:prstGeom prst="roundRect">
-            <a:avLst/>
-          </a:prstGeom>
-          <a:solidFill>
-            <a:srgbClr val="4472C4"/>
-          </a:solidFill>
-          <a:ln>
-            <a:solidFill>
-              <a:srgbClr val="FFFFFF"/>
-            </a:solidFill>
-          </a:ln>
-        </p:spPr>
-        <p:style>
-          <a:lnRef idx="1">
-            <a:schemeClr val="accent1"/>
-          </a:lnRef>
-          <a:fillRef idx="3">
-            <a:schemeClr val="accent1"/>
-          </a:fillRef>
-          <a:effectRef idx="2">
-            <a:schemeClr val="accent1"/>
-          </a:effectRef>
-          <a:fontRef idx="minor">
-            <a:schemeClr val="lt1"/>
-          </a:fontRef>
-        </p:style>
-        <p:txBody>
-          <a:bodyPr rtlCol="0" anchor="ctr" wrap="square"/>
-          <a:lstStyle/>
-          <a:p>
-            <a:pPr algn="l">
-              <a:defRPr sz="1100" b="1">
-                <a:solidFill>
-                  <a:srgbClr val="FFFFFF"/>
-                </a:solidFill>
-              </a:defRPr>
-            </a:pPr>
-            <a:r>
-              <a:t>Release</a:t>
-            </a:r>
-          </a:p>
-          <a:p>
-            <a:r>
-              <a:t>CAB</a:t>
-            </a:r>
-          </a:p>
-        </p:txBody>
-      </p:sp>
-      <p:sp>
-        <p:nvSpPr>
-          <p:cNvPr id="17" name="Right Arrow 16"/>
-          <p:cNvSpPr/>
-          <p:nvPr/>
-        </p:nvSpPr>
-        <p:spPr>
-          <a:xfrm>
-            <a:off x="10176357" y="2971800"/>
-            <a:ext cx="274320" cy="320040"/>
-          </a:xfrm>
-          <a:prstGeom prst="rightArrow">
-            <a:avLst/>
-          </a:prstGeom>
-          <a:solidFill>
-            <a:srgbClr val="BFBFBF"/>
-          </a:solidFill>
-          <a:ln>
-            <a:noFill/>
-          </a:ln>
-        </p:spPr>
-        <p:style>
-          <a:lnRef idx="1">
-            <a:schemeClr val="accent1"/>
-          </a:lnRef>
-          <a:fillRef idx="3">
-            <a:schemeClr val="accent1"/>
-          </a:fillRef>
-          <a:effectRef idx="2">
-            <a:schemeClr val="accent1"/>
-          </a:effectRef>
-          <a:fontRef idx="minor">
-            <a:schemeClr val="lt1"/>
-          </a:fontRef>
-        </p:style>
-        <p:txBody>
-          <a:bodyPr rtlCol="0" anchor="ctr"/>
-          <a:lstStyle/>
-          <a:p>
-            <a:pPr algn="ctr"/>
-          </a:p>
-        </p:txBody>
-      </p:sp>
-      <p:sp>
-        <p:nvSpPr>
-          <p:cNvPr id="18" name="Rounded Rectangle 17"/>
-          <p:cNvSpPr/>
-          <p:nvPr/>
-        </p:nvSpPr>
-        <p:spPr>
-          <a:xfrm>
-            <a:off x="10450677" y="2743200"/>
-            <a:ext cx="1131570" cy="868680"/>
-          </a:xfrm>
-          <a:prstGeom prst="roundRect">
-            <a:avLst/>
-          </a:prstGeom>
-          <a:solidFill>
-            <a:srgbClr val="7030A0"/>
-          </a:solidFill>
-          <a:ln>
-            <a:solidFill>
-              <a:srgbClr val="FFFFFF"/>
-            </a:solidFill>
-          </a:ln>
-        </p:spPr>
-        <p:style>
-          <a:lnRef idx="1">
-            <a:schemeClr val="accent1"/>
-          </a:lnRef>
-          <a:fillRef idx="3">
-            <a:schemeClr val="accent1"/>
-          </a:fillRef>
-          <a:effectRef idx="2">
-            <a:schemeClr val="accent1"/>
-          </a:effectRef>
-          <a:fontRef idx="minor">
-            <a:schemeClr val="lt1"/>
-          </a:fontRef>
-        </p:style>
-        <p:txBody>
-          <a:bodyPr rtlCol="0" anchor="ctr" wrap="square"/>
-          <a:lstStyle/>
-          <a:p>
-            <a:pPr algn="l">
-              <a:defRPr sz="1100" b="1">
-                <a:solidFill>
-                  <a:srgbClr val="FFFFFF"/>
-                </a:solidFill>
-              </a:defRPr>
-            </a:pPr>
-            <a:r>
-              <a:t>Retro</a:t>
+              <a:t>Phase 3 — IT Triage &amp; Product Backlog</a:t>
+            </a:r>
+          </a:p>
+        </p:txBody>
+      </p:sp>
+      <p:sp>
+        <p:nvSpPr>
+          <p:cNvPr id="3" name="Content Placeholder 2"/>
+          <p:cNvSpPr>
+            <a:spLocks noGrp="1"/>
+          </p:cNvSpPr>
+          <p:nvPr>
+            <p:ph idx="1"/>
+          </p:nvPr>
+        </p:nvSpPr>
+        <p:spPr/>
+        <p:txBody>
+          <a:bodyPr/>
+          <a:lstStyle/>
+          <a:p>
+            <a:r>
+              <a:t>IT Product / Portfolio (≤5 business days)</a:t>
+            </a:r>
+          </a:p>
+          <a:p>
+            <a:r>
+              <a:t>  • Fit with strategy and capacity</a:t>
+            </a:r>
+          </a:p>
+          <a:p>
+            <a:r>
+              <a:t>  • Priority vs regulatory / revenue / risk</a:t>
+            </a:r>
+          </a:p>
+          <a:p>
+            <a:r>
+              <a:t>  • Decision: Approved for FSD | Deferred | Rejected (with reason)</a:t>
+            </a:r>
+          </a:p>
+          <a:p/>
+          <a:p>
+            <a:r>
+              <a:t>Approved BRD → Product Backlog item (Epic) in Jira</a:t>
             </a:r>
           </a:p>
         </p:txBody>
@@ -4121,59 +3366,810 @@
           <a:lstStyle/>
           <a:p>
             <a:r>
-              <a:t>Phase 4 — FSD (Functional Specification / FRD)</a:t>
-            </a:r>
-          </a:p>
-        </p:txBody>
-      </p:sp>
-      <p:sp>
-        <p:nvSpPr>
-          <p:cNvPr id="3" name="Content Placeholder 2"/>
-          <p:cNvSpPr>
-            <a:spLocks noGrp="1"/>
-          </p:cNvSpPr>
-          <p:nvPr>
-            <p:ph idx="1"/>
-          </p:nvPr>
-        </p:nvSpPr>
-        <p:spPr/>
-        <p:txBody>
-          <a:bodyPr/>
-          <a:lstStyle/>
-          <a:p>
-            <a:r>
-              <a:t>BA + IT Product create FSD from accepted BRD</a:t>
-            </a:r>
-          </a:p>
-          <a:p>
-            <a:r>
-              <a:t>FSD contains:</a:t>
-            </a:r>
-          </a:p>
-          <a:p>
-            <a:r>
-              <a:t>  • Functional flows mapped to BRD to-be state</a:t>
-            </a:r>
-          </a:p>
-          <a:p>
-            <a:r>
-              <a:t>  • Interface &amp; system touchpoints (FE ONLINE, Finacle, LOS…)</a:t>
-            </a:r>
-          </a:p>
-          <a:p>
-            <a:r>
-              <a:t>  • Story breakdown with traceability ID → BRD-xxx</a:t>
-            </a:r>
-          </a:p>
-          <a:p>
-            <a:r>
-              <a:t>  • Non-functional: performance, security, audit trail</a:t>
-            </a:r>
-          </a:p>
-          <a:p/>
-          <a:p>
-            <a:r>
-              <a:t>Gate: no sprint planning without FSD linked to BRD</a:t>
+              <a:t>Agile/Scrum Inside the Pipeline</a:t>
+            </a:r>
+          </a:p>
+        </p:txBody>
+      </p:sp>
+      <p:sp>
+        <p:nvSpPr>
+          <p:cNvPr id="3" name="TextBox 2"/>
+          <p:cNvSpPr txBox="1"/>
+          <p:nvPr/>
+        </p:nvSpPr>
+        <p:spPr>
+          <a:xfrm>
+            <a:off x="457200" y="1051560"/>
+            <a:ext cx="11247120" cy="365760"/>
+          </a:xfrm>
+          <a:prstGeom prst="rect">
+            <a:avLst/>
+          </a:prstGeom>
+          <a:noFill/>
+        </p:spPr>
+        <p:txBody>
+          <a:bodyPr wrap="none">
+            <a:spAutoFit/>
+          </a:bodyPr>
+          <a:lstStyle/>
+          <a:p>
+            <a:pPr>
+              <a:defRPr sz="1400">
+                <a:solidFill>
+                  <a:srgbClr val="555555"/>
+                </a:solidFill>
+              </a:defRPr>
+            </a:pPr>
+            <a:r>
+              <a:t>FSD feeds Product Backlog; Ship requires governance gates green</a:t>
+            </a:r>
+          </a:p>
+        </p:txBody>
+      </p:sp>
+      <p:sp>
+        <p:nvSpPr>
+          <p:cNvPr id="4" name="Rounded Rectangle 3"/>
+          <p:cNvSpPr/>
+          <p:nvPr/>
+        </p:nvSpPr>
+        <p:spPr>
+          <a:xfrm>
+            <a:off x="609447" y="2743200"/>
+            <a:ext cx="1131570" cy="868680"/>
+          </a:xfrm>
+          <a:prstGeom prst="roundRect">
+            <a:avLst/>
+          </a:prstGeom>
+          <a:solidFill>
+            <a:srgbClr val="1F4E79"/>
+          </a:solidFill>
+          <a:ln>
+            <a:solidFill>
+              <a:srgbClr val="FFFFFF"/>
+            </a:solidFill>
+          </a:ln>
+        </p:spPr>
+        <p:style>
+          <a:lnRef idx="1">
+            <a:schemeClr val="accent1"/>
+          </a:lnRef>
+          <a:fillRef idx="3">
+            <a:schemeClr val="accent1"/>
+          </a:fillRef>
+          <a:effectRef idx="2">
+            <a:schemeClr val="accent1"/>
+          </a:effectRef>
+          <a:fontRef idx="minor">
+            <a:schemeClr val="lt1"/>
+          </a:fontRef>
+        </p:style>
+        <p:txBody>
+          <a:bodyPr rtlCol="0" anchor="ctr" wrap="square"/>
+          <a:lstStyle/>
+          <a:p>
+            <a:pPr algn="l">
+              <a:defRPr sz="1100" b="1">
+                <a:solidFill>
+                  <a:srgbClr val="FFFFFF"/>
+                </a:solidFill>
+              </a:defRPr>
+            </a:pPr>
+            <a:r>
+              <a:t>Product</a:t>
+            </a:r>
+          </a:p>
+          <a:p>
+            <a:r>
+              <a:t>Backlog</a:t>
+            </a:r>
+          </a:p>
+        </p:txBody>
+      </p:sp>
+      <p:sp>
+        <p:nvSpPr>
+          <p:cNvPr id="5" name="Right Arrow 4"/>
+          <p:cNvSpPr/>
+          <p:nvPr/>
+        </p:nvSpPr>
+        <p:spPr>
+          <a:xfrm>
+            <a:off x="1741017" y="2971800"/>
+            <a:ext cx="274320" cy="320040"/>
+          </a:xfrm>
+          <a:prstGeom prst="rightArrow">
+            <a:avLst/>
+          </a:prstGeom>
+          <a:solidFill>
+            <a:srgbClr val="BFBFBF"/>
+          </a:solidFill>
+          <a:ln>
+            <a:noFill/>
+          </a:ln>
+        </p:spPr>
+        <p:style>
+          <a:lnRef idx="1">
+            <a:schemeClr val="accent1"/>
+          </a:lnRef>
+          <a:fillRef idx="3">
+            <a:schemeClr val="accent1"/>
+          </a:fillRef>
+          <a:effectRef idx="2">
+            <a:schemeClr val="accent1"/>
+          </a:effectRef>
+          <a:fontRef idx="minor">
+            <a:schemeClr val="lt1"/>
+          </a:fontRef>
+        </p:style>
+        <p:txBody>
+          <a:bodyPr rtlCol="0" anchor="ctr"/>
+          <a:lstStyle/>
+          <a:p>
+            <a:pPr algn="ctr"/>
+          </a:p>
+        </p:txBody>
+      </p:sp>
+      <p:sp>
+        <p:nvSpPr>
+          <p:cNvPr id="6" name="Rounded Rectangle 5"/>
+          <p:cNvSpPr/>
+          <p:nvPr/>
+        </p:nvSpPr>
+        <p:spPr>
+          <a:xfrm>
+            <a:off x="2015337" y="2743200"/>
+            <a:ext cx="1131570" cy="868680"/>
+          </a:xfrm>
+          <a:prstGeom prst="roundRect">
+            <a:avLst/>
+          </a:prstGeom>
+          <a:solidFill>
+            <a:srgbClr val="2E75B6"/>
+          </a:solidFill>
+          <a:ln>
+            <a:solidFill>
+              <a:srgbClr val="FFFFFF"/>
+            </a:solidFill>
+          </a:ln>
+        </p:spPr>
+        <p:style>
+          <a:lnRef idx="1">
+            <a:schemeClr val="accent1"/>
+          </a:lnRef>
+          <a:fillRef idx="3">
+            <a:schemeClr val="accent1"/>
+          </a:fillRef>
+          <a:effectRef idx="2">
+            <a:schemeClr val="accent1"/>
+          </a:effectRef>
+          <a:fontRef idx="minor">
+            <a:schemeClr val="lt1"/>
+          </a:fontRef>
+        </p:style>
+        <p:txBody>
+          <a:bodyPr rtlCol="0" anchor="ctr" wrap="square"/>
+          <a:lstStyle/>
+          <a:p>
+            <a:pPr algn="l">
+              <a:defRPr sz="1100" b="1">
+                <a:solidFill>
+                  <a:srgbClr val="FFFFFF"/>
+                </a:solidFill>
+              </a:defRPr>
+            </a:pPr>
+            <a:r>
+              <a:t>Sprint</a:t>
+            </a:r>
+          </a:p>
+          <a:p>
+            <a:r>
+              <a:t>Planning</a:t>
+            </a:r>
+          </a:p>
+        </p:txBody>
+      </p:sp>
+      <p:sp>
+        <p:nvSpPr>
+          <p:cNvPr id="7" name="Right Arrow 6"/>
+          <p:cNvSpPr/>
+          <p:nvPr/>
+        </p:nvSpPr>
+        <p:spPr>
+          <a:xfrm>
+            <a:off x="3146907" y="2971800"/>
+            <a:ext cx="274320" cy="320040"/>
+          </a:xfrm>
+          <a:prstGeom prst="rightArrow">
+            <a:avLst/>
+          </a:prstGeom>
+          <a:solidFill>
+            <a:srgbClr val="BFBFBF"/>
+          </a:solidFill>
+          <a:ln>
+            <a:noFill/>
+          </a:ln>
+        </p:spPr>
+        <p:style>
+          <a:lnRef idx="1">
+            <a:schemeClr val="accent1"/>
+          </a:lnRef>
+          <a:fillRef idx="3">
+            <a:schemeClr val="accent1"/>
+          </a:fillRef>
+          <a:effectRef idx="2">
+            <a:schemeClr val="accent1"/>
+          </a:effectRef>
+          <a:fontRef idx="minor">
+            <a:schemeClr val="lt1"/>
+          </a:fontRef>
+        </p:style>
+        <p:txBody>
+          <a:bodyPr rtlCol="0" anchor="ctr"/>
+          <a:lstStyle/>
+          <a:p>
+            <a:pPr algn="ctr"/>
+          </a:p>
+        </p:txBody>
+      </p:sp>
+      <p:sp>
+        <p:nvSpPr>
+          <p:cNvPr id="8" name="Rounded Rectangle 7"/>
+          <p:cNvSpPr/>
+          <p:nvPr/>
+        </p:nvSpPr>
+        <p:spPr>
+          <a:xfrm>
+            <a:off x="3421227" y="2743200"/>
+            <a:ext cx="1131570" cy="868680"/>
+          </a:xfrm>
+          <a:prstGeom prst="roundRect">
+            <a:avLst/>
+          </a:prstGeom>
+          <a:solidFill>
+            <a:srgbClr val="5B9BD5"/>
+          </a:solidFill>
+          <a:ln>
+            <a:solidFill>
+              <a:srgbClr val="FFFFFF"/>
+            </a:solidFill>
+          </a:ln>
+        </p:spPr>
+        <p:style>
+          <a:lnRef idx="1">
+            <a:schemeClr val="accent1"/>
+          </a:lnRef>
+          <a:fillRef idx="3">
+            <a:schemeClr val="accent1"/>
+          </a:fillRef>
+          <a:effectRef idx="2">
+            <a:schemeClr val="accent1"/>
+          </a:effectRef>
+          <a:fontRef idx="minor">
+            <a:schemeClr val="lt1"/>
+          </a:fontRef>
+        </p:style>
+        <p:txBody>
+          <a:bodyPr rtlCol="0" anchor="ctr" wrap="square"/>
+          <a:lstStyle/>
+          <a:p>
+            <a:pPr algn="l">
+              <a:defRPr sz="1100" b="1">
+                <a:solidFill>
+                  <a:srgbClr val="FFFFFF"/>
+                </a:solidFill>
+              </a:defRPr>
+            </a:pPr>
+            <a:r>
+              <a:t>Daily</a:t>
+            </a:r>
+          </a:p>
+          <a:p>
+            <a:r>
+              <a:t>Build</a:t>
+            </a:r>
+          </a:p>
+        </p:txBody>
+      </p:sp>
+      <p:sp>
+        <p:nvSpPr>
+          <p:cNvPr id="9" name="Right Arrow 8"/>
+          <p:cNvSpPr/>
+          <p:nvPr/>
+        </p:nvSpPr>
+        <p:spPr>
+          <a:xfrm>
+            <a:off x="4552797" y="2971800"/>
+            <a:ext cx="274320" cy="320040"/>
+          </a:xfrm>
+          <a:prstGeom prst="rightArrow">
+            <a:avLst/>
+          </a:prstGeom>
+          <a:solidFill>
+            <a:srgbClr val="BFBFBF"/>
+          </a:solidFill>
+          <a:ln>
+            <a:noFill/>
+          </a:ln>
+        </p:spPr>
+        <p:style>
+          <a:lnRef idx="1">
+            <a:schemeClr val="accent1"/>
+          </a:lnRef>
+          <a:fillRef idx="3">
+            <a:schemeClr val="accent1"/>
+          </a:fillRef>
+          <a:effectRef idx="2">
+            <a:schemeClr val="accent1"/>
+          </a:effectRef>
+          <a:fontRef idx="minor">
+            <a:schemeClr val="lt1"/>
+          </a:fontRef>
+        </p:style>
+        <p:txBody>
+          <a:bodyPr rtlCol="0" anchor="ctr"/>
+          <a:lstStyle/>
+          <a:p>
+            <a:pPr algn="ctr"/>
+          </a:p>
+        </p:txBody>
+      </p:sp>
+      <p:sp>
+        <p:nvSpPr>
+          <p:cNvPr id="10" name="Rounded Rectangle 9"/>
+          <p:cNvSpPr/>
+          <p:nvPr/>
+        </p:nvSpPr>
+        <p:spPr>
+          <a:xfrm>
+            <a:off x="4827117" y="2743200"/>
+            <a:ext cx="1131570" cy="868680"/>
+          </a:xfrm>
+          <a:prstGeom prst="roundRect">
+            <a:avLst/>
+          </a:prstGeom>
+          <a:solidFill>
+            <a:srgbClr val="70AD47"/>
+          </a:solidFill>
+          <a:ln>
+            <a:solidFill>
+              <a:srgbClr val="FFFFFF"/>
+            </a:solidFill>
+          </a:ln>
+        </p:spPr>
+        <p:style>
+          <a:lnRef idx="1">
+            <a:schemeClr val="accent1"/>
+          </a:lnRef>
+          <a:fillRef idx="3">
+            <a:schemeClr val="accent1"/>
+          </a:fillRef>
+          <a:effectRef idx="2">
+            <a:schemeClr val="accent1"/>
+          </a:effectRef>
+          <a:fontRef idx="minor">
+            <a:schemeClr val="lt1"/>
+          </a:fontRef>
+        </p:style>
+        <p:txBody>
+          <a:bodyPr rtlCol="0" anchor="ctr" wrap="square"/>
+          <a:lstStyle/>
+          <a:p>
+            <a:pPr algn="l">
+              <a:defRPr sz="1100" b="1">
+                <a:solidFill>
+                  <a:srgbClr val="FFFFFF"/>
+                </a:solidFill>
+              </a:defRPr>
+            </a:pPr>
+            <a:r>
+              <a:t>SIT in</a:t>
+            </a:r>
+          </a:p>
+          <a:p>
+            <a:r>
+              <a:t>Sprint</a:t>
+            </a:r>
+          </a:p>
+        </p:txBody>
+      </p:sp>
+      <p:sp>
+        <p:nvSpPr>
+          <p:cNvPr id="11" name="Right Arrow 10"/>
+          <p:cNvSpPr/>
+          <p:nvPr/>
+        </p:nvSpPr>
+        <p:spPr>
+          <a:xfrm>
+            <a:off x="5958687" y="2971800"/>
+            <a:ext cx="274320" cy="320040"/>
+          </a:xfrm>
+          <a:prstGeom prst="rightArrow">
+            <a:avLst/>
+          </a:prstGeom>
+          <a:solidFill>
+            <a:srgbClr val="BFBFBF"/>
+          </a:solidFill>
+          <a:ln>
+            <a:noFill/>
+          </a:ln>
+        </p:spPr>
+        <p:style>
+          <a:lnRef idx="1">
+            <a:schemeClr val="accent1"/>
+          </a:lnRef>
+          <a:fillRef idx="3">
+            <a:schemeClr val="accent1"/>
+          </a:fillRef>
+          <a:effectRef idx="2">
+            <a:schemeClr val="accent1"/>
+          </a:effectRef>
+          <a:fontRef idx="minor">
+            <a:schemeClr val="lt1"/>
+          </a:fontRef>
+        </p:style>
+        <p:txBody>
+          <a:bodyPr rtlCol="0" anchor="ctr"/>
+          <a:lstStyle/>
+          <a:p>
+            <a:pPr algn="ctr"/>
+          </a:p>
+        </p:txBody>
+      </p:sp>
+      <p:sp>
+        <p:nvSpPr>
+          <p:cNvPr id="12" name="Rounded Rectangle 11"/>
+          <p:cNvSpPr/>
+          <p:nvPr/>
+        </p:nvSpPr>
+        <p:spPr>
+          <a:xfrm>
+            <a:off x="6233007" y="2743200"/>
+            <a:ext cx="1131570" cy="868680"/>
+          </a:xfrm>
+          <a:prstGeom prst="roundRect">
+            <a:avLst/>
+          </a:prstGeom>
+          <a:solidFill>
+            <a:srgbClr val="ED7D31"/>
+          </a:solidFill>
+          <a:ln>
+            <a:solidFill>
+              <a:srgbClr val="FFFFFF"/>
+            </a:solidFill>
+          </a:ln>
+        </p:spPr>
+        <p:style>
+          <a:lnRef idx="1">
+            <a:schemeClr val="accent1"/>
+          </a:lnRef>
+          <a:fillRef idx="3">
+            <a:schemeClr val="accent1"/>
+          </a:fillRef>
+          <a:effectRef idx="2">
+            <a:schemeClr val="accent1"/>
+          </a:effectRef>
+          <a:fontRef idx="minor">
+            <a:schemeClr val="lt1"/>
+          </a:fontRef>
+        </p:style>
+        <p:txBody>
+          <a:bodyPr rtlCol="0" anchor="ctr" wrap="square"/>
+          <a:lstStyle/>
+          <a:p>
+            <a:pPr algn="l">
+              <a:defRPr sz="1100" b="1">
+                <a:solidFill>
+                  <a:srgbClr val="FFFFFF"/>
+                </a:solidFill>
+              </a:defRPr>
+            </a:pPr>
+            <a:r>
+              <a:t>Sprint</a:t>
+            </a:r>
+          </a:p>
+          <a:p>
+            <a:r>
+              <a:t>Review</a:t>
+            </a:r>
+          </a:p>
+        </p:txBody>
+      </p:sp>
+      <p:sp>
+        <p:nvSpPr>
+          <p:cNvPr id="13" name="Right Arrow 12"/>
+          <p:cNvSpPr/>
+          <p:nvPr/>
+        </p:nvSpPr>
+        <p:spPr>
+          <a:xfrm>
+            <a:off x="7364577" y="2971800"/>
+            <a:ext cx="274320" cy="320040"/>
+          </a:xfrm>
+          <a:prstGeom prst="rightArrow">
+            <a:avLst/>
+          </a:prstGeom>
+          <a:solidFill>
+            <a:srgbClr val="BFBFBF"/>
+          </a:solidFill>
+          <a:ln>
+            <a:noFill/>
+          </a:ln>
+        </p:spPr>
+        <p:style>
+          <a:lnRef idx="1">
+            <a:schemeClr val="accent1"/>
+          </a:lnRef>
+          <a:fillRef idx="3">
+            <a:schemeClr val="accent1"/>
+          </a:fillRef>
+          <a:effectRef idx="2">
+            <a:schemeClr val="accent1"/>
+          </a:effectRef>
+          <a:fontRef idx="minor">
+            <a:schemeClr val="lt1"/>
+          </a:fontRef>
+        </p:style>
+        <p:txBody>
+          <a:bodyPr rtlCol="0" anchor="ctr"/>
+          <a:lstStyle/>
+          <a:p>
+            <a:pPr algn="ctr"/>
+          </a:p>
+        </p:txBody>
+      </p:sp>
+      <p:sp>
+        <p:nvSpPr>
+          <p:cNvPr id="14" name="Rounded Rectangle 13"/>
+          <p:cNvSpPr/>
+          <p:nvPr/>
+        </p:nvSpPr>
+        <p:spPr>
+          <a:xfrm>
+            <a:off x="7638897" y="2743200"/>
+            <a:ext cx="1131570" cy="868680"/>
+          </a:xfrm>
+          <a:prstGeom prst="roundRect">
+            <a:avLst/>
+          </a:prstGeom>
+          <a:solidFill>
+            <a:srgbClr val="A5A5A5"/>
+          </a:solidFill>
+          <a:ln>
+            <a:solidFill>
+              <a:srgbClr val="FFFFFF"/>
+            </a:solidFill>
+          </a:ln>
+        </p:spPr>
+        <p:style>
+          <a:lnRef idx="1">
+            <a:schemeClr val="accent1"/>
+          </a:lnRef>
+          <a:fillRef idx="3">
+            <a:schemeClr val="accent1"/>
+          </a:fillRef>
+          <a:effectRef idx="2">
+            <a:schemeClr val="accent1"/>
+          </a:effectRef>
+          <a:fontRef idx="minor">
+            <a:schemeClr val="lt1"/>
+          </a:fontRef>
+        </p:style>
+        <p:txBody>
+          <a:bodyPr rtlCol="0" anchor="ctr" wrap="square"/>
+          <a:lstStyle/>
+          <a:p>
+            <a:pPr algn="l">
+              <a:defRPr sz="1100" b="1">
+                <a:solidFill>
+                  <a:srgbClr val="FFFFFF"/>
+                </a:solidFill>
+              </a:defRPr>
+            </a:pPr>
+            <a:r>
+              <a:t>UAT</a:t>
+            </a:r>
+          </a:p>
+          <a:p>
+            <a:r>
+              <a:t>Window</a:t>
+            </a:r>
+          </a:p>
+        </p:txBody>
+      </p:sp>
+      <p:sp>
+        <p:nvSpPr>
+          <p:cNvPr id="15" name="Right Arrow 14"/>
+          <p:cNvSpPr/>
+          <p:nvPr/>
+        </p:nvSpPr>
+        <p:spPr>
+          <a:xfrm>
+            <a:off x="8770467" y="2971800"/>
+            <a:ext cx="274320" cy="320040"/>
+          </a:xfrm>
+          <a:prstGeom prst="rightArrow">
+            <a:avLst/>
+          </a:prstGeom>
+          <a:solidFill>
+            <a:srgbClr val="BFBFBF"/>
+          </a:solidFill>
+          <a:ln>
+            <a:noFill/>
+          </a:ln>
+        </p:spPr>
+        <p:style>
+          <a:lnRef idx="1">
+            <a:schemeClr val="accent1"/>
+          </a:lnRef>
+          <a:fillRef idx="3">
+            <a:schemeClr val="accent1"/>
+          </a:fillRef>
+          <a:effectRef idx="2">
+            <a:schemeClr val="accent1"/>
+          </a:effectRef>
+          <a:fontRef idx="minor">
+            <a:schemeClr val="lt1"/>
+          </a:fontRef>
+        </p:style>
+        <p:txBody>
+          <a:bodyPr rtlCol="0" anchor="ctr"/>
+          <a:lstStyle/>
+          <a:p>
+            <a:pPr algn="ctr"/>
+          </a:p>
+        </p:txBody>
+      </p:sp>
+      <p:sp>
+        <p:nvSpPr>
+          <p:cNvPr id="16" name="Rounded Rectangle 15"/>
+          <p:cNvSpPr/>
+          <p:nvPr/>
+        </p:nvSpPr>
+        <p:spPr>
+          <a:xfrm>
+            <a:off x="9044787" y="2743200"/>
+            <a:ext cx="1131570" cy="868680"/>
+          </a:xfrm>
+          <a:prstGeom prst="roundRect">
+            <a:avLst/>
+          </a:prstGeom>
+          <a:solidFill>
+            <a:srgbClr val="4472C4"/>
+          </a:solidFill>
+          <a:ln>
+            <a:solidFill>
+              <a:srgbClr val="FFFFFF"/>
+            </a:solidFill>
+          </a:ln>
+        </p:spPr>
+        <p:style>
+          <a:lnRef idx="1">
+            <a:schemeClr val="accent1"/>
+          </a:lnRef>
+          <a:fillRef idx="3">
+            <a:schemeClr val="accent1"/>
+          </a:fillRef>
+          <a:effectRef idx="2">
+            <a:schemeClr val="accent1"/>
+          </a:effectRef>
+          <a:fontRef idx="minor">
+            <a:schemeClr val="lt1"/>
+          </a:fontRef>
+        </p:style>
+        <p:txBody>
+          <a:bodyPr rtlCol="0" anchor="ctr" wrap="square"/>
+          <a:lstStyle/>
+          <a:p>
+            <a:pPr algn="l">
+              <a:defRPr sz="1100" b="1">
+                <a:solidFill>
+                  <a:srgbClr val="FFFFFF"/>
+                </a:solidFill>
+              </a:defRPr>
+            </a:pPr>
+            <a:r>
+              <a:t>Release</a:t>
+            </a:r>
+          </a:p>
+          <a:p>
+            <a:r>
+              <a:t>CAB</a:t>
+            </a:r>
+          </a:p>
+        </p:txBody>
+      </p:sp>
+      <p:sp>
+        <p:nvSpPr>
+          <p:cNvPr id="17" name="Right Arrow 16"/>
+          <p:cNvSpPr/>
+          <p:nvPr/>
+        </p:nvSpPr>
+        <p:spPr>
+          <a:xfrm>
+            <a:off x="10176357" y="2971800"/>
+            <a:ext cx="274320" cy="320040"/>
+          </a:xfrm>
+          <a:prstGeom prst="rightArrow">
+            <a:avLst/>
+          </a:prstGeom>
+          <a:solidFill>
+            <a:srgbClr val="BFBFBF"/>
+          </a:solidFill>
+          <a:ln>
+            <a:noFill/>
+          </a:ln>
+        </p:spPr>
+        <p:style>
+          <a:lnRef idx="1">
+            <a:schemeClr val="accent1"/>
+          </a:lnRef>
+          <a:fillRef idx="3">
+            <a:schemeClr val="accent1"/>
+          </a:fillRef>
+          <a:effectRef idx="2">
+            <a:schemeClr val="accent1"/>
+          </a:effectRef>
+          <a:fontRef idx="minor">
+            <a:schemeClr val="lt1"/>
+          </a:fontRef>
+        </p:style>
+        <p:txBody>
+          <a:bodyPr rtlCol="0" anchor="ctr"/>
+          <a:lstStyle/>
+          <a:p>
+            <a:pPr algn="ctr"/>
+          </a:p>
+        </p:txBody>
+      </p:sp>
+      <p:sp>
+        <p:nvSpPr>
+          <p:cNvPr id="18" name="Rounded Rectangle 17"/>
+          <p:cNvSpPr/>
+          <p:nvPr/>
+        </p:nvSpPr>
+        <p:spPr>
+          <a:xfrm>
+            <a:off x="10450677" y="2743200"/>
+            <a:ext cx="1131570" cy="868680"/>
+          </a:xfrm>
+          <a:prstGeom prst="roundRect">
+            <a:avLst/>
+          </a:prstGeom>
+          <a:solidFill>
+            <a:srgbClr val="7030A0"/>
+          </a:solidFill>
+          <a:ln>
+            <a:solidFill>
+              <a:srgbClr val="FFFFFF"/>
+            </a:solidFill>
+          </a:ln>
+        </p:spPr>
+        <p:style>
+          <a:lnRef idx="1">
+            <a:schemeClr val="accent1"/>
+          </a:lnRef>
+          <a:fillRef idx="3">
+            <a:schemeClr val="accent1"/>
+          </a:fillRef>
+          <a:effectRef idx="2">
+            <a:schemeClr val="accent1"/>
+          </a:effectRef>
+          <a:fontRef idx="minor">
+            <a:schemeClr val="lt1"/>
+          </a:fontRef>
+        </p:style>
+        <p:txBody>
+          <a:bodyPr rtlCol="0" anchor="ctr" wrap="square"/>
+          <a:lstStyle/>
+          <a:p>
+            <a:pPr algn="l">
+              <a:defRPr sz="1100" b="1">
+                <a:solidFill>
+                  <a:srgbClr val="FFFFFF"/>
+                </a:solidFill>
+              </a:defRPr>
+            </a:pPr>
+            <a:r>
+              <a:t>Retro</a:t>
             </a:r>
           </a:p>
         </p:txBody>
@@ -4212,7 +4208,7 @@
           <a:lstStyle/>
           <a:p>
             <a:r>
-              <a:t>Agile / Scrum — Where It Fits</a:t>
+              <a:t>Phase 4 — FSD (Functional Specification / FRD)</a:t>
             </a:r>
           </a:p>
         </p:txBody>
@@ -4233,39 +4229,38 @@
           <a:lstStyle/>
           <a:p>
             <a:r>
-              <a:t>Governance gates are OUTSIDE the sprint (BRD, FSD, CAB).</a:t>
-            </a:r>
-          </a:p>
-          <a:p>
-            <a:r>
-              <a:t>Scrum runs INSIDE build &amp; test phases.</a:t>
+              <a:t>BA + IT Product create FSD from accepted BRD</a:t>
+            </a:r>
+          </a:p>
+          <a:p>
+            <a:r>
+              <a:t>FSD contains:</a:t>
+            </a:r>
+          </a:p>
+          <a:p>
+            <a:r>
+              <a:t>  • Functional flows mapped to BRD to-be state</a:t>
+            </a:r>
+          </a:p>
+          <a:p>
+            <a:r>
+              <a:t>  • Interface &amp; system touchpoints (FE ONLINE, Finacle, LOS…)</a:t>
+            </a:r>
+          </a:p>
+          <a:p>
+            <a:r>
+              <a:t>  • Story breakdown with traceability ID → BRD-xxx</a:t>
+            </a:r>
+          </a:p>
+          <a:p>
+            <a:r>
+              <a:t>  • Non-functional: performance, security, audit trail</a:t>
             </a:r>
           </a:p>
           <a:p/>
           <a:p>
             <a:r>
-              <a:t>Epic     = Accepted BRD</a:t>
-            </a:r>
-          </a:p>
-          <a:p>
-            <a:r>
-              <a:t>Feature  = FSD capability group</a:t>
-            </a:r>
-          </a:p>
-          <a:p>
-            <a:r>
-              <a:t>Story    = Implementable unit with AC</a:t>
-            </a:r>
-          </a:p>
-          <a:p>
-            <a:r>
-              <a:t>Task     = Dev work item</a:t>
-            </a:r>
-          </a:p>
-          <a:p/>
-          <a:p>
-            <a:r>
-              <a:t>2-week sprints typical; release may span 1–2 sprints + UAT window</a:t>
+              <a:t>Gate: no sprint planning without FSD linked to BRD</a:t>
             </a:r>
           </a:p>
         </p:txBody>
@@ -4304,7 +4299,7 @@
           <a:lstStyle/>
           <a:p>
             <a:r>
-              <a:t>Scrum Roles at FE Credit</a:t>
+              <a:t>Agile / Scrum — Where It Fits</a:t>
             </a:r>
           </a:p>
         </p:txBody>
@@ -4325,32 +4320,39 @@
           <a:lstStyle/>
           <a:p>
             <a:r>
-              <a:t>Product Owner (IT Product)    Prioritizes backlog; accepts sprint output</a:t>
-            </a:r>
-          </a:p>
-          <a:p>
-            <a:r>
-              <a:t>Scrum Master (Dev Lead)       Facilitates ceremonies; removes blockers</a:t>
-            </a:r>
-          </a:p>
-          <a:p>
-            <a:r>
-              <a:t>Development Team            Build, unit test, support SIT fixes</a:t>
-            </a:r>
-          </a:p>
-          <a:p>
-            <a:r>
-              <a:t>BA                          FSD, story refinement, UAT support</a:t>
-            </a:r>
-          </a:p>
-          <a:p>
-            <a:r>
-              <a:t>IT Ops Manager                Release discipline, CAB, hypercare</a:t>
-            </a:r>
-          </a:p>
-          <a:p>
-            <a:r>
-              <a:t>Business Sponsor              UAT accountability; go-live sign-off</a:t>
+              <a:t>Governance gates are OUTSIDE the sprint (BRD, FSD, CAB).</a:t>
+            </a:r>
+          </a:p>
+          <a:p>
+            <a:r>
+              <a:t>Scrum runs INSIDE build &amp; test phases.</a:t>
+            </a:r>
+          </a:p>
+          <a:p/>
+          <a:p>
+            <a:r>
+              <a:t>Epic     = Accepted BRD</a:t>
+            </a:r>
+          </a:p>
+          <a:p>
+            <a:r>
+              <a:t>Feature  = FSD capability group</a:t>
+            </a:r>
+          </a:p>
+          <a:p>
+            <a:r>
+              <a:t>Story    = Implementable unit with AC</a:t>
+            </a:r>
+          </a:p>
+          <a:p>
+            <a:r>
+              <a:t>Task     = Dev work item</a:t>
+            </a:r>
+          </a:p>
+          <a:p/>
+          <a:p>
+            <a:r>
+              <a:t>2-week sprints typical; release may span 1–2 sprints + UAT window</a:t>
             </a:r>
           </a:p>
         </p:txBody>
@@ -4389,7 +4391,7 @@
           <a:lstStyle/>
           <a:p>
             <a:r>
-              <a:t>Backlog Hierarchy</a:t>
+              <a:t>Scrum Roles at FE Credit</a:t>
             </a:r>
           </a:p>
         </p:txBody>
@@ -4410,38 +4412,32 @@
           <a:lstStyle/>
           <a:p>
             <a:r>
-              <a:t>Product Backlog (prioritized by IT Product)</a:t>
-            </a:r>
-          </a:p>
-          <a:p>
-            <a:r>
-              <a:t>  └── Epic [BRD-2026-0042] POS lending visibility</a:t>
-            </a:r>
-          </a:p>
-          <a:p>
-            <a:r>
-              <a:t>        └── Feature [FSD-3.2] Approval status API to POS</a:t>
-            </a:r>
-          </a:p>
-          <a:p>
-            <a:r>
-              <a:t>              └── Story [US-101] Display pre-approved amount</a:t>
-            </a:r>
-          </a:p>
-          <a:p>
-            <a:r>
-              <a:t>              └── Story [US-102] Handle expired pre-approval</a:t>
-            </a:r>
-          </a:p>
-          <a:p>
-            <a:r>
-              <a:t>                    └── Tasks: dev, test, docs</a:t>
-            </a:r>
-          </a:p>
-          <a:p/>
-          <a:p>
-            <a:r>
-              <a:t>Every story must reference BRD acceptance criteria IDs</a:t>
+              <a:t>Product Owner (IT Product)    Prioritizes backlog; accepts sprint output</a:t>
+            </a:r>
+          </a:p>
+          <a:p>
+            <a:r>
+              <a:t>Scrum Master (Dev Lead)       Facilitates ceremonies; removes blockers</a:t>
+            </a:r>
+          </a:p>
+          <a:p>
+            <a:r>
+              <a:t>Development Team            Build, unit test, support SIT fixes</a:t>
+            </a:r>
+          </a:p>
+          <a:p>
+            <a:r>
+              <a:t>BA                          FSD, story refinement, UAT support</a:t>
+            </a:r>
+          </a:p>
+          <a:p>
+            <a:r>
+              <a:t>IT Ops Manager                Release discipline, CAB, hypercare</a:t>
+            </a:r>
+          </a:p>
+          <a:p>
+            <a:r>
+              <a:t>Business Sponsor              UAT accountability; go-live sign-off</a:t>
             </a:r>
           </a:p>
         </p:txBody>
@@ -4480,7 +4476,7 @@
           <a:lstStyle/>
           <a:p>
             <a:r>
-              <a:t>Sprint Planning — Entry Checklist</a:t>
+              <a:t>Backlog Hierarchy</a:t>
             </a:r>
           </a:p>
         </p:txBody>
@@ -4501,37 +4497,38 @@
           <a:lstStyle/>
           <a:p>
             <a:r>
-              <a:t>☐ BRD accepted (score ≥ 80%) and linked</a:t>
-            </a:r>
-          </a:p>
-          <a:p>
-            <a:r>
-              <a:t>☐ FSD approved for this epic / feature</a:t>
-            </a:r>
-          </a:p>
-          <a:p>
-            <a:r>
-              <a:t>☐ GRC / Legal review complete (if flagged)</a:t>
-            </a:r>
-          </a:p>
-          <a:p>
-            <a:r>
-              <a:t>☐ IT-Security review complete (if Restricted / integration)</a:t>
-            </a:r>
-          </a:p>
-          <a:p>
-            <a:r>
-              <a:t>☐ Stories have clear AC and testable outcomes</a:t>
-            </a:r>
-          </a:p>
-          <a:p>
-            <a:r>
-              <a:t>☐ Team capacity confirmed; no conflicting release</a:t>
-            </a:r>
-          </a:p>
-          <a:p>
-            <a:r>
-              <a:t>☐ Ops aware of target UAT / deploy window</a:t>
+              <a:t>Product Backlog (prioritized by IT Product)</a:t>
+            </a:r>
+          </a:p>
+          <a:p>
+            <a:r>
+              <a:t>  └── Epic [BRD-2026-0042] POS lending visibility</a:t>
+            </a:r>
+          </a:p>
+          <a:p>
+            <a:r>
+              <a:t>        └── Feature [FSD-3.2] Approval status API to POS</a:t>
+            </a:r>
+          </a:p>
+          <a:p>
+            <a:r>
+              <a:t>              └── Story [US-101] Display pre-approved amount</a:t>
+            </a:r>
+          </a:p>
+          <a:p>
+            <a:r>
+              <a:t>              └── Story [US-102] Handle expired pre-approval</a:t>
+            </a:r>
+          </a:p>
+          <a:p>
+            <a:r>
+              <a:t>                    └── Tasks: dev, test, docs</a:t>
+            </a:r>
+          </a:p>
+          <a:p/>
+          <a:p>
+            <a:r>
+              <a:t>Every story must reference BRD acceptance criteria IDs</a:t>
             </a:r>
           </a:p>
         </p:txBody>
@@ -4570,7 +4567,7 @@
           <a:lstStyle/>
           <a:p>
             <a:r>
-              <a:t>Scrum Ceremonies Inside Delivery</a:t>
+              <a:t>Sprint Planning — Entry Checklist</a:t>
             </a:r>
           </a:p>
         </p:txBody>
@@ -4591,87 +4588,37 @@
           <a:lstStyle/>
           <a:p>
             <a:r>
-              <a:t>SPRINT N (typically 2 weeks)</a:t>
-            </a:r>
-          </a:p>
-          <a:p>
-            <a:r>
-              <a:t>──────────────────────────────────────────────────</a:t>
-            </a:r>
-          </a:p>
-          <a:p>
-            <a:r>
-              <a:t>Mon     Sprint Planning     Pull stories from FSD → sprint backlog</a:t>
-            </a:r>
-          </a:p>
-          <a:p>
-            <a:r>
-              <a:t>        Gate: BRD accepted, FSD linked, flags clear</a:t>
-            </a:r>
-          </a:p>
-          <a:p>
-            <a:r>
-              <a:t>Daily   Stand-up (15 min)   Dev + SM + Ops (deploy blockers)</a:t>
-            </a:r>
-          </a:p>
-          <a:p>
-            <a:r>
-              <a:t>        Wed   Mid-sprint      BA clarification; no new scope without change</a:t>
-            </a:r>
-          </a:p>
-          <a:p>
-            <a:r>
-              <a:t>Fri     Code complete       Unit tests + SIT entry</a:t>
-            </a:r>
-          </a:p>
-          <a:p>
-            <a:r>
-              <a:t>──────────────────────────────────────────────────</a:t>
-            </a:r>
-          </a:p>
-          <a:p>
-            <a:r>
-              <a:t>SPRINT N+1 or Release sprint</a:t>
-            </a:r>
-          </a:p>
-          <a:p>
-            <a:r>
-              <a:t>Mon     SIT / QA regression QA exit criteria</a:t>
-            </a:r>
-          </a:p>
-          <a:p>
-            <a:r>
-              <a:t>Wed     UAT window          Business tests BRD acceptance criteria</a:t>
-            </a:r>
-          </a:p>
-          <a:p>
-            <a:r>
-              <a:t>Thu     Sprint Review       Demo to Sponsor delegate</a:t>
-            </a:r>
-          </a:p>
-          <a:p>
-            <a:r>
-              <a:t>Fri     Retrospective       Process improvement</a:t>
-            </a:r>
-          </a:p>
-          <a:p>
-            <a:r>
-              <a:t>──────────────────────────────────────────────────</a:t>
-            </a:r>
-          </a:p>
-          <a:p>
-            <a:r>
-              <a:t>RELEASE WEEK (may align with sprint boundary)</a:t>
-            </a:r>
-          </a:p>
-          <a:p>
-            <a:r>
-              <a:t>        Release readiness   Ops checklist + CAB (IT-Governance)</a:t>
-            </a:r>
-          </a:p>
-          <a:p>
-            <a:r>
-              <a:t>        Ship to production  Deploy + verify + hypercare handover</a:t>
+              <a:t>☐ BRD accepted (score ≥ 80%) and linked</a:t>
+            </a:r>
+          </a:p>
+          <a:p>
+            <a:r>
+              <a:t>☐ FSD approved for this epic / feature</a:t>
+            </a:r>
+          </a:p>
+          <a:p>
+            <a:r>
+              <a:t>☐ GRC / Legal review complete (if flagged)</a:t>
+            </a:r>
+          </a:p>
+          <a:p>
+            <a:r>
+              <a:t>☐ IT-Security review complete (if Restricted / integration)</a:t>
+            </a:r>
+          </a:p>
+          <a:p>
+            <a:r>
+              <a:t>☐ Stories have clear AC and testable outcomes</a:t>
+            </a:r>
+          </a:p>
+          <a:p>
+            <a:r>
+              <a:t>☐ Team capacity confirmed; no conflicting release</a:t>
+            </a:r>
+          </a:p>
+          <a:p>
+            <a:r>
+              <a:t>☐ Ops aware of target UAT / deploy window</a:t>
             </a:r>
           </a:p>
         </p:txBody>
@@ -4710,7 +4657,7 @@
           <a:lstStyle/>
           <a:p>
             <a:r>
-              <a:t>Definition of Done — Development Team</a:t>
+              <a:t>Scrum Ceremonies Inside Delivery</a:t>
             </a:r>
           </a:p>
         </p:txBody>
@@ -4731,37 +4678,87 @@
           <a:lstStyle/>
           <a:p>
             <a:r>
-              <a:t>☐ Code complete + peer review</a:t>
-            </a:r>
-          </a:p>
-          <a:p>
-            <a:r>
-              <a:t>☐ Unit tests pass; coverage per team standard</a:t>
-            </a:r>
-          </a:p>
-          <a:p>
-            <a:r>
-              <a:t>☐ Traceability: story → BRD AC → test case</a:t>
-            </a:r>
-          </a:p>
-          <a:p>
-            <a:r>
-              <a:t>☐ SIT-ready build deployed to test environment</a:t>
-            </a:r>
-          </a:p>
-          <a:p>
-            <a:r>
-              <a:t>☐ Release notes draft for Ops</a:t>
-            </a:r>
-          </a:p>
-          <a:p>
-            <a:r>
-              <a:t>☐ No open Critical/High defects for in-scope stories</a:t>
-            </a:r>
-          </a:p>
-          <a:p>
-            <a:r>
-              <a:t>☐ Security scan clean or exception recorded (IT-Security)</a:t>
+              <a:t>SPRINT N (typically 2 weeks)</a:t>
+            </a:r>
+          </a:p>
+          <a:p>
+            <a:r>
+              <a:t>──────────────────────────────────────────────────</a:t>
+            </a:r>
+          </a:p>
+          <a:p>
+            <a:r>
+              <a:t>Mon     Sprint Planning     Pull stories from FSD → sprint backlog</a:t>
+            </a:r>
+          </a:p>
+          <a:p>
+            <a:r>
+              <a:t>        Gate: BRD accepted, FSD linked, flags clear</a:t>
+            </a:r>
+          </a:p>
+          <a:p>
+            <a:r>
+              <a:t>Daily   Stand-up (15 min)   Dev + SM + Ops (deploy blockers)</a:t>
+            </a:r>
+          </a:p>
+          <a:p>
+            <a:r>
+              <a:t>        Wed   Mid-sprint      BA clarification; no new scope without change</a:t>
+            </a:r>
+          </a:p>
+          <a:p>
+            <a:r>
+              <a:t>Fri     Code complete       Unit tests + SIT entry</a:t>
+            </a:r>
+          </a:p>
+          <a:p>
+            <a:r>
+              <a:t>──────────────────────────────────────────────────</a:t>
+            </a:r>
+          </a:p>
+          <a:p>
+            <a:r>
+              <a:t>SPRINT N+1 or Release sprint</a:t>
+            </a:r>
+          </a:p>
+          <a:p>
+            <a:r>
+              <a:t>Mon     SIT / QA regression QA exit criteria</a:t>
+            </a:r>
+          </a:p>
+          <a:p>
+            <a:r>
+              <a:t>Wed     UAT window          Business tests BRD acceptance criteria</a:t>
+            </a:r>
+          </a:p>
+          <a:p>
+            <a:r>
+              <a:t>Thu     Sprint Review       Demo to Sponsor delegate</a:t>
+            </a:r>
+          </a:p>
+          <a:p>
+            <a:r>
+              <a:t>Fri     Retrospective       Process improvement</a:t>
+            </a:r>
+          </a:p>
+          <a:p>
+            <a:r>
+              <a:t>──────────────────────────────────────────────────</a:t>
+            </a:r>
+          </a:p>
+          <a:p>
+            <a:r>
+              <a:t>RELEASE WEEK (may align with sprint boundary)</a:t>
+            </a:r>
+          </a:p>
+          <a:p>
+            <a:r>
+              <a:t>        Release readiness   Ops checklist + CAB (IT-Governance)</a:t>
+            </a:r>
+          </a:p>
+          <a:p>
+            <a:r>
+              <a:t>        Ship to production  Deploy + verify + hypercare handover</a:t>
             </a:r>
           </a:p>
         </p:txBody>
@@ -4800,7 +4797,7 @@
           <a:lstStyle/>
           <a:p>
             <a:r>
-              <a:t>Phase 5 — Test (SIT / QA)</a:t>
+              <a:t>Definition of Done — Development Team</a:t>
             </a:r>
           </a:p>
         </p:txBody>
@@ -4821,40 +4818,37 @@
           <a:lstStyle/>
           <a:p>
             <a:r>
-              <a:t>QA executes SIT against FSD + BRD acceptance criteria</a:t>
-            </a:r>
-          </a:p>
-          <a:p/>
-          <a:p>
-            <a:r>
-              <a:t>Flow: Unit tests (Dev) → SIT (QA) → Regression → Defect fix loop</a:t>
-            </a:r>
-          </a:p>
-          <a:p/>
-          <a:p>
-            <a:r>
-              <a:t>Exit criteria:</a:t>
-            </a:r>
-          </a:p>
-          <a:p>
-            <a:r>
-              <a:t>  • All in-scope test cases Pass</a:t>
-            </a:r>
-          </a:p>
-          <a:p>
-            <a:r>
-              <a:t>  • No open Sev-1 / Sev-2 defects</a:t>
-            </a:r>
-          </a:p>
-          <a:p>
-            <a:r>
-              <a:t>  • Test summary report attached to release record</a:t>
-            </a:r>
-          </a:p>
-          <a:p/>
-          <a:p>
-            <a:r>
-              <a:t>Then → UAT environment ready for Business</a:t>
+              <a:t>☐ Code complete + peer review</a:t>
+            </a:r>
+          </a:p>
+          <a:p>
+            <a:r>
+              <a:t>☐ Unit tests pass; coverage per team standard</a:t>
+            </a:r>
+          </a:p>
+          <a:p>
+            <a:r>
+              <a:t>☐ Traceability: story → BRD AC → test case</a:t>
+            </a:r>
+          </a:p>
+          <a:p>
+            <a:r>
+              <a:t>☐ SIT-ready build deployed to test environment</a:t>
+            </a:r>
+          </a:p>
+          <a:p>
+            <a:r>
+              <a:t>☐ Release notes draft for Ops</a:t>
+            </a:r>
+          </a:p>
+          <a:p>
+            <a:r>
+              <a:t>☐ No open Critical/High defects for in-scope stories</a:t>
+            </a:r>
+          </a:p>
+          <a:p>
+            <a:r>
+              <a:t>☐ Security scan clean or exception recorded (IT-Security)</a:t>
             </a:r>
           </a:p>
         </p:txBody>
@@ -4968,7 +4962,7 @@
           <a:lstStyle/>
           <a:p>
             <a:r>
-              <a:t>Phase 6 — UAT (Business Validation)</a:t>
+              <a:t>Phase 5 — Test (SIT / QA)</a:t>
             </a:r>
           </a:p>
         </p:txBody>
@@ -4989,34 +4983,40 @@
           <a:lstStyle/>
           <a:p>
             <a:r>
-              <a:t>Business executes UAT scripts derived from BRD Section M</a:t>
-            </a:r>
-          </a:p>
-          <a:p>
-            <a:r>
-              <a:t>  Given / When / Then — objective pass/fail</a:t>
+              <a:t>QA executes SIT against FSD + BRD acceptance criteria</a:t>
             </a:r>
           </a:p>
           <a:p/>
           <a:p>
             <a:r>
-              <a:t>IT provides: UAT environment, test data, defect fixes</a:t>
-            </a:r>
-          </a:p>
-          <a:p>
-            <a:r>
-              <a:t>Business provides: testers, sign-off, edge-case validation</a:t>
+              <a:t>Flow: Unit tests (Dev) → SIT (QA) → Regression → Defect fix loop</a:t>
             </a:r>
           </a:p>
           <a:p/>
           <a:p>
             <a:r>
-              <a:t>Gate: Sponsor (or delegate) signs UAT record</a:t>
-            </a:r>
-          </a:p>
-          <a:p>
-            <a:r>
-              <a:t>IT does NOT accept on behalf of business</a:t>
+              <a:t>Exit criteria:</a:t>
+            </a:r>
+          </a:p>
+          <a:p>
+            <a:r>
+              <a:t>  • All in-scope test cases Pass</a:t>
+            </a:r>
+          </a:p>
+          <a:p>
+            <a:r>
+              <a:t>  • No open Sev-1 / Sev-2 defects</a:t>
+            </a:r>
+          </a:p>
+          <a:p>
+            <a:r>
+              <a:t>  • Test summary report attached to release record</a:t>
+            </a:r>
+          </a:p>
+          <a:p/>
+          <a:p>
+            <a:r>
+              <a:t>Then → UAT environment ready for Business</a:t>
             </a:r>
           </a:p>
         </p:txBody>
@@ -5055,7 +5055,7 @@
           <a:lstStyle/>
           <a:p>
             <a:r>
-              <a:t>Phase 7 — Ship (Release to Production)</a:t>
+              <a:t>Phase 6 — UAT (Business Validation)</a:t>
             </a:r>
           </a:p>
         </p:txBody>
@@ -5076,38 +5076,34 @@
           <a:lstStyle/>
           <a:p>
             <a:r>
-              <a:t>1. Release readiness review (Ops checklist)</a:t>
-            </a:r>
-          </a:p>
-          <a:p>
-            <a:r>
-              <a:t>2. Change Request submitted — linked BRD, FSD, UAT sign-off</a:t>
-            </a:r>
-          </a:p>
-          <a:p>
-            <a:r>
-              <a:t>3. CAB approval (IT-Governance) — IT-Security if flagged</a:t>
-            </a:r>
-          </a:p>
-          <a:p>
-            <a:r>
-              <a:t>4. Deploy via approved pipeline / runbook</a:t>
-            </a:r>
-          </a:p>
-          <a:p>
-            <a:r>
-              <a:t>5. Post-deploy verification (smoke test + monitoring)</a:t>
-            </a:r>
-          </a:p>
-          <a:p>
-            <a:r>
-              <a:t>6. CMDB / release record updated</a:t>
+              <a:t>Business executes UAT scripts derived from BRD Section M</a:t>
+            </a:r>
+          </a:p>
+          <a:p>
+            <a:r>
+              <a:t>  Given / When / Then — objective pass/fail</a:t>
             </a:r>
           </a:p>
           <a:p/>
           <a:p>
             <a:r>
-              <a:t>Hard gate: no production deploy without UAT + CAB</a:t>
+              <a:t>IT provides: UAT environment, test data, defect fixes</a:t>
+            </a:r>
+          </a:p>
+          <a:p>
+            <a:r>
+              <a:t>Business provides: testers, sign-off, edge-case validation</a:t>
+            </a:r>
+          </a:p>
+          <a:p/>
+          <a:p>
+            <a:r>
+              <a:t>Gate: Sponsor (or delegate) signs UAT record</a:t>
+            </a:r>
+          </a:p>
+          <a:p>
+            <a:r>
+              <a:t>IT does NOT accept on behalf of business</a:t>
             </a:r>
           </a:p>
         </p:txBody>
@@ -5146,7 +5142,7 @@
           <a:lstStyle/>
           <a:p>
             <a:r>
-              <a:t>Phase 8 — Operations Support</a:t>
+              <a:t>Phase 7 — Ship (Release to Production)</a:t>
             </a:r>
           </a:p>
         </p:txBody>
@@ -5167,48 +5163,38 @@
           <a:lstStyle/>
           <a:p>
             <a:r>
-              <a:t>HYPERCARE (T+1 to T+14)</a:t>
-            </a:r>
-          </a:p>
-          <a:p>
-            <a:r>
-              <a:t>  • Ops war room for Critical releases</a:t>
-            </a:r>
-          </a:p>
-          <a:p>
-            <a:r>
-              <a:t>  • Dev on standby for defects</a:t>
-            </a:r>
-          </a:p>
-          <a:p>
-            <a:r>
-              <a:t>  • Daily check with Business Sponsor</a:t>
+              <a:t>1. Release readiness review (Ops checklist)</a:t>
+            </a:r>
+          </a:p>
+          <a:p>
+            <a:r>
+              <a:t>2. Change Request submitted — linked BRD, FSD, UAT sign-off</a:t>
+            </a:r>
+          </a:p>
+          <a:p>
+            <a:r>
+              <a:t>3. CAB approval (IT-Governance) — IT-Security if flagged</a:t>
+            </a:r>
+          </a:p>
+          <a:p>
+            <a:r>
+              <a:t>4. Deploy via approved pipeline / runbook</a:t>
+            </a:r>
+          </a:p>
+          <a:p>
+            <a:r>
+              <a:t>5. Post-deploy verification (smoke test + monitoring)</a:t>
+            </a:r>
+          </a:p>
+          <a:p>
+            <a:r>
+              <a:t>6. CMDB / release record updated</a:t>
             </a:r>
           </a:p>
           <a:p/>
           <a:p>
             <a:r>
-              <a:t>BAU HANDOVER</a:t>
-            </a:r>
-          </a:p>
-          <a:p>
-            <a:r>
-              <a:t>  • Service Desk knowledge article</a:t>
-            </a:r>
-          </a:p>
-          <a:p>
-            <a:r>
-              <a:t>  • Monitoring &amp; alerting configured</a:t>
-            </a:r>
-          </a:p>
-          <a:p>
-            <a:r>
-              <a:t>  • Incident routing defined</a:t>
-            </a:r>
-          </a:p>
-          <a:p>
-            <a:r>
-              <a:t>  • Evidence pack closed for Audit (13 artifacts)</a:t>
+              <a:t>Hard gate: no production deploy without UAT + CAB</a:t>
             </a:r>
           </a:p>
         </p:txBody>
@@ -5247,7 +5233,7 @@
           <a:lstStyle/>
           <a:p>
             <a:r>
-              <a:t>Release Readiness — Go / No-Go</a:t>
+              <a:t>Phase 8 — Operations Support</a:t>
             </a:r>
           </a:p>
         </p:txBody>
@@ -5268,47 +5254,48 @@
           <a:lstStyle/>
           <a:p>
             <a:r>
-              <a:t>☐ BRD accepted and linked</a:t>
-            </a:r>
-          </a:p>
-          <a:p>
-            <a:r>
-              <a:t>☐ FSD complete; stories closed</a:t>
-            </a:r>
-          </a:p>
-          <a:p>
-            <a:r>
-              <a:t>☐ SIT exit criteria met</a:t>
-            </a:r>
-          </a:p>
-          <a:p>
-            <a:r>
-              <a:t>☐ UAT signed by Business Sponsor</a:t>
-            </a:r>
-          </a:p>
-          <a:p>
-            <a:r>
-              <a:t>☐ CAB approved (IT-Governance)</a:t>
-            </a:r>
-          </a:p>
-          <a:p>
-            <a:r>
-              <a:t>☐ IT-Security sign-off (if required)</a:t>
-            </a:r>
-          </a:p>
-          <a:p>
-            <a:r>
-              <a:t>☐ Rollback plan tested</a:t>
-            </a:r>
-          </a:p>
-          <a:p>
-            <a:r>
-              <a:t>☐ Comms &amp; training complete (BRD Section K)</a:t>
-            </a:r>
-          </a:p>
-          <a:p>
-            <a:r>
-              <a:t>☐ Hypercare roster assigned</a:t>
+              <a:t>HYPERCARE (T+1 to T+14)</a:t>
+            </a:r>
+          </a:p>
+          <a:p>
+            <a:r>
+              <a:t>  • Ops war room for Critical releases</a:t>
+            </a:r>
+          </a:p>
+          <a:p>
+            <a:r>
+              <a:t>  • Dev on standby for defects</a:t>
+            </a:r>
+          </a:p>
+          <a:p>
+            <a:r>
+              <a:t>  • Daily check with Business Sponsor</a:t>
+            </a:r>
+          </a:p>
+          <a:p/>
+          <a:p>
+            <a:r>
+              <a:t>BAU HANDOVER</a:t>
+            </a:r>
+          </a:p>
+          <a:p>
+            <a:r>
+              <a:t>  • Service Desk knowledge article</a:t>
+            </a:r>
+          </a:p>
+          <a:p>
+            <a:r>
+              <a:t>  • Monitoring &amp; alerting configured</a:t>
+            </a:r>
+          </a:p>
+          <a:p>
+            <a:r>
+              <a:t>  • Incident routing defined</a:t>
+            </a:r>
+          </a:p>
+          <a:p>
+            <a:r>
+              <a:t>  • Evidence pack closed for Audit (13 artifacts)</a:t>
             </a:r>
           </a:p>
         </p:txBody>
@@ -5347,815 +5334,68 @@
           <a:lstStyle/>
           <a:p>
             <a:r>
-              <a:t>Dual-Track: Governance + Agile Delivery</a:t>
-            </a:r>
-          </a:p>
-        </p:txBody>
-      </p:sp>
-      <p:sp>
-        <p:nvSpPr>
-          <p:cNvPr id="3" name="TextBox 2"/>
-          <p:cNvSpPr txBox="1"/>
-          <p:nvPr/>
-        </p:nvSpPr>
-        <p:spPr>
-          <a:xfrm>
-            <a:off x="365760" y="1325880"/>
-            <a:ext cx="3657600" cy="274320"/>
-          </a:xfrm>
-          <a:prstGeom prst="rect">
-            <a:avLst/>
-          </a:prstGeom>
-          <a:noFill/>
-        </p:spPr>
-        <p:txBody>
-          <a:bodyPr wrap="none">
-            <a:spAutoFit/>
-          </a:bodyPr>
-          <a:lstStyle/>
-          <a:p>
-            <a:pPr>
-              <a:defRPr b="1" sz="1300">
-                <a:solidFill>
-                  <a:srgbClr val="C00000"/>
-                </a:solidFill>
-              </a:defRPr>
-            </a:pPr>
-            <a:r>
-              <a:t>Governance &amp; assurance (parallel)</a:t>
-            </a:r>
-          </a:p>
-        </p:txBody>
-      </p:sp>
-      <p:sp>
-        <p:nvSpPr>
-          <p:cNvPr id="4" name="Rounded Rectangle 3"/>
-          <p:cNvSpPr/>
-          <p:nvPr/>
-        </p:nvSpPr>
-        <p:spPr>
-          <a:xfrm>
-            <a:off x="531723" y="1645920"/>
-            <a:ext cx="1417320" cy="685800"/>
-          </a:xfrm>
-          <a:prstGeom prst="roundRect">
-            <a:avLst/>
-          </a:prstGeom>
-          <a:solidFill>
-            <a:srgbClr val="C00000"/>
-          </a:solidFill>
-          <a:ln>
-            <a:solidFill>
-              <a:srgbClr val="FFFFFF"/>
-            </a:solidFill>
-          </a:ln>
-        </p:spPr>
-        <p:style>
-          <a:lnRef idx="1">
-            <a:schemeClr val="accent1"/>
-          </a:lnRef>
-          <a:fillRef idx="3">
-            <a:schemeClr val="accent1"/>
-          </a:fillRef>
-          <a:effectRef idx="2">
-            <a:schemeClr val="accent1"/>
-          </a:effectRef>
-          <a:fontRef idx="minor">
-            <a:schemeClr val="lt1"/>
-          </a:fontRef>
-        </p:style>
-        <p:txBody>
-          <a:bodyPr rtlCol="0" anchor="ctr"/>
-          <a:lstStyle/>
-          <a:p>
-            <a:pPr algn="l">
-              <a:defRPr sz="1000" b="1">
-                <a:solidFill>
-                  <a:srgbClr val="FFFFFF"/>
-                </a:solidFill>
-              </a:defRPr>
-            </a:pPr>
-            <a:r>
-              <a:t>BRD gate</a:t>
-            </a:r>
-          </a:p>
-        </p:txBody>
-      </p:sp>
-      <p:sp>
-        <p:nvSpPr>
-          <p:cNvPr id="5" name="Rounded Rectangle 4"/>
-          <p:cNvSpPr/>
-          <p:nvPr/>
-        </p:nvSpPr>
-        <p:spPr>
-          <a:xfrm>
-            <a:off x="2150211" y="1645920"/>
-            <a:ext cx="1417320" cy="685800"/>
-          </a:xfrm>
-          <a:prstGeom prst="roundRect">
-            <a:avLst/>
-          </a:prstGeom>
-          <a:solidFill>
-            <a:srgbClr val="C00000"/>
-          </a:solidFill>
-          <a:ln>
-            <a:solidFill>
-              <a:srgbClr val="FFFFFF"/>
-            </a:solidFill>
-          </a:ln>
-        </p:spPr>
-        <p:style>
-          <a:lnRef idx="1">
-            <a:schemeClr val="accent1"/>
-          </a:lnRef>
-          <a:fillRef idx="3">
-            <a:schemeClr val="accent1"/>
-          </a:fillRef>
-          <a:effectRef idx="2">
-            <a:schemeClr val="accent1"/>
-          </a:effectRef>
-          <a:fontRef idx="minor">
-            <a:schemeClr val="lt1"/>
-          </a:fontRef>
-        </p:style>
-        <p:txBody>
-          <a:bodyPr rtlCol="0" anchor="ctr"/>
-          <a:lstStyle/>
-          <a:p>
-            <a:pPr algn="l">
-              <a:defRPr sz="1000" b="1">
-                <a:solidFill>
-                  <a:srgbClr val="FFFFFF"/>
-                </a:solidFill>
-              </a:defRPr>
-            </a:pPr>
-            <a:r>
-              <a:t>GRC / Legal</a:t>
-            </a:r>
-          </a:p>
-        </p:txBody>
-      </p:sp>
-      <p:sp>
-        <p:nvSpPr>
-          <p:cNvPr id="6" name="Rounded Rectangle 5"/>
-          <p:cNvSpPr/>
-          <p:nvPr/>
-        </p:nvSpPr>
-        <p:spPr>
-          <a:xfrm>
-            <a:off x="3768699" y="1645920"/>
-            <a:ext cx="1417320" cy="685800"/>
-          </a:xfrm>
-          <a:prstGeom prst="roundRect">
-            <a:avLst/>
-          </a:prstGeom>
-          <a:solidFill>
-            <a:srgbClr val="C00000"/>
-          </a:solidFill>
-          <a:ln>
-            <a:solidFill>
-              <a:srgbClr val="FFFFFF"/>
-            </a:solidFill>
-          </a:ln>
-        </p:spPr>
-        <p:style>
-          <a:lnRef idx="1">
-            <a:schemeClr val="accent1"/>
-          </a:lnRef>
-          <a:fillRef idx="3">
-            <a:schemeClr val="accent1"/>
-          </a:fillRef>
-          <a:effectRef idx="2">
-            <a:schemeClr val="accent1"/>
-          </a:effectRef>
-          <a:fontRef idx="minor">
-            <a:schemeClr val="lt1"/>
-          </a:fontRef>
-        </p:style>
-        <p:txBody>
-          <a:bodyPr rtlCol="0" anchor="ctr"/>
-          <a:lstStyle/>
-          <a:p>
-            <a:pPr algn="l">
-              <a:defRPr sz="1000" b="1">
-                <a:solidFill>
-                  <a:srgbClr val="FFFFFF"/>
-                </a:solidFill>
-              </a:defRPr>
-            </a:pPr>
-            <a:r>
-              <a:t>IT-Security</a:t>
-            </a:r>
-          </a:p>
-        </p:txBody>
-      </p:sp>
-      <p:sp>
-        <p:nvSpPr>
-          <p:cNvPr id="7" name="Rounded Rectangle 6"/>
-          <p:cNvSpPr/>
-          <p:nvPr/>
-        </p:nvSpPr>
-        <p:spPr>
-          <a:xfrm>
-            <a:off x="5387187" y="1645920"/>
-            <a:ext cx="1417320" cy="685800"/>
-          </a:xfrm>
-          <a:prstGeom prst="roundRect">
-            <a:avLst/>
-          </a:prstGeom>
-          <a:solidFill>
-            <a:srgbClr val="C00000"/>
-          </a:solidFill>
-          <a:ln>
-            <a:solidFill>
-              <a:srgbClr val="FFFFFF"/>
-            </a:solidFill>
-          </a:ln>
-        </p:spPr>
-        <p:style>
-          <a:lnRef idx="1">
-            <a:schemeClr val="accent1"/>
-          </a:lnRef>
-          <a:fillRef idx="3">
-            <a:schemeClr val="accent1"/>
-          </a:fillRef>
-          <a:effectRef idx="2">
-            <a:schemeClr val="accent1"/>
-          </a:effectRef>
-          <a:fontRef idx="minor">
-            <a:schemeClr val="lt1"/>
-          </a:fontRef>
-        </p:style>
-        <p:txBody>
-          <a:bodyPr rtlCol="0" anchor="ctr"/>
-          <a:lstStyle/>
-          <a:p>
-            <a:pPr algn="l">
-              <a:defRPr sz="1000" b="1">
-                <a:solidFill>
-                  <a:srgbClr val="FFFFFF"/>
-                </a:solidFill>
-              </a:defRPr>
-            </a:pPr>
-            <a:r>
-              <a:t>ARB</a:t>
-            </a:r>
-          </a:p>
-        </p:txBody>
-      </p:sp>
-      <p:sp>
-        <p:nvSpPr>
-          <p:cNvPr id="8" name="Rounded Rectangle 7"/>
-          <p:cNvSpPr/>
-          <p:nvPr/>
-        </p:nvSpPr>
-        <p:spPr>
-          <a:xfrm>
-            <a:off x="7005675" y="1645920"/>
-            <a:ext cx="1417320" cy="685800"/>
-          </a:xfrm>
-          <a:prstGeom prst="roundRect">
-            <a:avLst/>
-          </a:prstGeom>
-          <a:solidFill>
-            <a:srgbClr val="C00000"/>
-          </a:solidFill>
-          <a:ln>
-            <a:solidFill>
-              <a:srgbClr val="FFFFFF"/>
-            </a:solidFill>
-          </a:ln>
-        </p:spPr>
-        <p:style>
-          <a:lnRef idx="1">
-            <a:schemeClr val="accent1"/>
-          </a:lnRef>
-          <a:fillRef idx="3">
-            <a:schemeClr val="accent1"/>
-          </a:fillRef>
-          <a:effectRef idx="2">
-            <a:schemeClr val="accent1"/>
-          </a:effectRef>
-          <a:fontRef idx="minor">
-            <a:schemeClr val="lt1"/>
-          </a:fontRef>
-        </p:style>
-        <p:txBody>
-          <a:bodyPr rtlCol="0" anchor="ctr"/>
-          <a:lstStyle/>
-          <a:p>
-            <a:pPr algn="l">
-              <a:defRPr sz="1000" b="1">
-                <a:solidFill>
-                  <a:srgbClr val="FFFFFF"/>
-                </a:solidFill>
-              </a:defRPr>
-            </a:pPr>
-            <a:r>
-              <a:t>CAB</a:t>
-            </a:r>
-          </a:p>
-        </p:txBody>
-      </p:sp>
-      <p:sp>
-        <p:nvSpPr>
-          <p:cNvPr id="9" name="Rounded Rectangle 8"/>
-          <p:cNvSpPr/>
-          <p:nvPr/>
-        </p:nvSpPr>
-        <p:spPr>
-          <a:xfrm>
-            <a:off x="8624163" y="1645920"/>
-            <a:ext cx="1417320" cy="685800"/>
-          </a:xfrm>
-          <a:prstGeom prst="roundRect">
-            <a:avLst/>
-          </a:prstGeom>
-          <a:solidFill>
-            <a:srgbClr val="C00000"/>
-          </a:solidFill>
-          <a:ln>
-            <a:solidFill>
-              <a:srgbClr val="FFFFFF"/>
-            </a:solidFill>
-          </a:ln>
-        </p:spPr>
-        <p:style>
-          <a:lnRef idx="1">
-            <a:schemeClr val="accent1"/>
-          </a:lnRef>
-          <a:fillRef idx="3">
-            <a:schemeClr val="accent1"/>
-          </a:fillRef>
-          <a:effectRef idx="2">
-            <a:schemeClr val="accent1"/>
-          </a:effectRef>
-          <a:fontRef idx="minor">
-            <a:schemeClr val="lt1"/>
-          </a:fontRef>
-        </p:style>
-        <p:txBody>
-          <a:bodyPr rtlCol="0" anchor="ctr"/>
-          <a:lstStyle/>
-          <a:p>
-            <a:pPr algn="l">
-              <a:defRPr sz="1000" b="1">
-                <a:solidFill>
-                  <a:srgbClr val="FFFFFF"/>
-                </a:solidFill>
-              </a:defRPr>
-            </a:pPr>
-            <a:r>
-              <a:t>Audit evidence</a:t>
-            </a:r>
-          </a:p>
-        </p:txBody>
-      </p:sp>
-      <p:sp>
-        <p:nvSpPr>
-          <p:cNvPr id="10" name="TextBox 9"/>
-          <p:cNvSpPr txBox="1"/>
-          <p:nvPr/>
-        </p:nvSpPr>
-        <p:spPr>
-          <a:xfrm>
-            <a:off x="365760" y="2971800"/>
-            <a:ext cx="3657600" cy="274320"/>
-          </a:xfrm>
-          <a:prstGeom prst="rect">
-            <a:avLst/>
-          </a:prstGeom>
-          <a:noFill/>
-        </p:spPr>
-        <p:txBody>
-          <a:bodyPr wrap="none">
-            <a:spAutoFit/>
-          </a:bodyPr>
-          <a:lstStyle/>
-          <a:p>
-            <a:pPr>
-              <a:defRPr b="1" sz="1300">
-                <a:solidFill>
-                  <a:srgbClr val="007050"/>
-                </a:solidFill>
-              </a:defRPr>
-            </a:pPr>
-            <a:r>
-              <a:t>Agile delivery (Scrum)</a:t>
-            </a:r>
-          </a:p>
-        </p:txBody>
-      </p:sp>
-      <p:sp>
-        <p:nvSpPr>
-          <p:cNvPr id="11" name="Rounded Rectangle 10"/>
-          <p:cNvSpPr/>
-          <p:nvPr/>
-        </p:nvSpPr>
-        <p:spPr>
-          <a:xfrm>
-            <a:off x="531723" y="3291840"/>
-            <a:ext cx="1417320" cy="685800"/>
-          </a:xfrm>
-          <a:prstGeom prst="roundRect">
-            <a:avLst/>
-          </a:prstGeom>
-          <a:solidFill>
-            <a:srgbClr val="007050"/>
-          </a:solidFill>
-          <a:ln>
-            <a:solidFill>
-              <a:srgbClr val="FFFFFF"/>
-            </a:solidFill>
-          </a:ln>
-        </p:spPr>
-        <p:style>
-          <a:lnRef idx="1">
-            <a:schemeClr val="accent1"/>
-          </a:lnRef>
-          <a:fillRef idx="3">
-            <a:schemeClr val="accent1"/>
-          </a:fillRef>
-          <a:effectRef idx="2">
-            <a:schemeClr val="accent1"/>
-          </a:effectRef>
-          <a:fontRef idx="minor">
-            <a:schemeClr val="lt1"/>
-          </a:fontRef>
-        </p:style>
-        <p:txBody>
-          <a:bodyPr rtlCol="0" anchor="ctr"/>
-          <a:lstStyle/>
-          <a:p>
-            <a:pPr algn="l">
-              <a:defRPr sz="1000" b="1">
-                <a:solidFill>
-                  <a:srgbClr val="FFFFFF"/>
-                </a:solidFill>
-              </a:defRPr>
-            </a:pPr>
-            <a:r>
-              <a:t>FSD</a:t>
-            </a:r>
-          </a:p>
-        </p:txBody>
-      </p:sp>
-      <p:sp>
-        <p:nvSpPr>
-          <p:cNvPr id="12" name="Rounded Rectangle 11"/>
-          <p:cNvSpPr/>
-          <p:nvPr/>
-        </p:nvSpPr>
-        <p:spPr>
-          <a:xfrm>
-            <a:off x="2150211" y="3291840"/>
-            <a:ext cx="1417320" cy="685800"/>
-          </a:xfrm>
-          <a:prstGeom prst="roundRect">
-            <a:avLst/>
-          </a:prstGeom>
-          <a:solidFill>
-            <a:srgbClr val="007050"/>
-          </a:solidFill>
-          <a:ln>
-            <a:solidFill>
-              <a:srgbClr val="FFFFFF"/>
-            </a:solidFill>
-          </a:ln>
-        </p:spPr>
-        <p:style>
-          <a:lnRef idx="1">
-            <a:schemeClr val="accent1"/>
-          </a:lnRef>
-          <a:fillRef idx="3">
-            <a:schemeClr val="accent1"/>
-          </a:fillRef>
-          <a:effectRef idx="2">
-            <a:schemeClr val="accent1"/>
-          </a:effectRef>
-          <a:fontRef idx="minor">
-            <a:schemeClr val="lt1"/>
-          </a:fontRef>
-        </p:style>
-        <p:txBody>
-          <a:bodyPr rtlCol="0" anchor="ctr"/>
-          <a:lstStyle/>
-          <a:p>
-            <a:pPr algn="l">
-              <a:defRPr sz="1000" b="1">
-                <a:solidFill>
-                  <a:srgbClr val="FFFFFF"/>
-                </a:solidFill>
-              </a:defRPr>
-            </a:pPr>
-            <a:r>
-              <a:t>Sprint plan</a:t>
-            </a:r>
-          </a:p>
-        </p:txBody>
-      </p:sp>
-      <p:sp>
-        <p:nvSpPr>
-          <p:cNvPr id="13" name="Rounded Rectangle 12"/>
-          <p:cNvSpPr/>
-          <p:nvPr/>
-        </p:nvSpPr>
-        <p:spPr>
-          <a:xfrm>
-            <a:off x="3768699" y="3291840"/>
-            <a:ext cx="1417320" cy="685800"/>
-          </a:xfrm>
-          <a:prstGeom prst="roundRect">
-            <a:avLst/>
-          </a:prstGeom>
-          <a:solidFill>
-            <a:srgbClr val="007050"/>
-          </a:solidFill>
-          <a:ln>
-            <a:solidFill>
-              <a:srgbClr val="FFFFFF"/>
-            </a:solidFill>
-          </a:ln>
-        </p:spPr>
-        <p:style>
-          <a:lnRef idx="1">
-            <a:schemeClr val="accent1"/>
-          </a:lnRef>
-          <a:fillRef idx="3">
-            <a:schemeClr val="accent1"/>
-          </a:fillRef>
-          <a:effectRef idx="2">
-            <a:schemeClr val="accent1"/>
-          </a:effectRef>
-          <a:fontRef idx="minor">
-            <a:schemeClr val="lt1"/>
-          </a:fontRef>
-        </p:style>
-        <p:txBody>
-          <a:bodyPr rtlCol="0" anchor="ctr"/>
-          <a:lstStyle/>
-          <a:p>
-            <a:pPr algn="l">
-              <a:defRPr sz="1000" b="1">
-                <a:solidFill>
-                  <a:srgbClr val="FFFFFF"/>
-                </a:solidFill>
-              </a:defRPr>
-            </a:pPr>
-            <a:r>
-              <a:t>Build</a:t>
-            </a:r>
-          </a:p>
-        </p:txBody>
-      </p:sp>
-      <p:sp>
-        <p:nvSpPr>
-          <p:cNvPr id="14" name="Rounded Rectangle 13"/>
-          <p:cNvSpPr/>
-          <p:nvPr/>
-        </p:nvSpPr>
-        <p:spPr>
-          <a:xfrm>
-            <a:off x="5387187" y="3291840"/>
-            <a:ext cx="1417320" cy="685800"/>
-          </a:xfrm>
-          <a:prstGeom prst="roundRect">
-            <a:avLst/>
-          </a:prstGeom>
-          <a:solidFill>
-            <a:srgbClr val="007050"/>
-          </a:solidFill>
-          <a:ln>
-            <a:solidFill>
-              <a:srgbClr val="FFFFFF"/>
-            </a:solidFill>
-          </a:ln>
-        </p:spPr>
-        <p:style>
-          <a:lnRef idx="1">
-            <a:schemeClr val="accent1"/>
-          </a:lnRef>
-          <a:fillRef idx="3">
-            <a:schemeClr val="accent1"/>
-          </a:fillRef>
-          <a:effectRef idx="2">
-            <a:schemeClr val="accent1"/>
-          </a:effectRef>
-          <a:fontRef idx="minor">
-            <a:schemeClr val="lt1"/>
-          </a:fontRef>
-        </p:style>
-        <p:txBody>
-          <a:bodyPr rtlCol="0" anchor="ctr"/>
-          <a:lstStyle/>
-          <a:p>
-            <a:pPr algn="l">
-              <a:defRPr sz="1000" b="1">
-                <a:solidFill>
-                  <a:srgbClr val="FFFFFF"/>
-                </a:solidFill>
-              </a:defRPr>
-            </a:pPr>
-            <a:r>
-              <a:t>SIT</a:t>
-            </a:r>
-          </a:p>
-        </p:txBody>
-      </p:sp>
-      <p:sp>
-        <p:nvSpPr>
-          <p:cNvPr id="15" name="Rounded Rectangle 14"/>
-          <p:cNvSpPr/>
-          <p:nvPr/>
-        </p:nvSpPr>
-        <p:spPr>
-          <a:xfrm>
-            <a:off x="7005675" y="3291840"/>
-            <a:ext cx="1417320" cy="685800"/>
-          </a:xfrm>
-          <a:prstGeom prst="roundRect">
-            <a:avLst/>
-          </a:prstGeom>
-          <a:solidFill>
-            <a:srgbClr val="007050"/>
-          </a:solidFill>
-          <a:ln>
-            <a:solidFill>
-              <a:srgbClr val="FFFFFF"/>
-            </a:solidFill>
-          </a:ln>
-        </p:spPr>
-        <p:style>
-          <a:lnRef idx="1">
-            <a:schemeClr val="accent1"/>
-          </a:lnRef>
-          <a:fillRef idx="3">
-            <a:schemeClr val="accent1"/>
-          </a:fillRef>
-          <a:effectRef idx="2">
-            <a:schemeClr val="accent1"/>
-          </a:effectRef>
-          <a:fontRef idx="minor">
-            <a:schemeClr val="lt1"/>
-          </a:fontRef>
-        </p:style>
-        <p:txBody>
-          <a:bodyPr rtlCol="0" anchor="ctr"/>
-          <a:lstStyle/>
-          <a:p>
-            <a:pPr algn="l">
-              <a:defRPr sz="1000" b="1">
-                <a:solidFill>
-                  <a:srgbClr val="FFFFFF"/>
-                </a:solidFill>
-              </a:defRPr>
-            </a:pPr>
-            <a:r>
-              <a:t>UAT</a:t>
-            </a:r>
-          </a:p>
-        </p:txBody>
-      </p:sp>
-      <p:sp>
-        <p:nvSpPr>
-          <p:cNvPr id="16" name="Rounded Rectangle 15"/>
-          <p:cNvSpPr/>
-          <p:nvPr/>
-        </p:nvSpPr>
-        <p:spPr>
-          <a:xfrm>
-            <a:off x="8624163" y="3291840"/>
-            <a:ext cx="1417320" cy="685800"/>
-          </a:xfrm>
-          <a:prstGeom prst="roundRect">
-            <a:avLst/>
-          </a:prstGeom>
-          <a:solidFill>
-            <a:srgbClr val="007050"/>
-          </a:solidFill>
-          <a:ln>
-            <a:solidFill>
-              <a:srgbClr val="FFFFFF"/>
-            </a:solidFill>
-          </a:ln>
-        </p:spPr>
-        <p:style>
-          <a:lnRef idx="1">
-            <a:schemeClr val="accent1"/>
-          </a:lnRef>
-          <a:fillRef idx="3">
-            <a:schemeClr val="accent1"/>
-          </a:fillRef>
-          <a:effectRef idx="2">
-            <a:schemeClr val="accent1"/>
-          </a:effectRef>
-          <a:fontRef idx="minor">
-            <a:schemeClr val="lt1"/>
-          </a:fontRef>
-        </p:style>
-        <p:txBody>
-          <a:bodyPr rtlCol="0" anchor="ctr"/>
-          <a:lstStyle/>
-          <a:p>
-            <a:pPr algn="l">
-              <a:defRPr sz="1000" b="1">
-                <a:solidFill>
-                  <a:srgbClr val="FFFFFF"/>
-                </a:solidFill>
-              </a:defRPr>
-            </a:pPr>
-            <a:r>
-              <a:t>Ship</a:t>
-            </a:r>
-          </a:p>
-        </p:txBody>
-      </p:sp>
-      <p:sp>
-        <p:nvSpPr>
-          <p:cNvPr id="17" name="Rounded Rectangle 16"/>
-          <p:cNvSpPr/>
-          <p:nvPr/>
-        </p:nvSpPr>
-        <p:spPr>
-          <a:xfrm>
-            <a:off x="10242651" y="3291840"/>
-            <a:ext cx="1417320" cy="685800"/>
-          </a:xfrm>
-          <a:prstGeom prst="roundRect">
-            <a:avLst/>
-          </a:prstGeom>
-          <a:solidFill>
-            <a:srgbClr val="007050"/>
-          </a:solidFill>
-          <a:ln>
-            <a:solidFill>
-              <a:srgbClr val="FFFFFF"/>
-            </a:solidFill>
-          </a:ln>
-        </p:spPr>
-        <p:style>
-          <a:lnRef idx="1">
-            <a:schemeClr val="accent1"/>
-          </a:lnRef>
-          <a:fillRef idx="3">
-            <a:schemeClr val="accent1"/>
-          </a:fillRef>
-          <a:effectRef idx="2">
-            <a:schemeClr val="accent1"/>
-          </a:effectRef>
-          <a:fontRef idx="minor">
-            <a:schemeClr val="lt1"/>
-          </a:fontRef>
-        </p:style>
-        <p:txBody>
-          <a:bodyPr rtlCol="0" anchor="ctr"/>
-          <a:lstStyle/>
-          <a:p>
-            <a:pPr algn="l">
-              <a:defRPr sz="1000" b="1">
-                <a:solidFill>
-                  <a:srgbClr val="FFFFFF"/>
-                </a:solidFill>
-              </a:defRPr>
-            </a:pPr>
-            <a:r>
-              <a:t>Hypercare</a:t>
-            </a:r>
-          </a:p>
-        </p:txBody>
-      </p:sp>
-      <p:sp>
-        <p:nvSpPr>
-          <p:cNvPr id="18" name="TextBox 17"/>
-          <p:cNvSpPr txBox="1"/>
-          <p:nvPr/>
-        </p:nvSpPr>
-        <p:spPr>
-          <a:xfrm>
-            <a:off x="457200" y="4572000"/>
-            <a:ext cx="11247120" cy="1097280"/>
-          </a:xfrm>
-          <a:prstGeom prst="rect">
-            <a:avLst/>
-          </a:prstGeom>
-          <a:noFill/>
-        </p:spPr>
-        <p:txBody>
-          <a:bodyPr wrap="none">
-            <a:spAutoFit/>
-          </a:bodyPr>
-          <a:lstStyle/>
-          <a:p>
-            <a:pPr>
-              <a:defRPr sz="1400"/>
-            </a:pPr>
-            <a:r>
-              <a:t>Governance track can run in parallel — it does not wait for sprint end.</a:t>
-            </a:r>
-          </a:p>
-          <a:p>
-            <a:r>
-              <a:t>Delivery track runs in 2-week sprints; Ship only when BOTH tracks are green.</a:t>
+              <a:t>Release Readiness — Go / No-Go</a:t>
+            </a:r>
+          </a:p>
+        </p:txBody>
+      </p:sp>
+      <p:sp>
+        <p:nvSpPr>
+          <p:cNvPr id="3" name="Content Placeholder 2"/>
+          <p:cNvSpPr>
+            <a:spLocks noGrp="1"/>
+          </p:cNvSpPr>
+          <p:nvPr>
+            <p:ph idx="1"/>
+          </p:nvPr>
+        </p:nvSpPr>
+        <p:spPr/>
+        <p:txBody>
+          <a:bodyPr/>
+          <a:lstStyle/>
+          <a:p>
+            <a:r>
+              <a:t>☐ BRD accepted and linked</a:t>
+            </a:r>
+          </a:p>
+          <a:p>
+            <a:r>
+              <a:t>☐ FSD complete; stories closed</a:t>
+            </a:r>
+          </a:p>
+          <a:p>
+            <a:r>
+              <a:t>☐ SIT exit criteria met</a:t>
+            </a:r>
+          </a:p>
+          <a:p>
+            <a:r>
+              <a:t>☐ UAT signed by Business Sponsor</a:t>
+            </a:r>
+          </a:p>
+          <a:p>
+            <a:r>
+              <a:t>☐ CAB approved (IT-Governance)</a:t>
+            </a:r>
+          </a:p>
+          <a:p>
+            <a:r>
+              <a:t>☐ IT-Security sign-off (if required)</a:t>
+            </a:r>
+          </a:p>
+          <a:p>
+            <a:r>
+              <a:t>☐ Rollback plan tested</a:t>
+            </a:r>
+          </a:p>
+          <a:p>
+            <a:r>
+              <a:t>☐ Comms &amp; training complete (BRD Section K)</a:t>
+            </a:r>
+          </a:p>
+          <a:p>
+            <a:r>
+              <a:t>☐ Hypercare roster assigned</a:t>
             </a:r>
           </a:p>
         </p:txBody>
@@ -6194,53 +5434,815 @@
           <a:lstStyle/>
           <a:p>
             <a:r>
-              <a:t>Hard Gates — Non-Negotiable</a:t>
-            </a:r>
-          </a:p>
-        </p:txBody>
-      </p:sp>
-      <p:sp>
-        <p:nvSpPr>
-          <p:cNvPr id="3" name="Content Placeholder 2"/>
-          <p:cNvSpPr>
-            <a:spLocks noGrp="1"/>
-          </p:cNvSpPr>
-          <p:nvPr>
-            <p:ph idx="1"/>
-          </p:nvPr>
-        </p:nvSpPr>
-        <p:spPr/>
-        <p:txBody>
-          <a:bodyPr/>
-          <a:lstStyle/>
-          <a:p>
-            <a:r>
-              <a:t>1. No FSD / sprint work without accepted BRD (≥ 80%)</a:t>
-            </a:r>
-          </a:p>
-          <a:p>
-            <a:r>
-              <a:t>2. No story without traceability to BRD acceptance criteria</a:t>
-            </a:r>
-          </a:p>
-          <a:p>
-            <a:r>
-              <a:t>3. No UAT skip — business signs, not IT</a:t>
-            </a:r>
-          </a:p>
-          <a:p>
-            <a:r>
-              <a:t>4. No production deploy without CAB (IT-Governance)</a:t>
-            </a:r>
-          </a:p>
-          <a:p>
-            <a:r>
-              <a:t>5. No security bypass without IT-Security exception register</a:t>
-            </a:r>
-          </a:p>
-          <a:p>
-            <a:r>
-              <a:t>6. Email / chat is not intake for projects</a:t>
+              <a:t>Dual-Track: Governance + Agile Delivery</a:t>
+            </a:r>
+          </a:p>
+        </p:txBody>
+      </p:sp>
+      <p:sp>
+        <p:nvSpPr>
+          <p:cNvPr id="3" name="TextBox 2"/>
+          <p:cNvSpPr txBox="1"/>
+          <p:nvPr/>
+        </p:nvSpPr>
+        <p:spPr>
+          <a:xfrm>
+            <a:off x="365760" y="1325880"/>
+            <a:ext cx="3657600" cy="274320"/>
+          </a:xfrm>
+          <a:prstGeom prst="rect">
+            <a:avLst/>
+          </a:prstGeom>
+          <a:noFill/>
+        </p:spPr>
+        <p:txBody>
+          <a:bodyPr wrap="none">
+            <a:spAutoFit/>
+          </a:bodyPr>
+          <a:lstStyle/>
+          <a:p>
+            <a:pPr>
+              <a:defRPr b="1" sz="1300">
+                <a:solidFill>
+                  <a:srgbClr val="C00000"/>
+                </a:solidFill>
+              </a:defRPr>
+            </a:pPr>
+            <a:r>
+              <a:t>Governance &amp; assurance (parallel)</a:t>
+            </a:r>
+          </a:p>
+        </p:txBody>
+      </p:sp>
+      <p:sp>
+        <p:nvSpPr>
+          <p:cNvPr id="4" name="Rounded Rectangle 3"/>
+          <p:cNvSpPr/>
+          <p:nvPr/>
+        </p:nvSpPr>
+        <p:spPr>
+          <a:xfrm>
+            <a:off x="531723" y="1645920"/>
+            <a:ext cx="1417320" cy="685800"/>
+          </a:xfrm>
+          <a:prstGeom prst="roundRect">
+            <a:avLst/>
+          </a:prstGeom>
+          <a:solidFill>
+            <a:srgbClr val="C00000"/>
+          </a:solidFill>
+          <a:ln>
+            <a:solidFill>
+              <a:srgbClr val="FFFFFF"/>
+            </a:solidFill>
+          </a:ln>
+        </p:spPr>
+        <p:style>
+          <a:lnRef idx="1">
+            <a:schemeClr val="accent1"/>
+          </a:lnRef>
+          <a:fillRef idx="3">
+            <a:schemeClr val="accent1"/>
+          </a:fillRef>
+          <a:effectRef idx="2">
+            <a:schemeClr val="accent1"/>
+          </a:effectRef>
+          <a:fontRef idx="minor">
+            <a:schemeClr val="lt1"/>
+          </a:fontRef>
+        </p:style>
+        <p:txBody>
+          <a:bodyPr rtlCol="0" anchor="ctr"/>
+          <a:lstStyle/>
+          <a:p>
+            <a:pPr algn="l">
+              <a:defRPr sz="1000" b="1">
+                <a:solidFill>
+                  <a:srgbClr val="FFFFFF"/>
+                </a:solidFill>
+              </a:defRPr>
+            </a:pPr>
+            <a:r>
+              <a:t>BRD gate</a:t>
+            </a:r>
+          </a:p>
+        </p:txBody>
+      </p:sp>
+      <p:sp>
+        <p:nvSpPr>
+          <p:cNvPr id="5" name="Rounded Rectangle 4"/>
+          <p:cNvSpPr/>
+          <p:nvPr/>
+        </p:nvSpPr>
+        <p:spPr>
+          <a:xfrm>
+            <a:off x="2150211" y="1645920"/>
+            <a:ext cx="1417320" cy="685800"/>
+          </a:xfrm>
+          <a:prstGeom prst="roundRect">
+            <a:avLst/>
+          </a:prstGeom>
+          <a:solidFill>
+            <a:srgbClr val="C00000"/>
+          </a:solidFill>
+          <a:ln>
+            <a:solidFill>
+              <a:srgbClr val="FFFFFF"/>
+            </a:solidFill>
+          </a:ln>
+        </p:spPr>
+        <p:style>
+          <a:lnRef idx="1">
+            <a:schemeClr val="accent1"/>
+          </a:lnRef>
+          <a:fillRef idx="3">
+            <a:schemeClr val="accent1"/>
+          </a:fillRef>
+          <a:effectRef idx="2">
+            <a:schemeClr val="accent1"/>
+          </a:effectRef>
+          <a:fontRef idx="minor">
+            <a:schemeClr val="lt1"/>
+          </a:fontRef>
+        </p:style>
+        <p:txBody>
+          <a:bodyPr rtlCol="0" anchor="ctr"/>
+          <a:lstStyle/>
+          <a:p>
+            <a:pPr algn="l">
+              <a:defRPr sz="1000" b="1">
+                <a:solidFill>
+                  <a:srgbClr val="FFFFFF"/>
+                </a:solidFill>
+              </a:defRPr>
+            </a:pPr>
+            <a:r>
+              <a:t>GRC / Legal</a:t>
+            </a:r>
+          </a:p>
+        </p:txBody>
+      </p:sp>
+      <p:sp>
+        <p:nvSpPr>
+          <p:cNvPr id="6" name="Rounded Rectangle 5"/>
+          <p:cNvSpPr/>
+          <p:nvPr/>
+        </p:nvSpPr>
+        <p:spPr>
+          <a:xfrm>
+            <a:off x="3768699" y="1645920"/>
+            <a:ext cx="1417320" cy="685800"/>
+          </a:xfrm>
+          <a:prstGeom prst="roundRect">
+            <a:avLst/>
+          </a:prstGeom>
+          <a:solidFill>
+            <a:srgbClr val="C00000"/>
+          </a:solidFill>
+          <a:ln>
+            <a:solidFill>
+              <a:srgbClr val="FFFFFF"/>
+            </a:solidFill>
+          </a:ln>
+        </p:spPr>
+        <p:style>
+          <a:lnRef idx="1">
+            <a:schemeClr val="accent1"/>
+          </a:lnRef>
+          <a:fillRef idx="3">
+            <a:schemeClr val="accent1"/>
+          </a:fillRef>
+          <a:effectRef idx="2">
+            <a:schemeClr val="accent1"/>
+          </a:effectRef>
+          <a:fontRef idx="minor">
+            <a:schemeClr val="lt1"/>
+          </a:fontRef>
+        </p:style>
+        <p:txBody>
+          <a:bodyPr rtlCol="0" anchor="ctr"/>
+          <a:lstStyle/>
+          <a:p>
+            <a:pPr algn="l">
+              <a:defRPr sz="1000" b="1">
+                <a:solidFill>
+                  <a:srgbClr val="FFFFFF"/>
+                </a:solidFill>
+              </a:defRPr>
+            </a:pPr>
+            <a:r>
+              <a:t>IT-Security</a:t>
+            </a:r>
+          </a:p>
+        </p:txBody>
+      </p:sp>
+      <p:sp>
+        <p:nvSpPr>
+          <p:cNvPr id="7" name="Rounded Rectangle 6"/>
+          <p:cNvSpPr/>
+          <p:nvPr/>
+        </p:nvSpPr>
+        <p:spPr>
+          <a:xfrm>
+            <a:off x="5387187" y="1645920"/>
+            <a:ext cx="1417320" cy="685800"/>
+          </a:xfrm>
+          <a:prstGeom prst="roundRect">
+            <a:avLst/>
+          </a:prstGeom>
+          <a:solidFill>
+            <a:srgbClr val="C00000"/>
+          </a:solidFill>
+          <a:ln>
+            <a:solidFill>
+              <a:srgbClr val="FFFFFF"/>
+            </a:solidFill>
+          </a:ln>
+        </p:spPr>
+        <p:style>
+          <a:lnRef idx="1">
+            <a:schemeClr val="accent1"/>
+          </a:lnRef>
+          <a:fillRef idx="3">
+            <a:schemeClr val="accent1"/>
+          </a:fillRef>
+          <a:effectRef idx="2">
+            <a:schemeClr val="accent1"/>
+          </a:effectRef>
+          <a:fontRef idx="minor">
+            <a:schemeClr val="lt1"/>
+          </a:fontRef>
+        </p:style>
+        <p:txBody>
+          <a:bodyPr rtlCol="0" anchor="ctr"/>
+          <a:lstStyle/>
+          <a:p>
+            <a:pPr algn="l">
+              <a:defRPr sz="1000" b="1">
+                <a:solidFill>
+                  <a:srgbClr val="FFFFFF"/>
+                </a:solidFill>
+              </a:defRPr>
+            </a:pPr>
+            <a:r>
+              <a:t>ARB</a:t>
+            </a:r>
+          </a:p>
+        </p:txBody>
+      </p:sp>
+      <p:sp>
+        <p:nvSpPr>
+          <p:cNvPr id="8" name="Rounded Rectangle 7"/>
+          <p:cNvSpPr/>
+          <p:nvPr/>
+        </p:nvSpPr>
+        <p:spPr>
+          <a:xfrm>
+            <a:off x="7005675" y="1645920"/>
+            <a:ext cx="1417320" cy="685800"/>
+          </a:xfrm>
+          <a:prstGeom prst="roundRect">
+            <a:avLst/>
+          </a:prstGeom>
+          <a:solidFill>
+            <a:srgbClr val="C00000"/>
+          </a:solidFill>
+          <a:ln>
+            <a:solidFill>
+              <a:srgbClr val="FFFFFF"/>
+            </a:solidFill>
+          </a:ln>
+        </p:spPr>
+        <p:style>
+          <a:lnRef idx="1">
+            <a:schemeClr val="accent1"/>
+          </a:lnRef>
+          <a:fillRef idx="3">
+            <a:schemeClr val="accent1"/>
+          </a:fillRef>
+          <a:effectRef idx="2">
+            <a:schemeClr val="accent1"/>
+          </a:effectRef>
+          <a:fontRef idx="minor">
+            <a:schemeClr val="lt1"/>
+          </a:fontRef>
+        </p:style>
+        <p:txBody>
+          <a:bodyPr rtlCol="0" anchor="ctr"/>
+          <a:lstStyle/>
+          <a:p>
+            <a:pPr algn="l">
+              <a:defRPr sz="1000" b="1">
+                <a:solidFill>
+                  <a:srgbClr val="FFFFFF"/>
+                </a:solidFill>
+              </a:defRPr>
+            </a:pPr>
+            <a:r>
+              <a:t>CAB</a:t>
+            </a:r>
+          </a:p>
+        </p:txBody>
+      </p:sp>
+      <p:sp>
+        <p:nvSpPr>
+          <p:cNvPr id="9" name="Rounded Rectangle 8"/>
+          <p:cNvSpPr/>
+          <p:nvPr/>
+        </p:nvSpPr>
+        <p:spPr>
+          <a:xfrm>
+            <a:off x="8624163" y="1645920"/>
+            <a:ext cx="1417320" cy="685800"/>
+          </a:xfrm>
+          <a:prstGeom prst="roundRect">
+            <a:avLst/>
+          </a:prstGeom>
+          <a:solidFill>
+            <a:srgbClr val="C00000"/>
+          </a:solidFill>
+          <a:ln>
+            <a:solidFill>
+              <a:srgbClr val="FFFFFF"/>
+            </a:solidFill>
+          </a:ln>
+        </p:spPr>
+        <p:style>
+          <a:lnRef idx="1">
+            <a:schemeClr val="accent1"/>
+          </a:lnRef>
+          <a:fillRef idx="3">
+            <a:schemeClr val="accent1"/>
+          </a:fillRef>
+          <a:effectRef idx="2">
+            <a:schemeClr val="accent1"/>
+          </a:effectRef>
+          <a:fontRef idx="minor">
+            <a:schemeClr val="lt1"/>
+          </a:fontRef>
+        </p:style>
+        <p:txBody>
+          <a:bodyPr rtlCol="0" anchor="ctr"/>
+          <a:lstStyle/>
+          <a:p>
+            <a:pPr algn="l">
+              <a:defRPr sz="1000" b="1">
+                <a:solidFill>
+                  <a:srgbClr val="FFFFFF"/>
+                </a:solidFill>
+              </a:defRPr>
+            </a:pPr>
+            <a:r>
+              <a:t>Audit evidence</a:t>
+            </a:r>
+          </a:p>
+        </p:txBody>
+      </p:sp>
+      <p:sp>
+        <p:nvSpPr>
+          <p:cNvPr id="10" name="TextBox 9"/>
+          <p:cNvSpPr txBox="1"/>
+          <p:nvPr/>
+        </p:nvSpPr>
+        <p:spPr>
+          <a:xfrm>
+            <a:off x="365760" y="2971800"/>
+            <a:ext cx="3657600" cy="274320"/>
+          </a:xfrm>
+          <a:prstGeom prst="rect">
+            <a:avLst/>
+          </a:prstGeom>
+          <a:noFill/>
+        </p:spPr>
+        <p:txBody>
+          <a:bodyPr wrap="none">
+            <a:spAutoFit/>
+          </a:bodyPr>
+          <a:lstStyle/>
+          <a:p>
+            <a:pPr>
+              <a:defRPr b="1" sz="1300">
+                <a:solidFill>
+                  <a:srgbClr val="007050"/>
+                </a:solidFill>
+              </a:defRPr>
+            </a:pPr>
+            <a:r>
+              <a:t>Agile delivery (Scrum)</a:t>
+            </a:r>
+          </a:p>
+        </p:txBody>
+      </p:sp>
+      <p:sp>
+        <p:nvSpPr>
+          <p:cNvPr id="11" name="Rounded Rectangle 10"/>
+          <p:cNvSpPr/>
+          <p:nvPr/>
+        </p:nvSpPr>
+        <p:spPr>
+          <a:xfrm>
+            <a:off x="531723" y="3291840"/>
+            <a:ext cx="1417320" cy="685800"/>
+          </a:xfrm>
+          <a:prstGeom prst="roundRect">
+            <a:avLst/>
+          </a:prstGeom>
+          <a:solidFill>
+            <a:srgbClr val="007050"/>
+          </a:solidFill>
+          <a:ln>
+            <a:solidFill>
+              <a:srgbClr val="FFFFFF"/>
+            </a:solidFill>
+          </a:ln>
+        </p:spPr>
+        <p:style>
+          <a:lnRef idx="1">
+            <a:schemeClr val="accent1"/>
+          </a:lnRef>
+          <a:fillRef idx="3">
+            <a:schemeClr val="accent1"/>
+          </a:fillRef>
+          <a:effectRef idx="2">
+            <a:schemeClr val="accent1"/>
+          </a:effectRef>
+          <a:fontRef idx="minor">
+            <a:schemeClr val="lt1"/>
+          </a:fontRef>
+        </p:style>
+        <p:txBody>
+          <a:bodyPr rtlCol="0" anchor="ctr"/>
+          <a:lstStyle/>
+          <a:p>
+            <a:pPr algn="l">
+              <a:defRPr sz="1000" b="1">
+                <a:solidFill>
+                  <a:srgbClr val="FFFFFF"/>
+                </a:solidFill>
+              </a:defRPr>
+            </a:pPr>
+            <a:r>
+              <a:t>FSD</a:t>
+            </a:r>
+          </a:p>
+        </p:txBody>
+      </p:sp>
+      <p:sp>
+        <p:nvSpPr>
+          <p:cNvPr id="12" name="Rounded Rectangle 11"/>
+          <p:cNvSpPr/>
+          <p:nvPr/>
+        </p:nvSpPr>
+        <p:spPr>
+          <a:xfrm>
+            <a:off x="2150211" y="3291840"/>
+            <a:ext cx="1417320" cy="685800"/>
+          </a:xfrm>
+          <a:prstGeom prst="roundRect">
+            <a:avLst/>
+          </a:prstGeom>
+          <a:solidFill>
+            <a:srgbClr val="007050"/>
+          </a:solidFill>
+          <a:ln>
+            <a:solidFill>
+              <a:srgbClr val="FFFFFF"/>
+            </a:solidFill>
+          </a:ln>
+        </p:spPr>
+        <p:style>
+          <a:lnRef idx="1">
+            <a:schemeClr val="accent1"/>
+          </a:lnRef>
+          <a:fillRef idx="3">
+            <a:schemeClr val="accent1"/>
+          </a:fillRef>
+          <a:effectRef idx="2">
+            <a:schemeClr val="accent1"/>
+          </a:effectRef>
+          <a:fontRef idx="minor">
+            <a:schemeClr val="lt1"/>
+          </a:fontRef>
+        </p:style>
+        <p:txBody>
+          <a:bodyPr rtlCol="0" anchor="ctr"/>
+          <a:lstStyle/>
+          <a:p>
+            <a:pPr algn="l">
+              <a:defRPr sz="1000" b="1">
+                <a:solidFill>
+                  <a:srgbClr val="FFFFFF"/>
+                </a:solidFill>
+              </a:defRPr>
+            </a:pPr>
+            <a:r>
+              <a:t>Sprint plan</a:t>
+            </a:r>
+          </a:p>
+        </p:txBody>
+      </p:sp>
+      <p:sp>
+        <p:nvSpPr>
+          <p:cNvPr id="13" name="Rounded Rectangle 12"/>
+          <p:cNvSpPr/>
+          <p:nvPr/>
+        </p:nvSpPr>
+        <p:spPr>
+          <a:xfrm>
+            <a:off x="3768699" y="3291840"/>
+            <a:ext cx="1417320" cy="685800"/>
+          </a:xfrm>
+          <a:prstGeom prst="roundRect">
+            <a:avLst/>
+          </a:prstGeom>
+          <a:solidFill>
+            <a:srgbClr val="007050"/>
+          </a:solidFill>
+          <a:ln>
+            <a:solidFill>
+              <a:srgbClr val="FFFFFF"/>
+            </a:solidFill>
+          </a:ln>
+        </p:spPr>
+        <p:style>
+          <a:lnRef idx="1">
+            <a:schemeClr val="accent1"/>
+          </a:lnRef>
+          <a:fillRef idx="3">
+            <a:schemeClr val="accent1"/>
+          </a:fillRef>
+          <a:effectRef idx="2">
+            <a:schemeClr val="accent1"/>
+          </a:effectRef>
+          <a:fontRef idx="minor">
+            <a:schemeClr val="lt1"/>
+          </a:fontRef>
+        </p:style>
+        <p:txBody>
+          <a:bodyPr rtlCol="0" anchor="ctr"/>
+          <a:lstStyle/>
+          <a:p>
+            <a:pPr algn="l">
+              <a:defRPr sz="1000" b="1">
+                <a:solidFill>
+                  <a:srgbClr val="FFFFFF"/>
+                </a:solidFill>
+              </a:defRPr>
+            </a:pPr>
+            <a:r>
+              <a:t>Build</a:t>
+            </a:r>
+          </a:p>
+        </p:txBody>
+      </p:sp>
+      <p:sp>
+        <p:nvSpPr>
+          <p:cNvPr id="14" name="Rounded Rectangle 13"/>
+          <p:cNvSpPr/>
+          <p:nvPr/>
+        </p:nvSpPr>
+        <p:spPr>
+          <a:xfrm>
+            <a:off x="5387187" y="3291840"/>
+            <a:ext cx="1417320" cy="685800"/>
+          </a:xfrm>
+          <a:prstGeom prst="roundRect">
+            <a:avLst/>
+          </a:prstGeom>
+          <a:solidFill>
+            <a:srgbClr val="007050"/>
+          </a:solidFill>
+          <a:ln>
+            <a:solidFill>
+              <a:srgbClr val="FFFFFF"/>
+            </a:solidFill>
+          </a:ln>
+        </p:spPr>
+        <p:style>
+          <a:lnRef idx="1">
+            <a:schemeClr val="accent1"/>
+          </a:lnRef>
+          <a:fillRef idx="3">
+            <a:schemeClr val="accent1"/>
+          </a:fillRef>
+          <a:effectRef idx="2">
+            <a:schemeClr val="accent1"/>
+          </a:effectRef>
+          <a:fontRef idx="minor">
+            <a:schemeClr val="lt1"/>
+          </a:fontRef>
+        </p:style>
+        <p:txBody>
+          <a:bodyPr rtlCol="0" anchor="ctr"/>
+          <a:lstStyle/>
+          <a:p>
+            <a:pPr algn="l">
+              <a:defRPr sz="1000" b="1">
+                <a:solidFill>
+                  <a:srgbClr val="FFFFFF"/>
+                </a:solidFill>
+              </a:defRPr>
+            </a:pPr>
+            <a:r>
+              <a:t>SIT</a:t>
+            </a:r>
+          </a:p>
+        </p:txBody>
+      </p:sp>
+      <p:sp>
+        <p:nvSpPr>
+          <p:cNvPr id="15" name="Rounded Rectangle 14"/>
+          <p:cNvSpPr/>
+          <p:nvPr/>
+        </p:nvSpPr>
+        <p:spPr>
+          <a:xfrm>
+            <a:off x="7005675" y="3291840"/>
+            <a:ext cx="1417320" cy="685800"/>
+          </a:xfrm>
+          <a:prstGeom prst="roundRect">
+            <a:avLst/>
+          </a:prstGeom>
+          <a:solidFill>
+            <a:srgbClr val="007050"/>
+          </a:solidFill>
+          <a:ln>
+            <a:solidFill>
+              <a:srgbClr val="FFFFFF"/>
+            </a:solidFill>
+          </a:ln>
+        </p:spPr>
+        <p:style>
+          <a:lnRef idx="1">
+            <a:schemeClr val="accent1"/>
+          </a:lnRef>
+          <a:fillRef idx="3">
+            <a:schemeClr val="accent1"/>
+          </a:fillRef>
+          <a:effectRef idx="2">
+            <a:schemeClr val="accent1"/>
+          </a:effectRef>
+          <a:fontRef idx="minor">
+            <a:schemeClr val="lt1"/>
+          </a:fontRef>
+        </p:style>
+        <p:txBody>
+          <a:bodyPr rtlCol="0" anchor="ctr"/>
+          <a:lstStyle/>
+          <a:p>
+            <a:pPr algn="l">
+              <a:defRPr sz="1000" b="1">
+                <a:solidFill>
+                  <a:srgbClr val="FFFFFF"/>
+                </a:solidFill>
+              </a:defRPr>
+            </a:pPr>
+            <a:r>
+              <a:t>UAT</a:t>
+            </a:r>
+          </a:p>
+        </p:txBody>
+      </p:sp>
+      <p:sp>
+        <p:nvSpPr>
+          <p:cNvPr id="16" name="Rounded Rectangle 15"/>
+          <p:cNvSpPr/>
+          <p:nvPr/>
+        </p:nvSpPr>
+        <p:spPr>
+          <a:xfrm>
+            <a:off x="8624163" y="3291840"/>
+            <a:ext cx="1417320" cy="685800"/>
+          </a:xfrm>
+          <a:prstGeom prst="roundRect">
+            <a:avLst/>
+          </a:prstGeom>
+          <a:solidFill>
+            <a:srgbClr val="007050"/>
+          </a:solidFill>
+          <a:ln>
+            <a:solidFill>
+              <a:srgbClr val="FFFFFF"/>
+            </a:solidFill>
+          </a:ln>
+        </p:spPr>
+        <p:style>
+          <a:lnRef idx="1">
+            <a:schemeClr val="accent1"/>
+          </a:lnRef>
+          <a:fillRef idx="3">
+            <a:schemeClr val="accent1"/>
+          </a:fillRef>
+          <a:effectRef idx="2">
+            <a:schemeClr val="accent1"/>
+          </a:effectRef>
+          <a:fontRef idx="minor">
+            <a:schemeClr val="lt1"/>
+          </a:fontRef>
+        </p:style>
+        <p:txBody>
+          <a:bodyPr rtlCol="0" anchor="ctr"/>
+          <a:lstStyle/>
+          <a:p>
+            <a:pPr algn="l">
+              <a:defRPr sz="1000" b="1">
+                <a:solidFill>
+                  <a:srgbClr val="FFFFFF"/>
+                </a:solidFill>
+              </a:defRPr>
+            </a:pPr>
+            <a:r>
+              <a:t>Ship</a:t>
+            </a:r>
+          </a:p>
+        </p:txBody>
+      </p:sp>
+      <p:sp>
+        <p:nvSpPr>
+          <p:cNvPr id="17" name="Rounded Rectangle 16"/>
+          <p:cNvSpPr/>
+          <p:nvPr/>
+        </p:nvSpPr>
+        <p:spPr>
+          <a:xfrm>
+            <a:off x="10242651" y="3291840"/>
+            <a:ext cx="1417320" cy="685800"/>
+          </a:xfrm>
+          <a:prstGeom prst="roundRect">
+            <a:avLst/>
+          </a:prstGeom>
+          <a:solidFill>
+            <a:srgbClr val="007050"/>
+          </a:solidFill>
+          <a:ln>
+            <a:solidFill>
+              <a:srgbClr val="FFFFFF"/>
+            </a:solidFill>
+          </a:ln>
+        </p:spPr>
+        <p:style>
+          <a:lnRef idx="1">
+            <a:schemeClr val="accent1"/>
+          </a:lnRef>
+          <a:fillRef idx="3">
+            <a:schemeClr val="accent1"/>
+          </a:fillRef>
+          <a:effectRef idx="2">
+            <a:schemeClr val="accent1"/>
+          </a:effectRef>
+          <a:fontRef idx="minor">
+            <a:schemeClr val="lt1"/>
+          </a:fontRef>
+        </p:style>
+        <p:txBody>
+          <a:bodyPr rtlCol="0" anchor="ctr"/>
+          <a:lstStyle/>
+          <a:p>
+            <a:pPr algn="l">
+              <a:defRPr sz="1000" b="1">
+                <a:solidFill>
+                  <a:srgbClr val="FFFFFF"/>
+                </a:solidFill>
+              </a:defRPr>
+            </a:pPr>
+            <a:r>
+              <a:t>Hypercare</a:t>
+            </a:r>
+          </a:p>
+        </p:txBody>
+      </p:sp>
+      <p:sp>
+        <p:nvSpPr>
+          <p:cNvPr id="18" name="TextBox 17"/>
+          <p:cNvSpPr txBox="1"/>
+          <p:nvPr/>
+        </p:nvSpPr>
+        <p:spPr>
+          <a:xfrm>
+            <a:off x="457200" y="4572000"/>
+            <a:ext cx="11247120" cy="1097280"/>
+          </a:xfrm>
+          <a:prstGeom prst="rect">
+            <a:avLst/>
+          </a:prstGeom>
+          <a:noFill/>
+        </p:spPr>
+        <p:txBody>
+          <a:bodyPr wrap="none">
+            <a:spAutoFit/>
+          </a:bodyPr>
+          <a:lstStyle/>
+          <a:p>
+            <a:pPr>
+              <a:defRPr sz="1400"/>
+            </a:pPr>
+            <a:r>
+              <a:t>Governance track can run in parallel — it does not wait for sprint end.</a:t>
+            </a:r>
+          </a:p>
+          <a:p>
+            <a:r>
+              <a:t>Delivery track runs in 2-week sprints; Ship only when BOTH tracks are green.</a:t>
             </a:r>
           </a:p>
         </p:txBody>
@@ -6279,48 +6281,1164 @@
           <a:lstStyle/>
           <a:p>
             <a:r>
-              <a:t>Audit Evidence Pack (per release)</a:t>
-            </a:r>
-          </a:p>
-        </p:txBody>
-      </p:sp>
-      <p:sp>
-        <p:nvSpPr>
-          <p:cNvPr id="3" name="Content Placeholder 2"/>
-          <p:cNvSpPr>
-            <a:spLocks noGrp="1"/>
-          </p:cNvSpPr>
-          <p:nvPr>
-            <p:ph idx="1"/>
-          </p:nvPr>
-        </p:nvSpPr>
-        <p:spPr/>
-        <p:txBody>
-          <a:bodyPr/>
-          <a:lstStyle/>
-          <a:p>
-            <a:r>
-              <a:t>1. BRD (+ versions)  2. BA scorecard  3. Sponsor approval</a:t>
-            </a:r>
-          </a:p>
-          <a:p>
-            <a:r>
-              <a:t>4. IT-Security sign-off (if flagged)  5. GRC/Legal (if flagged)</a:t>
-            </a:r>
-          </a:p>
-          <a:p>
-            <a:r>
-              <a:t>6. FSD linked to BRD  7. SIT results  8. UAT sign-off</a:t>
-            </a:r>
-          </a:p>
-          <a:p>
-            <a:r>
-              <a:t>9. CR + CAB approval  10. Deployment log  11. Post-deploy verify</a:t>
-            </a:r>
-          </a:p>
-          <a:p>
-            <a:r>
-              <a:t>12. Security scan / pen test (if required)  13. RCA (if incident)</a:t>
+              <a:t>Org Chart — Development &amp; Operations</a:t>
+            </a:r>
+          </a:p>
+        </p:txBody>
+      </p:sp>
+      <p:sp>
+        <p:nvSpPr>
+          <p:cNvPr id="3" name="TextBox 2"/>
+          <p:cNvSpPr txBox="1"/>
+          <p:nvPr/>
+        </p:nvSpPr>
+        <p:spPr>
+          <a:xfrm>
+            <a:off x="365760" y="960120"/>
+            <a:ext cx="11430000" cy="320040"/>
+          </a:xfrm>
+          <a:prstGeom prst="rect">
+            <a:avLst/>
+          </a:prstGeom>
+          <a:noFill/>
+        </p:spPr>
+        <p:txBody>
+          <a:bodyPr wrap="none">
+            <a:spAutoFit/>
+          </a:bodyPr>
+          <a:lstStyle/>
+          <a:p>
+            <a:pPr>
+              <a:defRPr sz="1300">
+                <a:solidFill>
+                  <a:srgbClr val="555555"/>
+                </a:solidFill>
+              </a:defRPr>
+            </a:pPr>
+            <a:r>
+              <a:t>Delivery (build) and Operations (run) report into IT leadership — assurance is independent</a:t>
+            </a:r>
+          </a:p>
+        </p:txBody>
+      </p:sp>
+      <p:sp>
+        <p:nvSpPr>
+          <p:cNvPr id="4" name="Rounded Rectangle 3"/>
+          <p:cNvSpPr/>
+          <p:nvPr/>
+        </p:nvSpPr>
+        <p:spPr>
+          <a:xfrm>
+            <a:off x="3809847" y="1554480"/>
+            <a:ext cx="4572000" cy="640080"/>
+          </a:xfrm>
+          <a:prstGeom prst="roundRect">
+            <a:avLst/>
+          </a:prstGeom>
+          <a:solidFill>
+            <a:srgbClr val="1F4E79"/>
+          </a:solidFill>
+          <a:ln>
+            <a:solidFill>
+              <a:srgbClr val="FFFFFF"/>
+            </a:solidFill>
+          </a:ln>
+        </p:spPr>
+        <p:style>
+          <a:lnRef idx="1">
+            <a:schemeClr val="accent1"/>
+          </a:lnRef>
+          <a:fillRef idx="3">
+            <a:schemeClr val="accent1"/>
+          </a:fillRef>
+          <a:effectRef idx="2">
+            <a:schemeClr val="accent1"/>
+          </a:effectRef>
+          <a:fontRef idx="minor">
+            <a:schemeClr val="lt1"/>
+          </a:fontRef>
+        </p:style>
+        <p:txBody>
+          <a:bodyPr rtlCol="0" anchor="ctr" wrap="square"/>
+          <a:lstStyle/>
+          <a:p>
+            <a:pPr algn="l">
+              <a:defRPr sz="1200" b="1">
+                <a:solidFill>
+                  <a:srgbClr val="FFFFFF"/>
+                </a:solidFill>
+              </a:defRPr>
+            </a:pPr>
+            <a:r>
+              <a:t>CIO / IT Director</a:t>
+            </a:r>
+          </a:p>
+        </p:txBody>
+      </p:sp>
+      <p:cxnSp>
+        <p:nvCxnSpPr>
+          <p:cNvPr id="5" name="Connector 4"/>
+          <p:cNvCxnSpPr/>
+          <p:nvPr/>
+        </p:nvCxnSpPr>
+        <p:spPr>
+          <a:xfrm flipH="1">
+            <a:off x="2123389" y="2194560"/>
+            <a:ext cx="3972458" cy="548640"/>
+          </a:xfrm>
+          <a:prstGeom prst="line">
+            <a:avLst/>
+          </a:prstGeom>
+          <a:ln w="19050">
+            <a:solidFill>
+              <a:srgbClr val="808080"/>
+            </a:solidFill>
+          </a:ln>
+        </p:spPr>
+        <p:style>
+          <a:lnRef idx="2">
+            <a:schemeClr val="accent1"/>
+          </a:lnRef>
+          <a:fillRef idx="0">
+            <a:schemeClr val="accent1"/>
+          </a:fillRef>
+          <a:effectRef idx="1">
+            <a:schemeClr val="accent1"/>
+          </a:effectRef>
+          <a:fontRef idx="minor">
+            <a:schemeClr val="tx1"/>
+          </a:fontRef>
+        </p:style>
+      </p:cxnSp>
+      <p:sp>
+        <p:nvSpPr>
+          <p:cNvPr id="6" name="Rounded Rectangle 5"/>
+          <p:cNvSpPr/>
+          <p:nvPr/>
+        </p:nvSpPr>
+        <p:spPr>
+          <a:xfrm>
+            <a:off x="274320" y="2743200"/>
+            <a:ext cx="3698138" cy="594360"/>
+          </a:xfrm>
+          <a:prstGeom prst="roundRect">
+            <a:avLst/>
+          </a:prstGeom>
+          <a:solidFill>
+            <a:srgbClr val="1F4E79"/>
+          </a:solidFill>
+          <a:ln>
+            <a:solidFill>
+              <a:srgbClr val="FFFFFF"/>
+            </a:solidFill>
+          </a:ln>
+        </p:spPr>
+        <p:style>
+          <a:lnRef idx="1">
+            <a:schemeClr val="accent1"/>
+          </a:lnRef>
+          <a:fillRef idx="3">
+            <a:schemeClr val="accent1"/>
+          </a:fillRef>
+          <a:effectRef idx="2">
+            <a:schemeClr val="accent1"/>
+          </a:effectRef>
+          <a:fontRef idx="minor">
+            <a:schemeClr val="lt1"/>
+          </a:fontRef>
+        </p:style>
+        <p:txBody>
+          <a:bodyPr rtlCol="0" anchor="ctr" wrap="square"/>
+          <a:lstStyle/>
+          <a:p>
+            <a:pPr algn="l">
+              <a:defRPr sz="1000" b="1">
+                <a:solidFill>
+                  <a:srgbClr val="FFFFFF"/>
+                </a:solidFill>
+              </a:defRPr>
+            </a:pPr>
+            <a:r>
+              <a:t>IT Product (PO)</a:t>
+            </a:r>
+          </a:p>
+        </p:txBody>
+      </p:sp>
+      <p:cxnSp>
+        <p:nvCxnSpPr>
+          <p:cNvPr id="7" name="Connector 6"/>
+          <p:cNvCxnSpPr/>
+          <p:nvPr/>
+        </p:nvCxnSpPr>
+        <p:spPr>
+          <a:xfrm>
+            <a:off x="2123389" y="3547872"/>
+            <a:ext cx="0" cy="109728"/>
+          </a:xfrm>
+          <a:prstGeom prst="line">
+            <a:avLst/>
+          </a:prstGeom>
+          <a:ln w="12700">
+            <a:solidFill>
+              <a:srgbClr val="B0B0B0"/>
+            </a:solidFill>
+          </a:ln>
+        </p:spPr>
+        <p:style>
+          <a:lnRef idx="2">
+            <a:schemeClr val="accent1"/>
+          </a:lnRef>
+          <a:fillRef idx="0">
+            <a:schemeClr val="accent1"/>
+          </a:fillRef>
+          <a:effectRef idx="1">
+            <a:schemeClr val="accent1"/>
+          </a:effectRef>
+          <a:fontRef idx="minor">
+            <a:schemeClr val="tx1"/>
+          </a:fontRef>
+        </p:style>
+      </p:cxnSp>
+      <p:sp>
+        <p:nvSpPr>
+          <p:cNvPr id="8" name="Rectangle 7"/>
+          <p:cNvSpPr/>
+          <p:nvPr/>
+        </p:nvSpPr>
+        <p:spPr>
+          <a:xfrm>
+            <a:off x="457200" y="3657600"/>
+            <a:ext cx="3332378" cy="502920"/>
+          </a:xfrm>
+          <a:prstGeom prst="rect">
+            <a:avLst/>
+          </a:prstGeom>
+          <a:solidFill>
+            <a:srgbClr val="F2F2F2"/>
+          </a:solidFill>
+          <a:ln>
+            <a:solidFill>
+              <a:srgbClr val="1F4E79"/>
+            </a:solidFill>
+          </a:ln>
+        </p:spPr>
+        <p:style>
+          <a:lnRef idx="1">
+            <a:schemeClr val="accent1"/>
+          </a:lnRef>
+          <a:fillRef idx="3">
+            <a:schemeClr val="accent1"/>
+          </a:fillRef>
+          <a:effectRef idx="2">
+            <a:schemeClr val="accent1"/>
+          </a:effectRef>
+          <a:fontRef idx="minor">
+            <a:schemeClr val="lt1"/>
+          </a:fontRef>
+        </p:style>
+        <p:txBody>
+          <a:bodyPr rtlCol="0" anchor="ctr" wrap="square"/>
+          <a:lstStyle/>
+          <a:p>
+            <a:pPr algn="l">
+              <a:defRPr sz="900">
+                <a:solidFill>
+                  <a:srgbClr val="333333"/>
+                </a:solidFill>
+              </a:defRPr>
+            </a:pPr>
+            <a:r>
+              <a:t>BA Team</a:t>
+            </a:r>
+          </a:p>
+        </p:txBody>
+      </p:sp>
+      <p:cxnSp>
+        <p:nvCxnSpPr>
+          <p:cNvPr id="9" name="Connector 8"/>
+          <p:cNvCxnSpPr/>
+          <p:nvPr/>
+        </p:nvCxnSpPr>
+        <p:spPr>
+          <a:xfrm>
+            <a:off x="2123389" y="4251959"/>
+            <a:ext cx="0" cy="109729"/>
+          </a:xfrm>
+          <a:prstGeom prst="line">
+            <a:avLst/>
+          </a:prstGeom>
+          <a:ln w="12700">
+            <a:solidFill>
+              <a:srgbClr val="B0B0B0"/>
+            </a:solidFill>
+          </a:ln>
+        </p:spPr>
+        <p:style>
+          <a:lnRef idx="2">
+            <a:schemeClr val="accent1"/>
+          </a:lnRef>
+          <a:fillRef idx="0">
+            <a:schemeClr val="accent1"/>
+          </a:fillRef>
+          <a:effectRef idx="1">
+            <a:schemeClr val="accent1"/>
+          </a:effectRef>
+          <a:fontRef idx="minor">
+            <a:schemeClr val="tx1"/>
+          </a:fontRef>
+        </p:style>
+      </p:cxnSp>
+      <p:sp>
+        <p:nvSpPr>
+          <p:cNvPr id="10" name="Rectangle 9"/>
+          <p:cNvSpPr/>
+          <p:nvPr/>
+        </p:nvSpPr>
+        <p:spPr>
+          <a:xfrm>
+            <a:off x="457200" y="4361688"/>
+            <a:ext cx="3332378" cy="502920"/>
+          </a:xfrm>
+          <a:prstGeom prst="rect">
+            <a:avLst/>
+          </a:prstGeom>
+          <a:solidFill>
+            <a:srgbClr val="F2F2F2"/>
+          </a:solidFill>
+          <a:ln>
+            <a:solidFill>
+              <a:srgbClr val="1F4E79"/>
+            </a:solidFill>
+          </a:ln>
+        </p:spPr>
+        <p:style>
+          <a:lnRef idx="1">
+            <a:schemeClr val="accent1"/>
+          </a:lnRef>
+          <a:fillRef idx="3">
+            <a:schemeClr val="accent1"/>
+          </a:fillRef>
+          <a:effectRef idx="2">
+            <a:schemeClr val="accent1"/>
+          </a:effectRef>
+          <a:fontRef idx="minor">
+            <a:schemeClr val="lt1"/>
+          </a:fontRef>
+        </p:style>
+        <p:txBody>
+          <a:bodyPr rtlCol="0" anchor="ctr" wrap="square"/>
+          <a:lstStyle/>
+          <a:p>
+            <a:pPr algn="l">
+              <a:defRPr sz="900">
+                <a:solidFill>
+                  <a:srgbClr val="333333"/>
+                </a:solidFill>
+              </a:defRPr>
+            </a:pPr>
+            <a:r>
+              <a:t>Scrum / Dev Team</a:t>
+            </a:r>
+          </a:p>
+        </p:txBody>
+      </p:sp>
+      <p:cxnSp>
+        <p:nvCxnSpPr>
+          <p:cNvPr id="11" name="Connector 10"/>
+          <p:cNvCxnSpPr/>
+          <p:nvPr/>
+        </p:nvCxnSpPr>
+        <p:spPr>
+          <a:xfrm>
+            <a:off x="2123389" y="4956047"/>
+            <a:ext cx="0" cy="109728"/>
+          </a:xfrm>
+          <a:prstGeom prst="line">
+            <a:avLst/>
+          </a:prstGeom>
+          <a:ln w="12700">
+            <a:solidFill>
+              <a:srgbClr val="B0B0B0"/>
+            </a:solidFill>
+          </a:ln>
+        </p:spPr>
+        <p:style>
+          <a:lnRef idx="2">
+            <a:schemeClr val="accent1"/>
+          </a:lnRef>
+          <a:fillRef idx="0">
+            <a:schemeClr val="accent1"/>
+          </a:fillRef>
+          <a:effectRef idx="1">
+            <a:schemeClr val="accent1"/>
+          </a:effectRef>
+          <a:fontRef idx="minor">
+            <a:schemeClr val="tx1"/>
+          </a:fontRef>
+        </p:style>
+      </p:cxnSp>
+      <p:sp>
+        <p:nvSpPr>
+          <p:cNvPr id="12" name="Rectangle 11"/>
+          <p:cNvSpPr/>
+          <p:nvPr/>
+        </p:nvSpPr>
+        <p:spPr>
+          <a:xfrm>
+            <a:off x="457200" y="5065775"/>
+            <a:ext cx="3332378" cy="502920"/>
+          </a:xfrm>
+          <a:prstGeom prst="rect">
+            <a:avLst/>
+          </a:prstGeom>
+          <a:solidFill>
+            <a:srgbClr val="F2F2F2"/>
+          </a:solidFill>
+          <a:ln>
+            <a:solidFill>
+              <a:srgbClr val="1F4E79"/>
+            </a:solidFill>
+          </a:ln>
+        </p:spPr>
+        <p:style>
+          <a:lnRef idx="1">
+            <a:schemeClr val="accent1"/>
+          </a:lnRef>
+          <a:fillRef idx="3">
+            <a:schemeClr val="accent1"/>
+          </a:fillRef>
+          <a:effectRef idx="2">
+            <a:schemeClr val="accent1"/>
+          </a:effectRef>
+          <a:fontRef idx="minor">
+            <a:schemeClr val="lt1"/>
+          </a:fontRef>
+        </p:style>
+        <p:txBody>
+          <a:bodyPr rtlCol="0" anchor="ctr" wrap="square"/>
+          <a:lstStyle/>
+          <a:p>
+            <a:pPr algn="l">
+              <a:defRPr sz="900">
+                <a:solidFill>
+                  <a:srgbClr val="333333"/>
+                </a:solidFill>
+              </a:defRPr>
+            </a:pPr>
+            <a:r>
+              <a:t>QA / Test</a:t>
+            </a:r>
+          </a:p>
+        </p:txBody>
+      </p:sp>
+      <p:cxnSp>
+        <p:nvCxnSpPr>
+          <p:cNvPr id="13" name="Connector 12"/>
+          <p:cNvCxnSpPr/>
+          <p:nvPr/>
+        </p:nvCxnSpPr>
+        <p:spPr>
+          <a:xfrm>
+            <a:off x="6095847" y="2194560"/>
+            <a:ext cx="0" cy="548640"/>
+          </a:xfrm>
+          <a:prstGeom prst="line">
+            <a:avLst/>
+          </a:prstGeom>
+          <a:ln w="19050">
+            <a:solidFill>
+              <a:srgbClr val="808080"/>
+            </a:solidFill>
+          </a:ln>
+        </p:spPr>
+        <p:style>
+          <a:lnRef idx="2">
+            <a:schemeClr val="accent1"/>
+          </a:lnRef>
+          <a:fillRef idx="0">
+            <a:schemeClr val="accent1"/>
+          </a:fillRef>
+          <a:effectRef idx="1">
+            <a:schemeClr val="accent1"/>
+          </a:effectRef>
+          <a:fontRef idx="minor">
+            <a:schemeClr val="tx1"/>
+          </a:fontRef>
+        </p:style>
+      </p:cxnSp>
+      <p:sp>
+        <p:nvSpPr>
+          <p:cNvPr id="14" name="Rounded Rectangle 13"/>
+          <p:cNvSpPr/>
+          <p:nvPr/>
+        </p:nvSpPr>
+        <p:spPr>
+          <a:xfrm>
+            <a:off x="4246778" y="2743200"/>
+            <a:ext cx="3698138" cy="594360"/>
+          </a:xfrm>
+          <a:prstGeom prst="roundRect">
+            <a:avLst/>
+          </a:prstGeom>
+          <a:solidFill>
+            <a:srgbClr val="2E75B6"/>
+          </a:solidFill>
+          <a:ln>
+            <a:solidFill>
+              <a:srgbClr val="FFFFFF"/>
+            </a:solidFill>
+          </a:ln>
+        </p:spPr>
+        <p:style>
+          <a:lnRef idx="1">
+            <a:schemeClr val="accent1"/>
+          </a:lnRef>
+          <a:fillRef idx="3">
+            <a:schemeClr val="accent1"/>
+          </a:fillRef>
+          <a:effectRef idx="2">
+            <a:schemeClr val="accent1"/>
+          </a:effectRef>
+          <a:fontRef idx="minor">
+            <a:schemeClr val="lt1"/>
+          </a:fontRef>
+        </p:style>
+        <p:txBody>
+          <a:bodyPr rtlCol="0" anchor="ctr" wrap="square"/>
+          <a:lstStyle/>
+          <a:p>
+            <a:pPr algn="l">
+              <a:defRPr sz="1000" b="1">
+                <a:solidFill>
+                  <a:srgbClr val="FFFFFF"/>
+                </a:solidFill>
+              </a:defRPr>
+            </a:pPr>
+            <a:r>
+              <a:t>IT Ops Manager</a:t>
+            </a:r>
+          </a:p>
+        </p:txBody>
+      </p:sp>
+      <p:cxnSp>
+        <p:nvCxnSpPr>
+          <p:cNvPr id="15" name="Connector 14"/>
+          <p:cNvCxnSpPr/>
+          <p:nvPr/>
+        </p:nvCxnSpPr>
+        <p:spPr>
+          <a:xfrm>
+            <a:off x="6095847" y="3547872"/>
+            <a:ext cx="0" cy="109728"/>
+          </a:xfrm>
+          <a:prstGeom prst="line">
+            <a:avLst/>
+          </a:prstGeom>
+          <a:ln w="12700">
+            <a:solidFill>
+              <a:srgbClr val="B0B0B0"/>
+            </a:solidFill>
+          </a:ln>
+        </p:spPr>
+        <p:style>
+          <a:lnRef idx="2">
+            <a:schemeClr val="accent1"/>
+          </a:lnRef>
+          <a:fillRef idx="0">
+            <a:schemeClr val="accent1"/>
+          </a:fillRef>
+          <a:effectRef idx="1">
+            <a:schemeClr val="accent1"/>
+          </a:effectRef>
+          <a:fontRef idx="minor">
+            <a:schemeClr val="tx1"/>
+          </a:fontRef>
+        </p:style>
+      </p:cxnSp>
+      <p:sp>
+        <p:nvSpPr>
+          <p:cNvPr id="16" name="Rectangle 15"/>
+          <p:cNvSpPr/>
+          <p:nvPr/>
+        </p:nvSpPr>
+        <p:spPr>
+          <a:xfrm>
+            <a:off x="4429658" y="3657600"/>
+            <a:ext cx="3332378" cy="502920"/>
+          </a:xfrm>
+          <a:prstGeom prst="rect">
+            <a:avLst/>
+          </a:prstGeom>
+          <a:solidFill>
+            <a:srgbClr val="F2F2F2"/>
+          </a:solidFill>
+          <a:ln>
+            <a:solidFill>
+              <a:srgbClr val="2E75B6"/>
+            </a:solidFill>
+          </a:ln>
+        </p:spPr>
+        <p:style>
+          <a:lnRef idx="1">
+            <a:schemeClr val="accent1"/>
+          </a:lnRef>
+          <a:fillRef idx="3">
+            <a:schemeClr val="accent1"/>
+          </a:fillRef>
+          <a:effectRef idx="2">
+            <a:schemeClr val="accent1"/>
+          </a:effectRef>
+          <a:fontRef idx="minor">
+            <a:schemeClr val="lt1"/>
+          </a:fontRef>
+        </p:style>
+        <p:txBody>
+          <a:bodyPr rtlCol="0" anchor="ctr" wrap="square"/>
+          <a:lstStyle/>
+          <a:p>
+            <a:pPr algn="l">
+              <a:defRPr sz="900">
+                <a:solidFill>
+                  <a:srgbClr val="333333"/>
+                </a:solidFill>
+              </a:defRPr>
+            </a:pPr>
+            <a:r>
+              <a:t>Service Desk</a:t>
+            </a:r>
+          </a:p>
+        </p:txBody>
+      </p:sp>
+      <p:cxnSp>
+        <p:nvCxnSpPr>
+          <p:cNvPr id="17" name="Connector 16"/>
+          <p:cNvCxnSpPr/>
+          <p:nvPr/>
+        </p:nvCxnSpPr>
+        <p:spPr>
+          <a:xfrm>
+            <a:off x="6095847" y="4251959"/>
+            <a:ext cx="0" cy="109729"/>
+          </a:xfrm>
+          <a:prstGeom prst="line">
+            <a:avLst/>
+          </a:prstGeom>
+          <a:ln w="12700">
+            <a:solidFill>
+              <a:srgbClr val="B0B0B0"/>
+            </a:solidFill>
+          </a:ln>
+        </p:spPr>
+        <p:style>
+          <a:lnRef idx="2">
+            <a:schemeClr val="accent1"/>
+          </a:lnRef>
+          <a:fillRef idx="0">
+            <a:schemeClr val="accent1"/>
+          </a:fillRef>
+          <a:effectRef idx="1">
+            <a:schemeClr val="accent1"/>
+          </a:effectRef>
+          <a:fontRef idx="minor">
+            <a:schemeClr val="tx1"/>
+          </a:fontRef>
+        </p:style>
+      </p:cxnSp>
+      <p:sp>
+        <p:nvSpPr>
+          <p:cNvPr id="18" name="Rectangle 17"/>
+          <p:cNvSpPr/>
+          <p:nvPr/>
+        </p:nvSpPr>
+        <p:spPr>
+          <a:xfrm>
+            <a:off x="4429658" y="4361688"/>
+            <a:ext cx="3332378" cy="502920"/>
+          </a:xfrm>
+          <a:prstGeom prst="rect">
+            <a:avLst/>
+          </a:prstGeom>
+          <a:solidFill>
+            <a:srgbClr val="F2F2F2"/>
+          </a:solidFill>
+          <a:ln>
+            <a:solidFill>
+              <a:srgbClr val="2E75B6"/>
+            </a:solidFill>
+          </a:ln>
+        </p:spPr>
+        <p:style>
+          <a:lnRef idx="1">
+            <a:schemeClr val="accent1"/>
+          </a:lnRef>
+          <a:fillRef idx="3">
+            <a:schemeClr val="accent1"/>
+          </a:fillRef>
+          <a:effectRef idx="2">
+            <a:schemeClr val="accent1"/>
+          </a:effectRef>
+          <a:fontRef idx="minor">
+            <a:schemeClr val="lt1"/>
+          </a:fontRef>
+        </p:style>
+        <p:txBody>
+          <a:bodyPr rtlCol="0" anchor="ctr" wrap="square"/>
+          <a:lstStyle/>
+          <a:p>
+            <a:pPr algn="l">
+              <a:defRPr sz="900">
+                <a:solidFill>
+                  <a:srgbClr val="333333"/>
+                </a:solidFill>
+              </a:defRPr>
+            </a:pPr>
+            <a:r>
+              <a:t>On-call / Night shift</a:t>
+            </a:r>
+          </a:p>
+        </p:txBody>
+      </p:sp>
+      <p:cxnSp>
+        <p:nvCxnSpPr>
+          <p:cNvPr id="19" name="Connector 18"/>
+          <p:cNvCxnSpPr/>
+          <p:nvPr/>
+        </p:nvCxnSpPr>
+        <p:spPr>
+          <a:xfrm>
+            <a:off x="6095847" y="4956047"/>
+            <a:ext cx="0" cy="109728"/>
+          </a:xfrm>
+          <a:prstGeom prst="line">
+            <a:avLst/>
+          </a:prstGeom>
+          <a:ln w="12700">
+            <a:solidFill>
+              <a:srgbClr val="B0B0B0"/>
+            </a:solidFill>
+          </a:ln>
+        </p:spPr>
+        <p:style>
+          <a:lnRef idx="2">
+            <a:schemeClr val="accent1"/>
+          </a:lnRef>
+          <a:fillRef idx="0">
+            <a:schemeClr val="accent1"/>
+          </a:fillRef>
+          <a:effectRef idx="1">
+            <a:schemeClr val="accent1"/>
+          </a:effectRef>
+          <a:fontRef idx="minor">
+            <a:schemeClr val="tx1"/>
+          </a:fontRef>
+        </p:style>
+      </p:cxnSp>
+      <p:sp>
+        <p:nvSpPr>
+          <p:cNvPr id="20" name="Rectangle 19"/>
+          <p:cNvSpPr/>
+          <p:nvPr/>
+        </p:nvSpPr>
+        <p:spPr>
+          <a:xfrm>
+            <a:off x="4429658" y="5065775"/>
+            <a:ext cx="3332378" cy="502920"/>
+          </a:xfrm>
+          <a:prstGeom prst="rect">
+            <a:avLst/>
+          </a:prstGeom>
+          <a:solidFill>
+            <a:srgbClr val="F2F2F2"/>
+          </a:solidFill>
+          <a:ln>
+            <a:solidFill>
+              <a:srgbClr val="2E75B6"/>
+            </a:solidFill>
+          </a:ln>
+        </p:spPr>
+        <p:style>
+          <a:lnRef idx="1">
+            <a:schemeClr val="accent1"/>
+          </a:lnRef>
+          <a:fillRef idx="3">
+            <a:schemeClr val="accent1"/>
+          </a:fillRef>
+          <a:effectRef idx="2">
+            <a:schemeClr val="accent1"/>
+          </a:effectRef>
+          <a:fontRef idx="minor">
+            <a:schemeClr val="lt1"/>
+          </a:fontRef>
+        </p:style>
+        <p:txBody>
+          <a:bodyPr rtlCol="0" anchor="ctr" wrap="square"/>
+          <a:lstStyle/>
+          <a:p>
+            <a:pPr algn="l">
+              <a:defRPr sz="900">
+                <a:solidFill>
+                  <a:srgbClr val="333333"/>
+                </a:solidFill>
+              </a:defRPr>
+            </a:pPr>
+            <a:r>
+              <a:t>Release / CAB coord</a:t>
+            </a:r>
+          </a:p>
+        </p:txBody>
+      </p:sp>
+      <p:cxnSp>
+        <p:nvCxnSpPr>
+          <p:cNvPr id="21" name="Connector 20"/>
+          <p:cNvCxnSpPr/>
+          <p:nvPr/>
+        </p:nvCxnSpPr>
+        <p:spPr>
+          <a:xfrm>
+            <a:off x="6095847" y="2194560"/>
+            <a:ext cx="3972459" cy="548640"/>
+          </a:xfrm>
+          <a:prstGeom prst="line">
+            <a:avLst/>
+          </a:prstGeom>
+          <a:ln w="19050">
+            <a:solidFill>
+              <a:srgbClr val="808080"/>
+            </a:solidFill>
+          </a:ln>
+        </p:spPr>
+        <p:style>
+          <a:lnRef idx="2">
+            <a:schemeClr val="accent1"/>
+          </a:lnRef>
+          <a:fillRef idx="0">
+            <a:schemeClr val="accent1"/>
+          </a:fillRef>
+          <a:effectRef idx="1">
+            <a:schemeClr val="accent1"/>
+          </a:effectRef>
+          <a:fontRef idx="minor">
+            <a:schemeClr val="tx1"/>
+          </a:fontRef>
+        </p:style>
+      </p:cxnSp>
+      <p:sp>
+        <p:nvSpPr>
+          <p:cNvPr id="22" name="Rounded Rectangle 21"/>
+          <p:cNvSpPr/>
+          <p:nvPr/>
+        </p:nvSpPr>
+        <p:spPr>
+          <a:xfrm>
+            <a:off x="8219236" y="2743200"/>
+            <a:ext cx="3698138" cy="594360"/>
+          </a:xfrm>
+          <a:prstGeom prst="roundRect">
+            <a:avLst/>
+          </a:prstGeom>
+          <a:solidFill>
+            <a:srgbClr val="70AD47"/>
+          </a:solidFill>
+          <a:ln>
+            <a:solidFill>
+              <a:srgbClr val="FFFFFF"/>
+            </a:solidFill>
+          </a:ln>
+        </p:spPr>
+        <p:style>
+          <a:lnRef idx="1">
+            <a:schemeClr val="accent1"/>
+          </a:lnRef>
+          <a:fillRef idx="3">
+            <a:schemeClr val="accent1"/>
+          </a:fillRef>
+          <a:effectRef idx="2">
+            <a:schemeClr val="accent1"/>
+          </a:effectRef>
+          <a:fontRef idx="minor">
+            <a:schemeClr val="lt1"/>
+          </a:fontRef>
+        </p:style>
+        <p:txBody>
+          <a:bodyPr rtlCol="0" anchor="ctr" wrap="square"/>
+          <a:lstStyle/>
+          <a:p>
+            <a:pPr algn="l">
+              <a:defRPr sz="1000" b="1">
+                <a:solidFill>
+                  <a:srgbClr val="FFFFFF"/>
+                </a:solidFill>
+              </a:defRPr>
+            </a:pPr>
+            <a:r>
+              <a:t>IT-Governance &amp; Security</a:t>
+            </a:r>
+          </a:p>
+        </p:txBody>
+      </p:sp>
+      <p:cxnSp>
+        <p:nvCxnSpPr>
+          <p:cNvPr id="23" name="Connector 22"/>
+          <p:cNvCxnSpPr/>
+          <p:nvPr/>
+        </p:nvCxnSpPr>
+        <p:spPr>
+          <a:xfrm>
+            <a:off x="10068306" y="3547872"/>
+            <a:ext cx="0" cy="109728"/>
+          </a:xfrm>
+          <a:prstGeom prst="line">
+            <a:avLst/>
+          </a:prstGeom>
+          <a:ln w="12700">
+            <a:solidFill>
+              <a:srgbClr val="B0B0B0"/>
+            </a:solidFill>
+          </a:ln>
+        </p:spPr>
+        <p:style>
+          <a:lnRef idx="2">
+            <a:schemeClr val="accent1"/>
+          </a:lnRef>
+          <a:fillRef idx="0">
+            <a:schemeClr val="accent1"/>
+          </a:fillRef>
+          <a:effectRef idx="1">
+            <a:schemeClr val="accent1"/>
+          </a:effectRef>
+          <a:fontRef idx="minor">
+            <a:schemeClr val="tx1"/>
+          </a:fontRef>
+        </p:style>
+      </p:cxnSp>
+      <p:sp>
+        <p:nvSpPr>
+          <p:cNvPr id="24" name="Rectangle 23"/>
+          <p:cNvSpPr/>
+          <p:nvPr/>
+        </p:nvSpPr>
+        <p:spPr>
+          <a:xfrm>
+            <a:off x="8402116" y="3657600"/>
+            <a:ext cx="3332378" cy="502920"/>
+          </a:xfrm>
+          <a:prstGeom prst="rect">
+            <a:avLst/>
+          </a:prstGeom>
+          <a:solidFill>
+            <a:srgbClr val="F2F2F2"/>
+          </a:solidFill>
+          <a:ln>
+            <a:solidFill>
+              <a:srgbClr val="70AD47"/>
+            </a:solidFill>
+          </a:ln>
+        </p:spPr>
+        <p:style>
+          <a:lnRef idx="1">
+            <a:schemeClr val="accent1"/>
+          </a:lnRef>
+          <a:fillRef idx="3">
+            <a:schemeClr val="accent1"/>
+          </a:fillRef>
+          <a:effectRef idx="2">
+            <a:schemeClr val="accent1"/>
+          </a:effectRef>
+          <a:fontRef idx="minor">
+            <a:schemeClr val="lt1"/>
+          </a:fontRef>
+        </p:style>
+        <p:txBody>
+          <a:bodyPr rtlCol="0" anchor="ctr" wrap="square"/>
+          <a:lstStyle/>
+          <a:p>
+            <a:pPr algn="l">
+              <a:defRPr sz="900">
+                <a:solidFill>
+                  <a:srgbClr val="333333"/>
+                </a:solidFill>
+              </a:defRPr>
+            </a:pPr>
+            <a:r>
+              <a:t>CAB / Change</a:t>
+            </a:r>
+          </a:p>
+        </p:txBody>
+      </p:sp>
+      <p:cxnSp>
+        <p:nvCxnSpPr>
+          <p:cNvPr id="25" name="Connector 24"/>
+          <p:cNvCxnSpPr/>
+          <p:nvPr/>
+        </p:nvCxnSpPr>
+        <p:spPr>
+          <a:xfrm>
+            <a:off x="10068306" y="4251959"/>
+            <a:ext cx="0" cy="109729"/>
+          </a:xfrm>
+          <a:prstGeom prst="line">
+            <a:avLst/>
+          </a:prstGeom>
+          <a:ln w="12700">
+            <a:solidFill>
+              <a:srgbClr val="B0B0B0"/>
+            </a:solidFill>
+          </a:ln>
+        </p:spPr>
+        <p:style>
+          <a:lnRef idx="2">
+            <a:schemeClr val="accent1"/>
+          </a:lnRef>
+          <a:fillRef idx="0">
+            <a:schemeClr val="accent1"/>
+          </a:fillRef>
+          <a:effectRef idx="1">
+            <a:schemeClr val="accent1"/>
+          </a:effectRef>
+          <a:fontRef idx="minor">
+            <a:schemeClr val="tx1"/>
+          </a:fontRef>
+        </p:style>
+      </p:cxnSp>
+      <p:sp>
+        <p:nvSpPr>
+          <p:cNvPr id="26" name="Rectangle 25"/>
+          <p:cNvSpPr/>
+          <p:nvPr/>
+        </p:nvSpPr>
+        <p:spPr>
+          <a:xfrm>
+            <a:off x="8402116" y="4361688"/>
+            <a:ext cx="3332378" cy="502920"/>
+          </a:xfrm>
+          <a:prstGeom prst="rect">
+            <a:avLst/>
+          </a:prstGeom>
+          <a:solidFill>
+            <a:srgbClr val="F2F2F2"/>
+          </a:solidFill>
+          <a:ln>
+            <a:solidFill>
+              <a:srgbClr val="70AD47"/>
+            </a:solidFill>
+          </a:ln>
+        </p:spPr>
+        <p:style>
+          <a:lnRef idx="1">
+            <a:schemeClr val="accent1"/>
+          </a:lnRef>
+          <a:fillRef idx="3">
+            <a:schemeClr val="accent1"/>
+          </a:fillRef>
+          <a:effectRef idx="2">
+            <a:schemeClr val="accent1"/>
+          </a:effectRef>
+          <a:fontRef idx="minor">
+            <a:schemeClr val="lt1"/>
+          </a:fontRef>
+        </p:style>
+        <p:txBody>
+          <a:bodyPr rtlCol="0" anchor="ctr" wrap="square"/>
+          <a:lstStyle/>
+          <a:p>
+            <a:pPr algn="l">
+              <a:defRPr sz="900">
+                <a:solidFill>
+                  <a:srgbClr val="333333"/>
+                </a:solidFill>
+              </a:defRPr>
+            </a:pPr>
+            <a:r>
+              <a:t>IT-Security</a:t>
+            </a:r>
+          </a:p>
+        </p:txBody>
+      </p:sp>
+      <p:cxnSp>
+        <p:nvCxnSpPr>
+          <p:cNvPr id="27" name="Connector 26"/>
+          <p:cNvCxnSpPr/>
+          <p:nvPr/>
+        </p:nvCxnSpPr>
+        <p:spPr>
+          <a:xfrm>
+            <a:off x="10068306" y="4956047"/>
+            <a:ext cx="0" cy="109728"/>
+          </a:xfrm>
+          <a:prstGeom prst="line">
+            <a:avLst/>
+          </a:prstGeom>
+          <a:ln w="12700">
+            <a:solidFill>
+              <a:srgbClr val="B0B0B0"/>
+            </a:solidFill>
+          </a:ln>
+        </p:spPr>
+        <p:style>
+          <a:lnRef idx="2">
+            <a:schemeClr val="accent1"/>
+          </a:lnRef>
+          <a:fillRef idx="0">
+            <a:schemeClr val="accent1"/>
+          </a:fillRef>
+          <a:effectRef idx="1">
+            <a:schemeClr val="accent1"/>
+          </a:effectRef>
+          <a:fontRef idx="minor">
+            <a:schemeClr val="tx1"/>
+          </a:fontRef>
+        </p:style>
+      </p:cxnSp>
+      <p:sp>
+        <p:nvSpPr>
+          <p:cNvPr id="28" name="Rectangle 27"/>
+          <p:cNvSpPr/>
+          <p:nvPr/>
+        </p:nvSpPr>
+        <p:spPr>
+          <a:xfrm>
+            <a:off x="8402116" y="5065775"/>
+            <a:ext cx="3332378" cy="502920"/>
+          </a:xfrm>
+          <a:prstGeom prst="rect">
+            <a:avLst/>
+          </a:prstGeom>
+          <a:solidFill>
+            <a:srgbClr val="F2F2F2"/>
+          </a:solidFill>
+          <a:ln>
+            <a:solidFill>
+              <a:srgbClr val="70AD47"/>
+            </a:solidFill>
+          </a:ln>
+        </p:spPr>
+        <p:style>
+          <a:lnRef idx="1">
+            <a:schemeClr val="accent1"/>
+          </a:lnRef>
+          <a:fillRef idx="3">
+            <a:schemeClr val="accent1"/>
+          </a:fillRef>
+          <a:effectRef idx="2">
+            <a:schemeClr val="accent1"/>
+          </a:effectRef>
+          <a:fontRef idx="minor">
+            <a:schemeClr val="lt1"/>
+          </a:fontRef>
+        </p:style>
+        <p:txBody>
+          <a:bodyPr rtlCol="0" anchor="ctr" wrap="square"/>
+          <a:lstStyle/>
+          <a:p>
+            <a:pPr algn="l">
+              <a:defRPr sz="900">
+                <a:solidFill>
+                  <a:srgbClr val="333333"/>
+                </a:solidFill>
+              </a:defRPr>
+            </a:pPr>
+            <a:r>
+              <a:t>GRC / Legal liaison</a:t>
             </a:r>
           </a:p>
         </p:txBody>
@@ -6359,7 +7477,7 @@
           <a:lstStyle/>
           <a:p>
             <a:r>
-              <a:t>Key Metrics — Ops &amp; Leadership Dashboard</a:t>
+              <a:t>Hard Gates — Non-Negotiable</a:t>
             </a:r>
           </a:p>
         </p:txBody>
@@ -6380,32 +7498,32 @@
           <a:lstStyle/>
           <a:p>
             <a:r>
-              <a:t>BRD first-pass acceptance rate          Target ≥ 60%</a:t>
-            </a:r>
-          </a:p>
-          <a:p>
-            <a:r>
-              <a:t>BRD → triage decision time              Target &lt; 5 days</a:t>
-            </a:r>
-          </a:p>
-          <a:p>
-            <a:r>
-              <a:t>Deployments without linked BRD          Target 0</a:t>
-            </a:r>
-          </a:p>
-          <a:p>
-            <a:r>
-              <a:t>UAT sign-off before production          Target 100%</a:t>
-            </a:r>
-          </a:p>
-          <a:p>
-            <a:r>
-              <a:t>Emergency prod changes / month          Target ≤ 2</a:t>
-            </a:r>
-          </a:p>
-          <a:p>
-            <a:r>
-              <a:t>Open IT-Security prod exceptions        Target 0</a:t>
+              <a:t>1. No FSD / sprint work without accepted BRD (≥ 80%)</a:t>
+            </a:r>
+          </a:p>
+          <a:p>
+            <a:r>
+              <a:t>2. No story without traceability to BRD acceptance criteria</a:t>
+            </a:r>
+          </a:p>
+          <a:p>
+            <a:r>
+              <a:t>3. No UAT skip — business signs, not IT</a:t>
+            </a:r>
+          </a:p>
+          <a:p>
+            <a:r>
+              <a:t>4. No production deploy without CAB (IT-Governance)</a:t>
+            </a:r>
+          </a:p>
+          <a:p>
+            <a:r>
+              <a:t>5. No security bypass without IT-Security exception register</a:t>
+            </a:r>
+          </a:p>
+          <a:p>
+            <a:r>
+              <a:t>6. Email / chat is not intake for projects</a:t>
             </a:r>
           </a:p>
         </p:txBody>
@@ -6444,7 +7562,7 @@
           <a:lstStyle/>
           <a:p>
             <a:r>
-              <a:t>Escalation Paths</a:t>
+              <a:t>Audit Evidence Pack (per release)</a:t>
             </a:r>
           </a:p>
         </p:txBody>
@@ -6465,32 +7583,27 @@
           <a:lstStyle/>
           <a:p>
             <a:r>
-              <a:t>Skip BRD pressure       → Ops → IT-Governance policy → IT Director</a:t>
-            </a:r>
-          </a:p>
-          <a:p>
-            <a:r>
-              <a:t>GRC hold + deploy rush  → Document hold → GRC Manager → no deploy</a:t>
-            </a:r>
-          </a:p>
-          <a:p>
-            <a:r>
-              <a:t>Security review open    → Ops blocks CR → IT-Security lead</a:t>
-            </a:r>
-          </a:p>
-          <a:p>
-            <a:r>
-              <a:t>Scope dispute           → BA → IT Product → Sponsor</a:t>
-            </a:r>
-          </a:p>
-          <a:p>
-            <a:r>
-              <a:t>CAB rejection           → IT-Governance → IT Product → Sponsor</a:t>
-            </a:r>
-          </a:p>
-          <a:p>
-            <a:r>
-              <a:t>Material incident       → IT-Security IR → CIO → EXCO / BOD</a:t>
+              <a:t>1. BRD (+ versions)  2. BA scorecard  3. Sponsor approval</a:t>
+            </a:r>
+          </a:p>
+          <a:p>
+            <a:r>
+              <a:t>4. IT-Security sign-off (if flagged)  5. GRC/Legal (if flagged)</a:t>
+            </a:r>
+          </a:p>
+          <a:p>
+            <a:r>
+              <a:t>6. FSD linked to BRD  7. SIT results  8. UAT sign-off</a:t>
+            </a:r>
+          </a:p>
+          <a:p>
+            <a:r>
+              <a:t>9. CR + CAB approval  10. Deployment log  11. Post-deploy verify</a:t>
+            </a:r>
+          </a:p>
+          <a:p>
+            <a:r>
+              <a:t>12. Security scan / pen test (if required)  13. RCA (if incident)</a:t>
             </a:r>
           </a:p>
         </p:txBody>
@@ -6529,7 +7642,7 @@
           <a:lstStyle/>
           <a:p>
             <a:r>
-              <a:t>Summary</a:t>
+              <a:t>Key Metrics — Ops &amp; Leadership Dashboard</a:t>
             </a:r>
           </a:p>
         </p:txBody>
@@ -6550,33 +7663,32 @@
           <a:lstStyle/>
           <a:p>
             <a:r>
-              <a:t>DEMAND: Business defines in BRD — IT does not guess rules</a:t>
-            </a:r>
-          </a:p>
-          <a:p>
-            <a:r>
-              <a:t>DELIVER: Scrum builds from FSD with traceability to BRD</a:t>
-            </a:r>
-          </a:p>
-          <a:p>
-            <a:r>
-              <a:t>ASSURE: IT-Governance + IT-Security + GRC run in parallel</a:t>
-            </a:r>
-          </a:p>
-          <a:p>
-            <a:r>
-              <a:t>SHIP: CAB + UAT — then hypercare → BAU support</a:t>
-            </a:r>
-          </a:p>
-          <a:p/>
-          <a:p>
-            <a:r>
-              <a:t>Docs: docs/12-it-operations-stakeholder-framework.md</a:t>
-            </a:r>
-          </a:p>
-          <a:p>
-            <a:r>
-              <a:t>      docs/11-operations-manager-checklist.md</a:t>
+              <a:t>BRD first-pass acceptance rate          Target ≥ 60%</a:t>
+            </a:r>
+          </a:p>
+          <a:p>
+            <a:r>
+              <a:t>BRD → triage decision time              Target &lt; 5 days</a:t>
+            </a:r>
+          </a:p>
+          <a:p>
+            <a:r>
+              <a:t>Deployments without linked BRD          Target 0</a:t>
+            </a:r>
+          </a:p>
+          <a:p>
+            <a:r>
+              <a:t>UAT sign-off before production          Target 100%</a:t>
+            </a:r>
+          </a:p>
+          <a:p>
+            <a:r>
+              <a:t>Emergency prod changes / month          Target ≤ 2</a:t>
+            </a:r>
+          </a:p>
+          <a:p>
+            <a:r>
+              <a:t>Open IT-Security prod exceptions        Target 0</a:t>
             </a:r>
           </a:p>
         </p:txBody>
@@ -7457,6 +8569,177 @@
           <a:lstStyle/>
           <a:p>
             <a:r>
+              <a:t>Escalation Paths</a:t>
+            </a:r>
+          </a:p>
+        </p:txBody>
+      </p:sp>
+      <p:sp>
+        <p:nvSpPr>
+          <p:cNvPr id="3" name="Content Placeholder 2"/>
+          <p:cNvSpPr>
+            <a:spLocks noGrp="1"/>
+          </p:cNvSpPr>
+          <p:nvPr>
+            <p:ph idx="1"/>
+          </p:nvPr>
+        </p:nvSpPr>
+        <p:spPr/>
+        <p:txBody>
+          <a:bodyPr/>
+          <a:lstStyle/>
+          <a:p>
+            <a:r>
+              <a:t>Skip BRD pressure       → Ops → IT-Governance policy → IT Director</a:t>
+            </a:r>
+          </a:p>
+          <a:p>
+            <a:r>
+              <a:t>GRC hold + deploy rush  → Document hold → GRC Manager → no deploy</a:t>
+            </a:r>
+          </a:p>
+          <a:p>
+            <a:r>
+              <a:t>Security review open    → Ops blocks CR → IT-Security lead</a:t>
+            </a:r>
+          </a:p>
+          <a:p>
+            <a:r>
+              <a:t>Scope dispute           → BA → IT Product → Sponsor</a:t>
+            </a:r>
+          </a:p>
+          <a:p>
+            <a:r>
+              <a:t>CAB rejection           → IT-Governance → IT Product → Sponsor</a:t>
+            </a:r>
+          </a:p>
+          <a:p>
+            <a:r>
+              <a:t>Material incident       → IT-Security IR → CIO → EXCO / BOD</a:t>
+            </a:r>
+          </a:p>
+        </p:txBody>
+      </p:sp>
+    </p:spTree>
+  </p:cSld>
+  <p:clrMapOvr>
+    <a:masterClrMapping/>
+  </p:clrMapOvr>
+</p:sld>
+</file>
+
+<file path=ppt/slides/slide31.xml><?xml version="1.0" encoding="utf-8"?>
+<p:sld xmlns:a="http://schemas.openxmlformats.org/drawingml/2006/main" xmlns:p="http://schemas.openxmlformats.org/presentationml/2006/main" xmlns:r="http://schemas.openxmlformats.org/officeDocument/2006/relationships">
+  <p:cSld>
+    <p:spTree>
+      <p:nvGrpSpPr>
+        <p:cNvPr id="1" name=""/>
+        <p:cNvGrpSpPr/>
+        <p:nvPr/>
+      </p:nvGrpSpPr>
+      <p:grpSpPr/>
+      <p:sp>
+        <p:nvSpPr>
+          <p:cNvPr id="2" name="Title 1"/>
+          <p:cNvSpPr>
+            <a:spLocks noGrp="1"/>
+          </p:cNvSpPr>
+          <p:nvPr>
+            <p:ph type="title"/>
+          </p:nvPr>
+        </p:nvSpPr>
+        <p:spPr/>
+        <p:txBody>
+          <a:bodyPr/>
+          <a:lstStyle/>
+          <a:p>
+            <a:r>
+              <a:t>Summary</a:t>
+            </a:r>
+          </a:p>
+        </p:txBody>
+      </p:sp>
+      <p:sp>
+        <p:nvSpPr>
+          <p:cNvPr id="3" name="Content Placeholder 2"/>
+          <p:cNvSpPr>
+            <a:spLocks noGrp="1"/>
+          </p:cNvSpPr>
+          <p:nvPr>
+            <p:ph idx="1"/>
+          </p:nvPr>
+        </p:nvSpPr>
+        <p:spPr/>
+        <p:txBody>
+          <a:bodyPr/>
+          <a:lstStyle/>
+          <a:p>
+            <a:r>
+              <a:t>DEMAND: Business defines in BRD — IT does not guess rules</a:t>
+            </a:r>
+          </a:p>
+          <a:p>
+            <a:r>
+              <a:t>DELIVER: Scrum builds from FSD with traceability to BRD</a:t>
+            </a:r>
+          </a:p>
+          <a:p>
+            <a:r>
+              <a:t>ASSURE: IT-Governance + IT-Security + GRC run in parallel</a:t>
+            </a:r>
+          </a:p>
+          <a:p>
+            <a:r>
+              <a:t>SHIP: CAB + UAT — then hypercare → BAU support</a:t>
+            </a:r>
+          </a:p>
+          <a:p/>
+          <a:p>
+            <a:r>
+              <a:t>Docs: docs/12-it-operations-stakeholder-framework.md</a:t>
+            </a:r>
+          </a:p>
+          <a:p>
+            <a:r>
+              <a:t>      docs/11-operations-manager-checklist.md</a:t>
+            </a:r>
+          </a:p>
+        </p:txBody>
+      </p:sp>
+    </p:spTree>
+  </p:cSld>
+  <p:clrMapOvr>
+    <a:masterClrMapping/>
+  </p:clrMapOvr>
+</p:sld>
+</file>
+
+<file path=ppt/slides/slide32.xml><?xml version="1.0" encoding="utf-8"?>
+<p:sld xmlns:a="http://schemas.openxmlformats.org/drawingml/2006/main" xmlns:p="http://schemas.openxmlformats.org/presentationml/2006/main" xmlns:r="http://schemas.openxmlformats.org/officeDocument/2006/relationships">
+  <p:cSld>
+    <p:spTree>
+      <p:nvGrpSpPr>
+        <p:cNvPr id="1" name=""/>
+        <p:cNvGrpSpPr/>
+        <p:nvPr/>
+      </p:nvGrpSpPr>
+      <p:grpSpPr/>
+      <p:sp>
+        <p:nvSpPr>
+          <p:cNvPr id="2" name="Title 1"/>
+          <p:cNvSpPr>
+            <a:spLocks noGrp="1"/>
+          </p:cNvSpPr>
+          <p:nvPr>
+            <p:ph type="title"/>
+          </p:nvPr>
+        </p:nvSpPr>
+        <p:spPr/>
+        <p:txBody>
+          <a:bodyPr/>
+          <a:lstStyle/>
+          <a:p>
+            <a:r>
               <a:t>Next Steps</a:t>
             </a:r>
           </a:p>
@@ -7537,59 +8820,2441 @@
           <a:lstStyle/>
           <a:p>
             <a:r>
-              <a:t>Document Chain — Who Owns What</a:t>
-            </a:r>
-          </a:p>
-        </p:txBody>
-      </p:sp>
-      <p:sp>
-        <p:nvSpPr>
-          <p:cNvPr id="3" name="Content Placeholder 2"/>
-          <p:cNvSpPr>
-            <a:spLocks noGrp="1"/>
-          </p:cNvSpPr>
-          <p:nvPr>
-            <p:ph idx="1"/>
-          </p:nvPr>
-        </p:nvSpPr>
-        <p:spPr/>
-        <p:txBody>
-          <a:bodyPr/>
-          <a:lstStyle/>
-          <a:p>
-            <a:r>
-              <a:t>BRD (Business Requirements)     → Business writes, Sponsor signs</a:t>
-            </a:r>
-          </a:p>
-          <a:p>
-            <a:r>
-              <a:t>FSD / FRD (Functional Spec)     → BA + IT Product; derived from BRD</a:t>
-            </a:r>
-          </a:p>
-          <a:p>
-            <a:r>
-              <a:t>User Stories &amp; Tasks            → BA + Dev; traceable to FSD + BRD AC</a:t>
-            </a:r>
-          </a:p>
-          <a:p>
-            <a:r>
-              <a:t>Test Cases (SIT)                → QA; mapped to acceptance criteria</a:t>
-            </a:r>
-          </a:p>
-          <a:p>
-            <a:r>
-              <a:t>UAT Scripts                     → Business; from BRD Section M</a:t>
-            </a:r>
-          </a:p>
-          <a:p>
-            <a:r>
-              <a:t>Change Request (CR)             → IT Ops + IT-Governance (CAB)</a:t>
-            </a:r>
-          </a:p>
-          <a:p/>
-          <a:p>
-            <a:r>
-              <a:t>Rule: each document links upward — full traceability for Audit</a:t>
+              <a:t>Swimlane — Cross-Functional Delivery</a:t>
+            </a:r>
+          </a:p>
+        </p:txBody>
+      </p:sp>
+      <p:sp>
+        <p:nvSpPr>
+          <p:cNvPr id="3" name="TextBox 2"/>
+          <p:cNvSpPr txBox="1"/>
+          <p:nvPr/>
+        </p:nvSpPr>
+        <p:spPr>
+          <a:xfrm>
+            <a:off x="365760" y="960120"/>
+            <a:ext cx="11430000" cy="320040"/>
+          </a:xfrm>
+          <a:prstGeom prst="rect">
+            <a:avLst/>
+          </a:prstGeom>
+          <a:noFill/>
+        </p:spPr>
+        <p:txBody>
+          <a:bodyPr wrap="none">
+            <a:spAutoFit/>
+          </a:bodyPr>
+          <a:lstStyle/>
+          <a:p>
+            <a:pPr>
+              <a:defRPr sz="1300">
+                <a:solidFill>
+                  <a:srgbClr val="555555"/>
+                </a:solidFill>
+              </a:defRPr>
+            </a:pPr>
+            <a:r>
+              <a:t>No hand-off skips a lane — every phase has a named owner</a:t>
+            </a:r>
+          </a:p>
+        </p:txBody>
+      </p:sp>
+      <p:sp>
+        <p:nvSpPr>
+          <p:cNvPr id="4" name="TextBox 3"/>
+          <p:cNvSpPr txBox="1"/>
+          <p:nvPr/>
+        </p:nvSpPr>
+        <p:spPr>
+          <a:xfrm>
+            <a:off x="1920240" y="1508760"/>
+            <a:ext cx="1434693" cy="365760"/>
+          </a:xfrm>
+          <a:prstGeom prst="rect">
+            <a:avLst/>
+          </a:prstGeom>
+          <a:noFill/>
+        </p:spPr>
+        <p:txBody>
+          <a:bodyPr wrap="square">
+            <a:spAutoFit/>
+          </a:bodyPr>
+          <a:lstStyle/>
+          <a:p>
+            <a:pPr algn="l">
+              <a:defRPr sz="1100" b="1">
+                <a:solidFill>
+                  <a:srgbClr val="333333"/>
+                </a:solidFill>
+              </a:defRPr>
+            </a:pPr>
+            <a:r>
+              <a:t>Intake</a:t>
+            </a:r>
+          </a:p>
+        </p:txBody>
+      </p:sp>
+      <p:sp>
+        <p:nvSpPr>
+          <p:cNvPr id="5" name="TextBox 4"/>
+          <p:cNvSpPr txBox="1"/>
+          <p:nvPr/>
+        </p:nvSpPr>
+        <p:spPr>
+          <a:xfrm>
+            <a:off x="3354933" y="1508760"/>
+            <a:ext cx="1434693" cy="365760"/>
+          </a:xfrm>
+          <a:prstGeom prst="rect">
+            <a:avLst/>
+          </a:prstGeom>
+          <a:noFill/>
+        </p:spPr>
+        <p:txBody>
+          <a:bodyPr wrap="square">
+            <a:spAutoFit/>
+          </a:bodyPr>
+          <a:lstStyle/>
+          <a:p>
+            <a:pPr algn="l">
+              <a:defRPr sz="1100" b="1">
+                <a:solidFill>
+                  <a:srgbClr val="333333"/>
+                </a:solidFill>
+              </a:defRPr>
+            </a:pPr>
+            <a:r>
+              <a:t>Define</a:t>
+            </a:r>
+          </a:p>
+        </p:txBody>
+      </p:sp>
+      <p:sp>
+        <p:nvSpPr>
+          <p:cNvPr id="6" name="TextBox 5"/>
+          <p:cNvSpPr txBox="1"/>
+          <p:nvPr/>
+        </p:nvSpPr>
+        <p:spPr>
+          <a:xfrm>
+            <a:off x="4789627" y="1508760"/>
+            <a:ext cx="1434693" cy="365760"/>
+          </a:xfrm>
+          <a:prstGeom prst="rect">
+            <a:avLst/>
+          </a:prstGeom>
+          <a:noFill/>
+        </p:spPr>
+        <p:txBody>
+          <a:bodyPr wrap="square">
+            <a:spAutoFit/>
+          </a:bodyPr>
+          <a:lstStyle/>
+          <a:p>
+            <a:pPr algn="l">
+              <a:defRPr sz="1100" b="1">
+                <a:solidFill>
+                  <a:srgbClr val="333333"/>
+                </a:solidFill>
+              </a:defRPr>
+            </a:pPr>
+            <a:r>
+              <a:t>Design</a:t>
+            </a:r>
+          </a:p>
+        </p:txBody>
+      </p:sp>
+      <p:sp>
+        <p:nvSpPr>
+          <p:cNvPr id="7" name="TextBox 6"/>
+          <p:cNvSpPr txBox="1"/>
+          <p:nvPr/>
+        </p:nvSpPr>
+        <p:spPr>
+          <a:xfrm>
+            <a:off x="6224320" y="1508760"/>
+            <a:ext cx="1434693" cy="365760"/>
+          </a:xfrm>
+          <a:prstGeom prst="rect">
+            <a:avLst/>
+          </a:prstGeom>
+          <a:noFill/>
+        </p:spPr>
+        <p:txBody>
+          <a:bodyPr wrap="square">
+            <a:spAutoFit/>
+          </a:bodyPr>
+          <a:lstStyle/>
+          <a:p>
+            <a:pPr algn="l">
+              <a:defRPr sz="1100" b="1">
+                <a:solidFill>
+                  <a:srgbClr val="333333"/>
+                </a:solidFill>
+              </a:defRPr>
+            </a:pPr>
+            <a:r>
+              <a:t>Build</a:t>
+            </a:r>
+          </a:p>
+        </p:txBody>
+      </p:sp>
+      <p:sp>
+        <p:nvSpPr>
+          <p:cNvPr id="8" name="TextBox 7"/>
+          <p:cNvSpPr txBox="1"/>
+          <p:nvPr/>
+        </p:nvSpPr>
+        <p:spPr>
+          <a:xfrm>
+            <a:off x="7659014" y="1508760"/>
+            <a:ext cx="1434693" cy="365760"/>
+          </a:xfrm>
+          <a:prstGeom prst="rect">
+            <a:avLst/>
+          </a:prstGeom>
+          <a:noFill/>
+        </p:spPr>
+        <p:txBody>
+          <a:bodyPr wrap="square">
+            <a:spAutoFit/>
+          </a:bodyPr>
+          <a:lstStyle/>
+          <a:p>
+            <a:pPr algn="l">
+              <a:defRPr sz="1100" b="1">
+                <a:solidFill>
+                  <a:srgbClr val="333333"/>
+                </a:solidFill>
+              </a:defRPr>
+            </a:pPr>
+            <a:r>
+              <a:t>Test</a:t>
+            </a:r>
+          </a:p>
+        </p:txBody>
+      </p:sp>
+      <p:sp>
+        <p:nvSpPr>
+          <p:cNvPr id="9" name="TextBox 8"/>
+          <p:cNvSpPr txBox="1"/>
+          <p:nvPr/>
+        </p:nvSpPr>
+        <p:spPr>
+          <a:xfrm>
+            <a:off x="9093708" y="1508760"/>
+            <a:ext cx="1434693" cy="365760"/>
+          </a:xfrm>
+          <a:prstGeom prst="rect">
+            <a:avLst/>
+          </a:prstGeom>
+          <a:noFill/>
+        </p:spPr>
+        <p:txBody>
+          <a:bodyPr wrap="square">
+            <a:spAutoFit/>
+          </a:bodyPr>
+          <a:lstStyle/>
+          <a:p>
+            <a:pPr algn="l">
+              <a:defRPr sz="1100" b="1">
+                <a:solidFill>
+                  <a:srgbClr val="333333"/>
+                </a:solidFill>
+              </a:defRPr>
+            </a:pPr>
+            <a:r>
+              <a:t>Release</a:t>
+            </a:r>
+          </a:p>
+        </p:txBody>
+      </p:sp>
+      <p:sp>
+        <p:nvSpPr>
+          <p:cNvPr id="10" name="TextBox 9"/>
+          <p:cNvSpPr txBox="1"/>
+          <p:nvPr/>
+        </p:nvSpPr>
+        <p:spPr>
+          <a:xfrm>
+            <a:off x="10528401" y="1508760"/>
+            <a:ext cx="1434693" cy="365760"/>
+          </a:xfrm>
+          <a:prstGeom prst="rect">
+            <a:avLst/>
+          </a:prstGeom>
+          <a:noFill/>
+        </p:spPr>
+        <p:txBody>
+          <a:bodyPr wrap="square">
+            <a:spAutoFit/>
+          </a:bodyPr>
+          <a:lstStyle/>
+          <a:p>
+            <a:pPr algn="l">
+              <a:defRPr sz="1100" b="1">
+                <a:solidFill>
+                  <a:srgbClr val="333333"/>
+                </a:solidFill>
+              </a:defRPr>
+            </a:pPr>
+            <a:r>
+              <a:t>Operate</a:t>
+            </a:r>
+          </a:p>
+        </p:txBody>
+      </p:sp>
+      <p:sp>
+        <p:nvSpPr>
+          <p:cNvPr id="11" name="Rectangle 10"/>
+          <p:cNvSpPr/>
+          <p:nvPr/>
+        </p:nvSpPr>
+        <p:spPr>
+          <a:xfrm>
+            <a:off x="365760" y="1920240"/>
+            <a:ext cx="1554480" cy="707136"/>
+          </a:xfrm>
+          <a:prstGeom prst="rect">
+            <a:avLst/>
+          </a:prstGeom>
+          <a:solidFill>
+            <a:srgbClr val="1F4E79"/>
+          </a:solidFill>
+          <a:ln>
+            <a:solidFill>
+              <a:srgbClr val="FFFFFF"/>
+            </a:solidFill>
+          </a:ln>
+        </p:spPr>
+        <p:style>
+          <a:lnRef idx="1">
+            <a:schemeClr val="accent1"/>
+          </a:lnRef>
+          <a:fillRef idx="3">
+            <a:schemeClr val="accent1"/>
+          </a:fillRef>
+          <a:effectRef idx="2">
+            <a:schemeClr val="accent1"/>
+          </a:effectRef>
+          <a:fontRef idx="minor">
+            <a:schemeClr val="lt1"/>
+          </a:fontRef>
+        </p:style>
+        <p:txBody>
+          <a:bodyPr rtlCol="0" anchor="ctr" wrap="square"/>
+          <a:lstStyle/>
+          <a:p>
+            <a:pPr algn="l">
+              <a:defRPr sz="1100" b="1">
+                <a:solidFill>
+                  <a:srgbClr val="FFFFFF"/>
+                </a:solidFill>
+              </a:defRPr>
+            </a:pPr>
+            <a:r>
+              <a:t>Business / Sponsor</a:t>
+            </a:r>
+          </a:p>
+        </p:txBody>
+      </p:sp>
+      <p:sp>
+        <p:nvSpPr>
+          <p:cNvPr id="12" name="Rectangle 11"/>
+          <p:cNvSpPr/>
+          <p:nvPr/>
+        </p:nvSpPr>
+        <p:spPr>
+          <a:xfrm>
+            <a:off x="1920240" y="1920240"/>
+            <a:ext cx="10042855" cy="707136"/>
+          </a:xfrm>
+          <a:prstGeom prst="rect">
+            <a:avLst/>
+          </a:prstGeom>
+          <a:solidFill>
+            <a:srgbClr val="F2F2F2"/>
+          </a:solidFill>
+          <a:ln>
+            <a:solidFill>
+              <a:srgbClr val="D9D9D9"/>
+            </a:solidFill>
+          </a:ln>
+          <a:effectLst/>
+        </p:spPr>
+        <p:style>
+          <a:lnRef idx="1">
+            <a:schemeClr val="accent1"/>
+          </a:lnRef>
+          <a:fillRef idx="3">
+            <a:schemeClr val="accent1"/>
+          </a:fillRef>
+          <a:effectRef idx="2">
+            <a:schemeClr val="accent1"/>
+          </a:effectRef>
+          <a:fontRef idx="minor">
+            <a:schemeClr val="lt1"/>
+          </a:fontRef>
+        </p:style>
+        <p:txBody>
+          <a:bodyPr rtlCol="0" anchor="ctr"/>
+          <a:lstStyle/>
+          <a:p>
+            <a:pPr algn="ctr"/>
+          </a:p>
+        </p:txBody>
+      </p:sp>
+      <p:sp>
+        <p:nvSpPr>
+          <p:cNvPr id="13" name="Rounded Rectangle 12"/>
+          <p:cNvSpPr/>
+          <p:nvPr/>
+        </p:nvSpPr>
+        <p:spPr>
+          <a:xfrm>
+            <a:off x="1975104" y="1975104"/>
+            <a:ext cx="1324965" cy="597408"/>
+          </a:xfrm>
+          <a:prstGeom prst="roundRect">
+            <a:avLst/>
+          </a:prstGeom>
+          <a:solidFill>
+            <a:srgbClr val="1F4E79"/>
+          </a:solidFill>
+          <a:ln>
+            <a:solidFill>
+              <a:srgbClr val="FFFFFF"/>
+            </a:solidFill>
+          </a:ln>
+        </p:spPr>
+        <p:style>
+          <a:lnRef idx="1">
+            <a:schemeClr val="accent1"/>
+          </a:lnRef>
+          <a:fillRef idx="3">
+            <a:schemeClr val="accent1"/>
+          </a:fillRef>
+          <a:effectRef idx="2">
+            <a:schemeClr val="accent1"/>
+          </a:effectRef>
+          <a:fontRef idx="minor">
+            <a:schemeClr val="lt1"/>
+          </a:fontRef>
+        </p:style>
+        <p:txBody>
+          <a:bodyPr rtlCol="0" anchor="ctr" wrap="square"/>
+          <a:lstStyle/>
+          <a:p>
+            <a:pPr algn="l">
+              <a:defRPr sz="900" b="1">
+                <a:solidFill>
+                  <a:srgbClr val="FFFFFF"/>
+                </a:solidFill>
+              </a:defRPr>
+            </a:pPr>
+            <a:r>
+              <a:t>Raise need</a:t>
+            </a:r>
+          </a:p>
+        </p:txBody>
+      </p:sp>
+      <p:sp>
+        <p:nvSpPr>
+          <p:cNvPr id="14" name="Rounded Rectangle 13"/>
+          <p:cNvSpPr/>
+          <p:nvPr/>
+        </p:nvSpPr>
+        <p:spPr>
+          <a:xfrm>
+            <a:off x="3409797" y="1975104"/>
+            <a:ext cx="1324965" cy="597408"/>
+          </a:xfrm>
+          <a:prstGeom prst="roundRect">
+            <a:avLst/>
+          </a:prstGeom>
+          <a:solidFill>
+            <a:srgbClr val="1F4E79"/>
+          </a:solidFill>
+          <a:ln>
+            <a:solidFill>
+              <a:srgbClr val="FFFFFF"/>
+            </a:solidFill>
+          </a:ln>
+        </p:spPr>
+        <p:style>
+          <a:lnRef idx="1">
+            <a:schemeClr val="accent1"/>
+          </a:lnRef>
+          <a:fillRef idx="3">
+            <a:schemeClr val="accent1"/>
+          </a:fillRef>
+          <a:effectRef idx="2">
+            <a:schemeClr val="accent1"/>
+          </a:effectRef>
+          <a:fontRef idx="minor">
+            <a:schemeClr val="lt1"/>
+          </a:fontRef>
+        </p:style>
+        <p:txBody>
+          <a:bodyPr rtlCol="0" anchor="ctr" wrap="square"/>
+          <a:lstStyle/>
+          <a:p>
+            <a:pPr algn="l">
+              <a:defRPr sz="900" b="1">
+                <a:solidFill>
+                  <a:srgbClr val="FFFFFF"/>
+                </a:solidFill>
+              </a:defRPr>
+            </a:pPr>
+            <a:r>
+              <a:t>Write BRD</a:t>
+            </a:r>
+            <a:br/>
+            <a:r>
+              <a:t>+ sign</a:t>
+            </a:r>
+          </a:p>
+        </p:txBody>
+      </p:sp>
+      <p:sp>
+        <p:nvSpPr>
+          <p:cNvPr id="15" name="Rounded Rectangle 14"/>
+          <p:cNvSpPr/>
+          <p:nvPr/>
+        </p:nvSpPr>
+        <p:spPr>
+          <a:xfrm>
+            <a:off x="7713878" y="1975104"/>
+            <a:ext cx="1324965" cy="597408"/>
+          </a:xfrm>
+          <a:prstGeom prst="roundRect">
+            <a:avLst/>
+          </a:prstGeom>
+          <a:solidFill>
+            <a:srgbClr val="1F4E79"/>
+          </a:solidFill>
+          <a:ln>
+            <a:solidFill>
+              <a:srgbClr val="FFFFFF"/>
+            </a:solidFill>
+          </a:ln>
+        </p:spPr>
+        <p:style>
+          <a:lnRef idx="1">
+            <a:schemeClr val="accent1"/>
+          </a:lnRef>
+          <a:fillRef idx="3">
+            <a:schemeClr val="accent1"/>
+          </a:fillRef>
+          <a:effectRef idx="2">
+            <a:schemeClr val="accent1"/>
+          </a:effectRef>
+          <a:fontRef idx="minor">
+            <a:schemeClr val="lt1"/>
+          </a:fontRef>
+        </p:style>
+        <p:txBody>
+          <a:bodyPr rtlCol="0" anchor="ctr" wrap="square"/>
+          <a:lstStyle/>
+          <a:p>
+            <a:pPr algn="l">
+              <a:defRPr sz="900" b="1">
+                <a:solidFill>
+                  <a:srgbClr val="FFFFFF"/>
+                </a:solidFill>
+              </a:defRPr>
+            </a:pPr>
+            <a:r>
+              <a:t>UAT</a:t>
+            </a:r>
+            <a:br/>
+            <a:r>
+              <a:t>sign-off</a:t>
+            </a:r>
+          </a:p>
+        </p:txBody>
+      </p:sp>
+      <p:sp>
+        <p:nvSpPr>
+          <p:cNvPr id="16" name="Rounded Rectangle 15"/>
+          <p:cNvSpPr/>
+          <p:nvPr/>
+        </p:nvSpPr>
+        <p:spPr>
+          <a:xfrm>
+            <a:off x="9148572" y="1975104"/>
+            <a:ext cx="1324965" cy="597408"/>
+          </a:xfrm>
+          <a:prstGeom prst="roundRect">
+            <a:avLst/>
+          </a:prstGeom>
+          <a:solidFill>
+            <a:srgbClr val="1F4E79"/>
+          </a:solidFill>
+          <a:ln>
+            <a:solidFill>
+              <a:srgbClr val="FFFFFF"/>
+            </a:solidFill>
+          </a:ln>
+        </p:spPr>
+        <p:style>
+          <a:lnRef idx="1">
+            <a:schemeClr val="accent1"/>
+          </a:lnRef>
+          <a:fillRef idx="3">
+            <a:schemeClr val="accent1"/>
+          </a:fillRef>
+          <a:effectRef idx="2">
+            <a:schemeClr val="accent1"/>
+          </a:effectRef>
+          <a:fontRef idx="minor">
+            <a:schemeClr val="lt1"/>
+          </a:fontRef>
+        </p:style>
+        <p:txBody>
+          <a:bodyPr rtlCol="0" anchor="ctr" wrap="square"/>
+          <a:lstStyle/>
+          <a:p>
+            <a:pPr algn="l">
+              <a:defRPr sz="900" b="1">
+                <a:solidFill>
+                  <a:srgbClr val="FFFFFF"/>
+                </a:solidFill>
+              </a:defRPr>
+            </a:pPr>
+            <a:r>
+              <a:t>Go-live</a:t>
+            </a:r>
+            <a:br/>
+            <a:r>
+              <a:t>approve</a:t>
+            </a:r>
+          </a:p>
+        </p:txBody>
+      </p:sp>
+      <p:sp>
+        <p:nvSpPr>
+          <p:cNvPr id="17" name="Rounded Rectangle 16"/>
+          <p:cNvSpPr/>
+          <p:nvPr/>
+        </p:nvSpPr>
+        <p:spPr>
+          <a:xfrm>
+            <a:off x="10583265" y="1975104"/>
+            <a:ext cx="1324965" cy="597408"/>
+          </a:xfrm>
+          <a:prstGeom prst="roundRect">
+            <a:avLst/>
+          </a:prstGeom>
+          <a:solidFill>
+            <a:srgbClr val="1F4E79"/>
+          </a:solidFill>
+          <a:ln>
+            <a:solidFill>
+              <a:srgbClr val="FFFFFF"/>
+            </a:solidFill>
+          </a:ln>
+        </p:spPr>
+        <p:style>
+          <a:lnRef idx="1">
+            <a:schemeClr val="accent1"/>
+          </a:lnRef>
+          <a:fillRef idx="3">
+            <a:schemeClr val="accent1"/>
+          </a:fillRef>
+          <a:effectRef idx="2">
+            <a:schemeClr val="accent1"/>
+          </a:effectRef>
+          <a:fontRef idx="minor">
+            <a:schemeClr val="lt1"/>
+          </a:fontRef>
+        </p:style>
+        <p:txBody>
+          <a:bodyPr rtlCol="0" anchor="ctr" wrap="square"/>
+          <a:lstStyle/>
+          <a:p>
+            <a:pPr algn="l">
+              <a:defRPr sz="900" b="1">
+                <a:solidFill>
+                  <a:srgbClr val="FFFFFF"/>
+                </a:solidFill>
+              </a:defRPr>
+            </a:pPr>
+            <a:r>
+              <a:t>Confirm</a:t>
+            </a:r>
+            <a:br/>
+            <a:r>
+              <a:t>service</a:t>
+            </a:r>
+          </a:p>
+        </p:txBody>
+      </p:sp>
+      <p:sp>
+        <p:nvSpPr>
+          <p:cNvPr id="18" name="Rectangle 17"/>
+          <p:cNvSpPr/>
+          <p:nvPr/>
+        </p:nvSpPr>
+        <p:spPr>
+          <a:xfrm>
+            <a:off x="365760" y="2682240"/>
+            <a:ext cx="1554480" cy="707136"/>
+          </a:xfrm>
+          <a:prstGeom prst="rect">
+            <a:avLst/>
+          </a:prstGeom>
+          <a:solidFill>
+            <a:srgbClr val="2E75B6"/>
+          </a:solidFill>
+          <a:ln>
+            <a:solidFill>
+              <a:srgbClr val="FFFFFF"/>
+            </a:solidFill>
+          </a:ln>
+        </p:spPr>
+        <p:style>
+          <a:lnRef idx="1">
+            <a:schemeClr val="accent1"/>
+          </a:lnRef>
+          <a:fillRef idx="3">
+            <a:schemeClr val="accent1"/>
+          </a:fillRef>
+          <a:effectRef idx="2">
+            <a:schemeClr val="accent1"/>
+          </a:effectRef>
+          <a:fontRef idx="minor">
+            <a:schemeClr val="lt1"/>
+          </a:fontRef>
+        </p:style>
+        <p:txBody>
+          <a:bodyPr rtlCol="0" anchor="ctr" wrap="square"/>
+          <a:lstStyle/>
+          <a:p>
+            <a:pPr algn="l">
+              <a:defRPr sz="1100" b="1">
+                <a:solidFill>
+                  <a:srgbClr val="FFFFFF"/>
+                </a:solidFill>
+              </a:defRPr>
+            </a:pPr>
+            <a:r>
+              <a:t>BA</a:t>
+            </a:r>
+          </a:p>
+        </p:txBody>
+      </p:sp>
+      <p:sp>
+        <p:nvSpPr>
+          <p:cNvPr id="19" name="Rectangle 18"/>
+          <p:cNvSpPr/>
+          <p:nvPr/>
+        </p:nvSpPr>
+        <p:spPr>
+          <a:xfrm>
+            <a:off x="1920240" y="2682240"/>
+            <a:ext cx="10042855" cy="707136"/>
+          </a:xfrm>
+          <a:prstGeom prst="rect">
+            <a:avLst/>
+          </a:prstGeom>
+          <a:solidFill>
+            <a:srgbClr val="F2F2F2"/>
+          </a:solidFill>
+          <a:ln>
+            <a:solidFill>
+              <a:srgbClr val="D9D9D9"/>
+            </a:solidFill>
+          </a:ln>
+          <a:effectLst/>
+        </p:spPr>
+        <p:style>
+          <a:lnRef idx="1">
+            <a:schemeClr val="accent1"/>
+          </a:lnRef>
+          <a:fillRef idx="3">
+            <a:schemeClr val="accent1"/>
+          </a:fillRef>
+          <a:effectRef idx="2">
+            <a:schemeClr val="accent1"/>
+          </a:effectRef>
+          <a:fontRef idx="minor">
+            <a:schemeClr val="lt1"/>
+          </a:fontRef>
+        </p:style>
+        <p:txBody>
+          <a:bodyPr rtlCol="0" anchor="ctr"/>
+          <a:lstStyle/>
+          <a:p>
+            <a:pPr algn="ctr"/>
+          </a:p>
+        </p:txBody>
+      </p:sp>
+      <p:sp>
+        <p:nvSpPr>
+          <p:cNvPr id="20" name="Rounded Rectangle 19"/>
+          <p:cNvSpPr/>
+          <p:nvPr/>
+        </p:nvSpPr>
+        <p:spPr>
+          <a:xfrm>
+            <a:off x="1975104" y="2737104"/>
+            <a:ext cx="1324965" cy="597408"/>
+          </a:xfrm>
+          <a:prstGeom prst="roundRect">
+            <a:avLst/>
+          </a:prstGeom>
+          <a:solidFill>
+            <a:srgbClr val="2E75B6"/>
+          </a:solidFill>
+          <a:ln>
+            <a:solidFill>
+              <a:srgbClr val="FFFFFF"/>
+            </a:solidFill>
+          </a:ln>
+        </p:spPr>
+        <p:style>
+          <a:lnRef idx="1">
+            <a:schemeClr val="accent1"/>
+          </a:lnRef>
+          <a:fillRef idx="3">
+            <a:schemeClr val="accent1"/>
+          </a:fillRef>
+          <a:effectRef idx="2">
+            <a:schemeClr val="accent1"/>
+          </a:effectRef>
+          <a:fontRef idx="minor">
+            <a:schemeClr val="lt1"/>
+          </a:fontRef>
+        </p:style>
+        <p:txBody>
+          <a:bodyPr rtlCol="0" anchor="ctr" wrap="square"/>
+          <a:lstStyle/>
+          <a:p>
+            <a:pPr algn="l">
+              <a:defRPr sz="900" b="1">
+                <a:solidFill>
+                  <a:srgbClr val="FFFFFF"/>
+                </a:solidFill>
+              </a:defRPr>
+            </a:pPr>
+            <a:r>
+              <a:t>Classify</a:t>
+            </a:r>
+          </a:p>
+        </p:txBody>
+      </p:sp>
+      <p:sp>
+        <p:nvSpPr>
+          <p:cNvPr id="21" name="Rounded Rectangle 20"/>
+          <p:cNvSpPr/>
+          <p:nvPr/>
+        </p:nvSpPr>
+        <p:spPr>
+          <a:xfrm>
+            <a:off x="3409797" y="2737104"/>
+            <a:ext cx="1324965" cy="597408"/>
+          </a:xfrm>
+          <a:prstGeom prst="roundRect">
+            <a:avLst/>
+          </a:prstGeom>
+          <a:solidFill>
+            <a:srgbClr val="2E75B6"/>
+          </a:solidFill>
+          <a:ln>
+            <a:solidFill>
+              <a:srgbClr val="FFFFFF"/>
+            </a:solidFill>
+          </a:ln>
+        </p:spPr>
+        <p:style>
+          <a:lnRef idx="1">
+            <a:schemeClr val="accent1"/>
+          </a:lnRef>
+          <a:fillRef idx="3">
+            <a:schemeClr val="accent1"/>
+          </a:fillRef>
+          <a:effectRef idx="2">
+            <a:schemeClr val="accent1"/>
+          </a:effectRef>
+          <a:fontRef idx="minor">
+            <a:schemeClr val="lt1"/>
+          </a:fontRef>
+        </p:style>
+        <p:txBody>
+          <a:bodyPr rtlCol="0" anchor="ctr" wrap="square"/>
+          <a:lstStyle/>
+          <a:p>
+            <a:pPr algn="l">
+              <a:defRPr sz="900" b="1">
+                <a:solidFill>
+                  <a:srgbClr val="FFFFFF"/>
+                </a:solidFill>
+              </a:defRPr>
+            </a:pPr>
+            <a:r>
+              <a:t>Score BRD</a:t>
+            </a:r>
+            <a:br/>
+            <a:r>
+              <a:t>≥80%</a:t>
+            </a:r>
+          </a:p>
+        </p:txBody>
+      </p:sp>
+      <p:sp>
+        <p:nvSpPr>
+          <p:cNvPr id="22" name="Rounded Rectangle 21"/>
+          <p:cNvSpPr/>
+          <p:nvPr/>
+        </p:nvSpPr>
+        <p:spPr>
+          <a:xfrm>
+            <a:off x="4844491" y="2737104"/>
+            <a:ext cx="1324965" cy="597408"/>
+          </a:xfrm>
+          <a:prstGeom prst="roundRect">
+            <a:avLst/>
+          </a:prstGeom>
+          <a:solidFill>
+            <a:srgbClr val="2E75B6"/>
+          </a:solidFill>
+          <a:ln>
+            <a:solidFill>
+              <a:srgbClr val="FFFFFF"/>
+            </a:solidFill>
+          </a:ln>
+        </p:spPr>
+        <p:style>
+          <a:lnRef idx="1">
+            <a:schemeClr val="accent1"/>
+          </a:lnRef>
+          <a:fillRef idx="3">
+            <a:schemeClr val="accent1"/>
+          </a:fillRef>
+          <a:effectRef idx="2">
+            <a:schemeClr val="accent1"/>
+          </a:effectRef>
+          <a:fontRef idx="minor">
+            <a:schemeClr val="lt1"/>
+          </a:fontRef>
+        </p:style>
+        <p:txBody>
+          <a:bodyPr rtlCol="0" anchor="ctr" wrap="square"/>
+          <a:lstStyle/>
+          <a:p>
+            <a:pPr algn="l">
+              <a:defRPr sz="900" b="1">
+                <a:solidFill>
+                  <a:srgbClr val="FFFFFF"/>
+                </a:solidFill>
+              </a:defRPr>
+            </a:pPr>
+            <a:r>
+              <a:t>Author</a:t>
+            </a:r>
+            <a:br/>
+            <a:r>
+              <a:t>FSD</a:t>
+            </a:r>
+          </a:p>
+        </p:txBody>
+      </p:sp>
+      <p:sp>
+        <p:nvSpPr>
+          <p:cNvPr id="23" name="Rounded Rectangle 22"/>
+          <p:cNvSpPr/>
+          <p:nvPr/>
+        </p:nvSpPr>
+        <p:spPr>
+          <a:xfrm>
+            <a:off x="6279184" y="2737104"/>
+            <a:ext cx="1324965" cy="597408"/>
+          </a:xfrm>
+          <a:prstGeom prst="roundRect">
+            <a:avLst/>
+          </a:prstGeom>
+          <a:solidFill>
+            <a:srgbClr val="2E75B6"/>
+          </a:solidFill>
+          <a:ln>
+            <a:solidFill>
+              <a:srgbClr val="FFFFFF"/>
+            </a:solidFill>
+          </a:ln>
+        </p:spPr>
+        <p:style>
+          <a:lnRef idx="1">
+            <a:schemeClr val="accent1"/>
+          </a:lnRef>
+          <a:fillRef idx="3">
+            <a:schemeClr val="accent1"/>
+          </a:fillRef>
+          <a:effectRef idx="2">
+            <a:schemeClr val="accent1"/>
+          </a:effectRef>
+          <a:fontRef idx="minor">
+            <a:schemeClr val="lt1"/>
+          </a:fontRef>
+        </p:style>
+        <p:txBody>
+          <a:bodyPr rtlCol="0" anchor="ctr" wrap="square"/>
+          <a:lstStyle/>
+          <a:p>
+            <a:pPr algn="l">
+              <a:defRPr sz="900" b="1">
+                <a:solidFill>
+                  <a:srgbClr val="FFFFFF"/>
+                </a:solidFill>
+              </a:defRPr>
+            </a:pPr>
+            <a:r>
+              <a:t>Refine</a:t>
+            </a:r>
+            <a:br/>
+            <a:r>
+              <a:t>stories</a:t>
+            </a:r>
+          </a:p>
+        </p:txBody>
+      </p:sp>
+      <p:sp>
+        <p:nvSpPr>
+          <p:cNvPr id="24" name="Rounded Rectangle 23"/>
+          <p:cNvSpPr/>
+          <p:nvPr/>
+        </p:nvSpPr>
+        <p:spPr>
+          <a:xfrm>
+            <a:off x="7713878" y="2737104"/>
+            <a:ext cx="1324965" cy="597408"/>
+          </a:xfrm>
+          <a:prstGeom prst="roundRect">
+            <a:avLst/>
+          </a:prstGeom>
+          <a:solidFill>
+            <a:srgbClr val="2E75B6"/>
+          </a:solidFill>
+          <a:ln>
+            <a:solidFill>
+              <a:srgbClr val="FFFFFF"/>
+            </a:solidFill>
+          </a:ln>
+        </p:spPr>
+        <p:style>
+          <a:lnRef idx="1">
+            <a:schemeClr val="accent1"/>
+          </a:lnRef>
+          <a:fillRef idx="3">
+            <a:schemeClr val="accent1"/>
+          </a:fillRef>
+          <a:effectRef idx="2">
+            <a:schemeClr val="accent1"/>
+          </a:effectRef>
+          <a:fontRef idx="minor">
+            <a:schemeClr val="lt1"/>
+          </a:fontRef>
+        </p:style>
+        <p:txBody>
+          <a:bodyPr rtlCol="0" anchor="ctr" wrap="square"/>
+          <a:lstStyle/>
+          <a:p>
+            <a:pPr algn="l">
+              <a:defRPr sz="900" b="1">
+                <a:solidFill>
+                  <a:srgbClr val="FFFFFF"/>
+                </a:solidFill>
+              </a:defRPr>
+            </a:pPr>
+            <a:r>
+              <a:t>Support</a:t>
+            </a:r>
+            <a:br/>
+            <a:r>
+              <a:t>UAT</a:t>
+            </a:r>
+          </a:p>
+        </p:txBody>
+      </p:sp>
+      <p:sp>
+        <p:nvSpPr>
+          <p:cNvPr id="25" name="Rectangle 24"/>
+          <p:cNvSpPr/>
+          <p:nvPr/>
+        </p:nvSpPr>
+        <p:spPr>
+          <a:xfrm>
+            <a:off x="365760" y="3444240"/>
+            <a:ext cx="1554480" cy="707136"/>
+          </a:xfrm>
+          <a:prstGeom prst="rect">
+            <a:avLst/>
+          </a:prstGeom>
+          <a:solidFill>
+            <a:srgbClr val="70AD47"/>
+          </a:solidFill>
+          <a:ln>
+            <a:solidFill>
+              <a:srgbClr val="FFFFFF"/>
+            </a:solidFill>
+          </a:ln>
+        </p:spPr>
+        <p:style>
+          <a:lnRef idx="1">
+            <a:schemeClr val="accent1"/>
+          </a:lnRef>
+          <a:fillRef idx="3">
+            <a:schemeClr val="accent1"/>
+          </a:fillRef>
+          <a:effectRef idx="2">
+            <a:schemeClr val="accent1"/>
+          </a:effectRef>
+          <a:fontRef idx="minor">
+            <a:schemeClr val="lt1"/>
+          </a:fontRef>
+        </p:style>
+        <p:txBody>
+          <a:bodyPr rtlCol="0" anchor="ctr" wrap="square"/>
+          <a:lstStyle/>
+          <a:p>
+            <a:pPr algn="l">
+              <a:defRPr sz="1100" b="1">
+                <a:solidFill>
+                  <a:srgbClr val="FFFFFF"/>
+                </a:solidFill>
+              </a:defRPr>
+            </a:pPr>
+            <a:r>
+              <a:t>IT Product (PO)</a:t>
+            </a:r>
+          </a:p>
+        </p:txBody>
+      </p:sp>
+      <p:sp>
+        <p:nvSpPr>
+          <p:cNvPr id="26" name="Rectangle 25"/>
+          <p:cNvSpPr/>
+          <p:nvPr/>
+        </p:nvSpPr>
+        <p:spPr>
+          <a:xfrm>
+            <a:off x="1920240" y="3444240"/>
+            <a:ext cx="10042855" cy="707136"/>
+          </a:xfrm>
+          <a:prstGeom prst="rect">
+            <a:avLst/>
+          </a:prstGeom>
+          <a:solidFill>
+            <a:srgbClr val="F2F2F2"/>
+          </a:solidFill>
+          <a:ln>
+            <a:solidFill>
+              <a:srgbClr val="D9D9D9"/>
+            </a:solidFill>
+          </a:ln>
+          <a:effectLst/>
+        </p:spPr>
+        <p:style>
+          <a:lnRef idx="1">
+            <a:schemeClr val="accent1"/>
+          </a:lnRef>
+          <a:fillRef idx="3">
+            <a:schemeClr val="accent1"/>
+          </a:fillRef>
+          <a:effectRef idx="2">
+            <a:schemeClr val="accent1"/>
+          </a:effectRef>
+          <a:fontRef idx="minor">
+            <a:schemeClr val="lt1"/>
+          </a:fontRef>
+        </p:style>
+        <p:txBody>
+          <a:bodyPr rtlCol="0" anchor="ctr"/>
+          <a:lstStyle/>
+          <a:p>
+            <a:pPr algn="ctr"/>
+          </a:p>
+        </p:txBody>
+      </p:sp>
+      <p:sp>
+        <p:nvSpPr>
+          <p:cNvPr id="27" name="Rounded Rectangle 26"/>
+          <p:cNvSpPr/>
+          <p:nvPr/>
+        </p:nvSpPr>
+        <p:spPr>
+          <a:xfrm>
+            <a:off x="3409797" y="3499104"/>
+            <a:ext cx="1324965" cy="597408"/>
+          </a:xfrm>
+          <a:prstGeom prst="roundRect">
+            <a:avLst/>
+          </a:prstGeom>
+          <a:solidFill>
+            <a:srgbClr val="70AD47"/>
+          </a:solidFill>
+          <a:ln>
+            <a:solidFill>
+              <a:srgbClr val="FFFFFF"/>
+            </a:solidFill>
+          </a:ln>
+        </p:spPr>
+        <p:style>
+          <a:lnRef idx="1">
+            <a:schemeClr val="accent1"/>
+          </a:lnRef>
+          <a:fillRef idx="3">
+            <a:schemeClr val="accent1"/>
+          </a:fillRef>
+          <a:effectRef idx="2">
+            <a:schemeClr val="accent1"/>
+          </a:effectRef>
+          <a:fontRef idx="minor">
+            <a:schemeClr val="lt1"/>
+          </a:fontRef>
+        </p:style>
+        <p:txBody>
+          <a:bodyPr rtlCol="0" anchor="ctr" wrap="square"/>
+          <a:lstStyle/>
+          <a:p>
+            <a:pPr algn="l">
+              <a:defRPr sz="900" b="1">
+                <a:solidFill>
+                  <a:srgbClr val="FFFFFF"/>
+                </a:solidFill>
+              </a:defRPr>
+            </a:pPr>
+            <a:r>
+              <a:t>Accept to</a:t>
+            </a:r>
+            <a:br/>
+            <a:r>
+              <a:t>triage</a:t>
+            </a:r>
+          </a:p>
+        </p:txBody>
+      </p:sp>
+      <p:sp>
+        <p:nvSpPr>
+          <p:cNvPr id="28" name="Rounded Rectangle 27"/>
+          <p:cNvSpPr/>
+          <p:nvPr/>
+        </p:nvSpPr>
+        <p:spPr>
+          <a:xfrm>
+            <a:off x="4844491" y="3499104"/>
+            <a:ext cx="1324965" cy="597408"/>
+          </a:xfrm>
+          <a:prstGeom prst="roundRect">
+            <a:avLst/>
+          </a:prstGeom>
+          <a:solidFill>
+            <a:srgbClr val="70AD47"/>
+          </a:solidFill>
+          <a:ln>
+            <a:solidFill>
+              <a:srgbClr val="FFFFFF"/>
+            </a:solidFill>
+          </a:ln>
+        </p:spPr>
+        <p:style>
+          <a:lnRef idx="1">
+            <a:schemeClr val="accent1"/>
+          </a:lnRef>
+          <a:fillRef idx="3">
+            <a:schemeClr val="accent1"/>
+          </a:fillRef>
+          <a:effectRef idx="2">
+            <a:schemeClr val="accent1"/>
+          </a:effectRef>
+          <a:fontRef idx="minor">
+            <a:schemeClr val="lt1"/>
+          </a:fontRef>
+        </p:style>
+        <p:txBody>
+          <a:bodyPr rtlCol="0" anchor="ctr" wrap="square"/>
+          <a:lstStyle/>
+          <a:p>
+            <a:pPr algn="l">
+              <a:defRPr sz="900" b="1">
+                <a:solidFill>
+                  <a:srgbClr val="FFFFFF"/>
+                </a:solidFill>
+              </a:defRPr>
+            </a:pPr>
+            <a:r>
+              <a:t>Prioritize</a:t>
+            </a:r>
+            <a:br/>
+            <a:r>
+              <a:t>backlog</a:t>
+            </a:r>
+          </a:p>
+        </p:txBody>
+      </p:sp>
+      <p:sp>
+        <p:nvSpPr>
+          <p:cNvPr id="29" name="Rounded Rectangle 28"/>
+          <p:cNvSpPr/>
+          <p:nvPr/>
+        </p:nvSpPr>
+        <p:spPr>
+          <a:xfrm>
+            <a:off x="6279184" y="3499104"/>
+            <a:ext cx="1324965" cy="597408"/>
+          </a:xfrm>
+          <a:prstGeom prst="roundRect">
+            <a:avLst/>
+          </a:prstGeom>
+          <a:solidFill>
+            <a:srgbClr val="70AD47"/>
+          </a:solidFill>
+          <a:ln>
+            <a:solidFill>
+              <a:srgbClr val="FFFFFF"/>
+            </a:solidFill>
+          </a:ln>
+        </p:spPr>
+        <p:style>
+          <a:lnRef idx="1">
+            <a:schemeClr val="accent1"/>
+          </a:lnRef>
+          <a:fillRef idx="3">
+            <a:schemeClr val="accent1"/>
+          </a:fillRef>
+          <a:effectRef idx="2">
+            <a:schemeClr val="accent1"/>
+          </a:effectRef>
+          <a:fontRef idx="minor">
+            <a:schemeClr val="lt1"/>
+          </a:fontRef>
+        </p:style>
+        <p:txBody>
+          <a:bodyPr rtlCol="0" anchor="ctr" wrap="square"/>
+          <a:lstStyle/>
+          <a:p>
+            <a:pPr algn="l">
+              <a:defRPr sz="900" b="1">
+                <a:solidFill>
+                  <a:srgbClr val="FFFFFF"/>
+                </a:solidFill>
+              </a:defRPr>
+            </a:pPr>
+            <a:r>
+              <a:t>Accept</a:t>
+            </a:r>
+            <a:br/>
+            <a:r>
+              <a:t>sprint</a:t>
+            </a:r>
+          </a:p>
+        </p:txBody>
+      </p:sp>
+      <p:sp>
+        <p:nvSpPr>
+          <p:cNvPr id="30" name="Rounded Rectangle 29"/>
+          <p:cNvSpPr/>
+          <p:nvPr/>
+        </p:nvSpPr>
+        <p:spPr>
+          <a:xfrm>
+            <a:off x="9148572" y="3499104"/>
+            <a:ext cx="1324965" cy="597408"/>
+          </a:xfrm>
+          <a:prstGeom prst="roundRect">
+            <a:avLst/>
+          </a:prstGeom>
+          <a:solidFill>
+            <a:srgbClr val="70AD47"/>
+          </a:solidFill>
+          <a:ln>
+            <a:solidFill>
+              <a:srgbClr val="FFFFFF"/>
+            </a:solidFill>
+          </a:ln>
+        </p:spPr>
+        <p:style>
+          <a:lnRef idx="1">
+            <a:schemeClr val="accent1"/>
+          </a:lnRef>
+          <a:fillRef idx="3">
+            <a:schemeClr val="accent1"/>
+          </a:fillRef>
+          <a:effectRef idx="2">
+            <a:schemeClr val="accent1"/>
+          </a:effectRef>
+          <a:fontRef idx="minor">
+            <a:schemeClr val="lt1"/>
+          </a:fontRef>
+        </p:style>
+        <p:txBody>
+          <a:bodyPr rtlCol="0" anchor="ctr" wrap="square"/>
+          <a:lstStyle/>
+          <a:p>
+            <a:pPr algn="l">
+              <a:defRPr sz="900" b="1">
+                <a:solidFill>
+                  <a:srgbClr val="FFFFFF"/>
+                </a:solidFill>
+              </a:defRPr>
+            </a:pPr>
+            <a:r>
+              <a:t>Release</a:t>
+            </a:r>
+            <a:br/>
+            <a:r>
+              <a:t>decision</a:t>
+            </a:r>
+          </a:p>
+        </p:txBody>
+      </p:sp>
+      <p:sp>
+        <p:nvSpPr>
+          <p:cNvPr id="31" name="Rectangle 30"/>
+          <p:cNvSpPr/>
+          <p:nvPr/>
+        </p:nvSpPr>
+        <p:spPr>
+          <a:xfrm>
+            <a:off x="365760" y="4206240"/>
+            <a:ext cx="1554480" cy="707136"/>
+          </a:xfrm>
+          <a:prstGeom prst="rect">
+            <a:avLst/>
+          </a:prstGeom>
+          <a:solidFill>
+            <a:srgbClr val="ED7D31"/>
+          </a:solidFill>
+          <a:ln>
+            <a:solidFill>
+              <a:srgbClr val="FFFFFF"/>
+            </a:solidFill>
+          </a:ln>
+        </p:spPr>
+        <p:style>
+          <a:lnRef idx="1">
+            <a:schemeClr val="accent1"/>
+          </a:lnRef>
+          <a:fillRef idx="3">
+            <a:schemeClr val="accent1"/>
+          </a:fillRef>
+          <a:effectRef idx="2">
+            <a:schemeClr val="accent1"/>
+          </a:effectRef>
+          <a:fontRef idx="minor">
+            <a:schemeClr val="lt1"/>
+          </a:fontRef>
+        </p:style>
+        <p:txBody>
+          <a:bodyPr rtlCol="0" anchor="ctr" wrap="square"/>
+          <a:lstStyle/>
+          <a:p>
+            <a:pPr algn="l">
+              <a:defRPr sz="1100" b="1">
+                <a:solidFill>
+                  <a:srgbClr val="FFFFFF"/>
+                </a:solidFill>
+              </a:defRPr>
+            </a:pPr>
+            <a:r>
+              <a:t>Scrum / Dev</a:t>
+            </a:r>
+          </a:p>
+        </p:txBody>
+      </p:sp>
+      <p:sp>
+        <p:nvSpPr>
+          <p:cNvPr id="32" name="Rectangle 31"/>
+          <p:cNvSpPr/>
+          <p:nvPr/>
+        </p:nvSpPr>
+        <p:spPr>
+          <a:xfrm>
+            <a:off x="1920240" y="4206240"/>
+            <a:ext cx="10042855" cy="707136"/>
+          </a:xfrm>
+          <a:prstGeom prst="rect">
+            <a:avLst/>
+          </a:prstGeom>
+          <a:solidFill>
+            <a:srgbClr val="F2F2F2"/>
+          </a:solidFill>
+          <a:ln>
+            <a:solidFill>
+              <a:srgbClr val="D9D9D9"/>
+            </a:solidFill>
+          </a:ln>
+          <a:effectLst/>
+        </p:spPr>
+        <p:style>
+          <a:lnRef idx="1">
+            <a:schemeClr val="accent1"/>
+          </a:lnRef>
+          <a:fillRef idx="3">
+            <a:schemeClr val="accent1"/>
+          </a:fillRef>
+          <a:effectRef idx="2">
+            <a:schemeClr val="accent1"/>
+          </a:effectRef>
+          <a:fontRef idx="minor">
+            <a:schemeClr val="lt1"/>
+          </a:fontRef>
+        </p:style>
+        <p:txBody>
+          <a:bodyPr rtlCol="0" anchor="ctr"/>
+          <a:lstStyle/>
+          <a:p>
+            <a:pPr algn="ctr"/>
+          </a:p>
+        </p:txBody>
+      </p:sp>
+      <p:sp>
+        <p:nvSpPr>
+          <p:cNvPr id="33" name="Rounded Rectangle 32"/>
+          <p:cNvSpPr/>
+          <p:nvPr/>
+        </p:nvSpPr>
+        <p:spPr>
+          <a:xfrm>
+            <a:off x="4844491" y="4261103"/>
+            <a:ext cx="1324965" cy="597408"/>
+          </a:xfrm>
+          <a:prstGeom prst="roundRect">
+            <a:avLst/>
+          </a:prstGeom>
+          <a:solidFill>
+            <a:srgbClr val="ED7D31"/>
+          </a:solidFill>
+          <a:ln>
+            <a:solidFill>
+              <a:srgbClr val="FFFFFF"/>
+            </a:solidFill>
+          </a:ln>
+        </p:spPr>
+        <p:style>
+          <a:lnRef idx="1">
+            <a:schemeClr val="accent1"/>
+          </a:lnRef>
+          <a:fillRef idx="3">
+            <a:schemeClr val="accent1"/>
+          </a:fillRef>
+          <a:effectRef idx="2">
+            <a:schemeClr val="accent1"/>
+          </a:effectRef>
+          <a:fontRef idx="minor">
+            <a:schemeClr val="lt1"/>
+          </a:fontRef>
+        </p:style>
+        <p:txBody>
+          <a:bodyPr rtlCol="0" anchor="ctr" wrap="square"/>
+          <a:lstStyle/>
+          <a:p>
+            <a:pPr algn="l">
+              <a:defRPr sz="900" b="1">
+                <a:solidFill>
+                  <a:srgbClr val="FFFFFF"/>
+                </a:solidFill>
+              </a:defRPr>
+            </a:pPr>
+            <a:r>
+              <a:t>Design</a:t>
+            </a:r>
+            <a:br/>
+            <a:r>
+              <a:t>+ tasks</a:t>
+            </a:r>
+          </a:p>
+        </p:txBody>
+      </p:sp>
+      <p:sp>
+        <p:nvSpPr>
+          <p:cNvPr id="34" name="Rounded Rectangle 33"/>
+          <p:cNvSpPr/>
+          <p:nvPr/>
+        </p:nvSpPr>
+        <p:spPr>
+          <a:xfrm>
+            <a:off x="6279184" y="4261103"/>
+            <a:ext cx="1324965" cy="597408"/>
+          </a:xfrm>
+          <a:prstGeom prst="roundRect">
+            <a:avLst/>
+          </a:prstGeom>
+          <a:solidFill>
+            <a:srgbClr val="ED7D31"/>
+          </a:solidFill>
+          <a:ln>
+            <a:solidFill>
+              <a:srgbClr val="FFFFFF"/>
+            </a:solidFill>
+          </a:ln>
+        </p:spPr>
+        <p:style>
+          <a:lnRef idx="1">
+            <a:schemeClr val="accent1"/>
+          </a:lnRef>
+          <a:fillRef idx="3">
+            <a:schemeClr val="accent1"/>
+          </a:fillRef>
+          <a:effectRef idx="2">
+            <a:schemeClr val="accent1"/>
+          </a:effectRef>
+          <a:fontRef idx="minor">
+            <a:schemeClr val="lt1"/>
+          </a:fontRef>
+        </p:style>
+        <p:txBody>
+          <a:bodyPr rtlCol="0" anchor="ctr" wrap="square"/>
+          <a:lstStyle/>
+          <a:p>
+            <a:pPr algn="l">
+              <a:defRPr sz="900" b="1">
+                <a:solidFill>
+                  <a:srgbClr val="FFFFFF"/>
+                </a:solidFill>
+              </a:defRPr>
+            </a:pPr>
+            <a:r>
+              <a:t>Build +</a:t>
+            </a:r>
+            <a:br/>
+            <a:r>
+              <a:t>unit test</a:t>
+            </a:r>
+          </a:p>
+        </p:txBody>
+      </p:sp>
+      <p:sp>
+        <p:nvSpPr>
+          <p:cNvPr id="35" name="Rounded Rectangle 34"/>
+          <p:cNvSpPr/>
+          <p:nvPr/>
+        </p:nvSpPr>
+        <p:spPr>
+          <a:xfrm>
+            <a:off x="7713878" y="4261103"/>
+            <a:ext cx="1324965" cy="597408"/>
+          </a:xfrm>
+          <a:prstGeom prst="roundRect">
+            <a:avLst/>
+          </a:prstGeom>
+          <a:solidFill>
+            <a:srgbClr val="ED7D31"/>
+          </a:solidFill>
+          <a:ln>
+            <a:solidFill>
+              <a:srgbClr val="FFFFFF"/>
+            </a:solidFill>
+          </a:ln>
+        </p:spPr>
+        <p:style>
+          <a:lnRef idx="1">
+            <a:schemeClr val="accent1"/>
+          </a:lnRef>
+          <a:fillRef idx="3">
+            <a:schemeClr val="accent1"/>
+          </a:fillRef>
+          <a:effectRef idx="2">
+            <a:schemeClr val="accent1"/>
+          </a:effectRef>
+          <a:fontRef idx="minor">
+            <a:schemeClr val="lt1"/>
+          </a:fontRef>
+        </p:style>
+        <p:txBody>
+          <a:bodyPr rtlCol="0" anchor="ctr" wrap="square"/>
+          <a:lstStyle/>
+          <a:p>
+            <a:pPr algn="l">
+              <a:defRPr sz="900" b="1">
+                <a:solidFill>
+                  <a:srgbClr val="FFFFFF"/>
+                </a:solidFill>
+              </a:defRPr>
+            </a:pPr>
+            <a:r>
+              <a:t>Fix SIT</a:t>
+            </a:r>
+            <a:br/>
+            <a:r>
+              <a:t>defects</a:t>
+            </a:r>
+          </a:p>
+        </p:txBody>
+      </p:sp>
+      <p:sp>
+        <p:nvSpPr>
+          <p:cNvPr id="36" name="Rounded Rectangle 35"/>
+          <p:cNvSpPr/>
+          <p:nvPr/>
+        </p:nvSpPr>
+        <p:spPr>
+          <a:xfrm>
+            <a:off x="9148572" y="4261103"/>
+            <a:ext cx="1324965" cy="597408"/>
+          </a:xfrm>
+          <a:prstGeom prst="roundRect">
+            <a:avLst/>
+          </a:prstGeom>
+          <a:solidFill>
+            <a:srgbClr val="ED7D31"/>
+          </a:solidFill>
+          <a:ln>
+            <a:solidFill>
+              <a:srgbClr val="FFFFFF"/>
+            </a:solidFill>
+          </a:ln>
+        </p:spPr>
+        <p:style>
+          <a:lnRef idx="1">
+            <a:schemeClr val="accent1"/>
+          </a:lnRef>
+          <a:fillRef idx="3">
+            <a:schemeClr val="accent1"/>
+          </a:fillRef>
+          <a:effectRef idx="2">
+            <a:schemeClr val="accent1"/>
+          </a:effectRef>
+          <a:fontRef idx="minor">
+            <a:schemeClr val="lt1"/>
+          </a:fontRef>
+        </p:style>
+        <p:txBody>
+          <a:bodyPr rtlCol="0" anchor="ctr" wrap="square"/>
+          <a:lstStyle/>
+          <a:p>
+            <a:pPr algn="l">
+              <a:defRPr sz="900" b="1">
+                <a:solidFill>
+                  <a:srgbClr val="FFFFFF"/>
+                </a:solidFill>
+              </a:defRPr>
+            </a:pPr>
+            <a:r>
+              <a:t>Deploy</a:t>
+            </a:r>
+          </a:p>
+        </p:txBody>
+      </p:sp>
+      <p:sp>
+        <p:nvSpPr>
+          <p:cNvPr id="37" name="Rounded Rectangle 36"/>
+          <p:cNvSpPr/>
+          <p:nvPr/>
+        </p:nvSpPr>
+        <p:spPr>
+          <a:xfrm>
+            <a:off x="10583265" y="4261103"/>
+            <a:ext cx="1324965" cy="597408"/>
+          </a:xfrm>
+          <a:prstGeom prst="roundRect">
+            <a:avLst/>
+          </a:prstGeom>
+          <a:solidFill>
+            <a:srgbClr val="ED7D31"/>
+          </a:solidFill>
+          <a:ln>
+            <a:solidFill>
+              <a:srgbClr val="FFFFFF"/>
+            </a:solidFill>
+          </a:ln>
+        </p:spPr>
+        <p:style>
+          <a:lnRef idx="1">
+            <a:schemeClr val="accent1"/>
+          </a:lnRef>
+          <a:fillRef idx="3">
+            <a:schemeClr val="accent1"/>
+          </a:fillRef>
+          <a:effectRef idx="2">
+            <a:schemeClr val="accent1"/>
+          </a:effectRef>
+          <a:fontRef idx="minor">
+            <a:schemeClr val="lt1"/>
+          </a:fontRef>
+        </p:style>
+        <p:txBody>
+          <a:bodyPr rtlCol="0" anchor="ctr" wrap="square"/>
+          <a:lstStyle/>
+          <a:p>
+            <a:pPr algn="l">
+              <a:defRPr sz="900" b="1">
+                <a:solidFill>
+                  <a:srgbClr val="FFFFFF"/>
+                </a:solidFill>
+              </a:defRPr>
+            </a:pPr>
+            <a:r>
+              <a:t>Hotfix /</a:t>
+            </a:r>
+            <a:br/>
+            <a:r>
+              <a:t>defect</a:t>
+            </a:r>
+          </a:p>
+        </p:txBody>
+      </p:sp>
+      <p:sp>
+        <p:nvSpPr>
+          <p:cNvPr id="38" name="Rectangle 37"/>
+          <p:cNvSpPr/>
+          <p:nvPr/>
+        </p:nvSpPr>
+        <p:spPr>
+          <a:xfrm>
+            <a:off x="365760" y="4968240"/>
+            <a:ext cx="1554480" cy="707136"/>
+          </a:xfrm>
+          <a:prstGeom prst="rect">
+            <a:avLst/>
+          </a:prstGeom>
+          <a:solidFill>
+            <a:srgbClr val="7030A0"/>
+          </a:solidFill>
+          <a:ln>
+            <a:solidFill>
+              <a:srgbClr val="FFFFFF"/>
+            </a:solidFill>
+          </a:ln>
+        </p:spPr>
+        <p:style>
+          <a:lnRef idx="1">
+            <a:schemeClr val="accent1"/>
+          </a:lnRef>
+          <a:fillRef idx="3">
+            <a:schemeClr val="accent1"/>
+          </a:fillRef>
+          <a:effectRef idx="2">
+            <a:schemeClr val="accent1"/>
+          </a:effectRef>
+          <a:fontRef idx="minor">
+            <a:schemeClr val="lt1"/>
+          </a:fontRef>
+        </p:style>
+        <p:txBody>
+          <a:bodyPr rtlCol="0" anchor="ctr" wrap="square"/>
+          <a:lstStyle/>
+          <a:p>
+            <a:pPr algn="l">
+              <a:defRPr sz="1100" b="1">
+                <a:solidFill>
+                  <a:srgbClr val="FFFFFF"/>
+                </a:solidFill>
+              </a:defRPr>
+            </a:pPr>
+            <a:r>
+              <a:t>QA</a:t>
+            </a:r>
+          </a:p>
+        </p:txBody>
+      </p:sp>
+      <p:sp>
+        <p:nvSpPr>
+          <p:cNvPr id="39" name="Rectangle 38"/>
+          <p:cNvSpPr/>
+          <p:nvPr/>
+        </p:nvSpPr>
+        <p:spPr>
+          <a:xfrm>
+            <a:off x="1920240" y="4968240"/>
+            <a:ext cx="10042855" cy="707136"/>
+          </a:xfrm>
+          <a:prstGeom prst="rect">
+            <a:avLst/>
+          </a:prstGeom>
+          <a:solidFill>
+            <a:srgbClr val="F2F2F2"/>
+          </a:solidFill>
+          <a:ln>
+            <a:solidFill>
+              <a:srgbClr val="D9D9D9"/>
+            </a:solidFill>
+          </a:ln>
+          <a:effectLst/>
+        </p:spPr>
+        <p:style>
+          <a:lnRef idx="1">
+            <a:schemeClr val="accent1"/>
+          </a:lnRef>
+          <a:fillRef idx="3">
+            <a:schemeClr val="accent1"/>
+          </a:fillRef>
+          <a:effectRef idx="2">
+            <a:schemeClr val="accent1"/>
+          </a:effectRef>
+          <a:fontRef idx="minor">
+            <a:schemeClr val="lt1"/>
+          </a:fontRef>
+        </p:style>
+        <p:txBody>
+          <a:bodyPr rtlCol="0" anchor="ctr"/>
+          <a:lstStyle/>
+          <a:p>
+            <a:pPr algn="ctr"/>
+          </a:p>
+        </p:txBody>
+      </p:sp>
+      <p:sp>
+        <p:nvSpPr>
+          <p:cNvPr id="40" name="Rounded Rectangle 39"/>
+          <p:cNvSpPr/>
+          <p:nvPr/>
+        </p:nvSpPr>
+        <p:spPr>
+          <a:xfrm>
+            <a:off x="4844491" y="5023104"/>
+            <a:ext cx="1324965" cy="597408"/>
+          </a:xfrm>
+          <a:prstGeom prst="roundRect">
+            <a:avLst/>
+          </a:prstGeom>
+          <a:solidFill>
+            <a:srgbClr val="7030A0"/>
+          </a:solidFill>
+          <a:ln>
+            <a:solidFill>
+              <a:srgbClr val="FFFFFF"/>
+            </a:solidFill>
+          </a:ln>
+        </p:spPr>
+        <p:style>
+          <a:lnRef idx="1">
+            <a:schemeClr val="accent1"/>
+          </a:lnRef>
+          <a:fillRef idx="3">
+            <a:schemeClr val="accent1"/>
+          </a:fillRef>
+          <a:effectRef idx="2">
+            <a:schemeClr val="accent1"/>
+          </a:effectRef>
+          <a:fontRef idx="minor">
+            <a:schemeClr val="lt1"/>
+          </a:fontRef>
+        </p:style>
+        <p:txBody>
+          <a:bodyPr rtlCol="0" anchor="ctr" wrap="square"/>
+          <a:lstStyle/>
+          <a:p>
+            <a:pPr algn="l">
+              <a:defRPr sz="900" b="1">
+                <a:solidFill>
+                  <a:srgbClr val="FFFFFF"/>
+                </a:solidFill>
+              </a:defRPr>
+            </a:pPr>
+            <a:r>
+              <a:t>Test</a:t>
+            </a:r>
+            <a:br/>
+            <a:r>
+              <a:t>plan</a:t>
+            </a:r>
+          </a:p>
+        </p:txBody>
+      </p:sp>
+      <p:sp>
+        <p:nvSpPr>
+          <p:cNvPr id="41" name="Rounded Rectangle 40"/>
+          <p:cNvSpPr/>
+          <p:nvPr/>
+        </p:nvSpPr>
+        <p:spPr>
+          <a:xfrm>
+            <a:off x="6279184" y="5023104"/>
+            <a:ext cx="1324965" cy="597408"/>
+          </a:xfrm>
+          <a:prstGeom prst="roundRect">
+            <a:avLst/>
+          </a:prstGeom>
+          <a:solidFill>
+            <a:srgbClr val="7030A0"/>
+          </a:solidFill>
+          <a:ln>
+            <a:solidFill>
+              <a:srgbClr val="FFFFFF"/>
+            </a:solidFill>
+          </a:ln>
+        </p:spPr>
+        <p:style>
+          <a:lnRef idx="1">
+            <a:schemeClr val="accent1"/>
+          </a:lnRef>
+          <a:fillRef idx="3">
+            <a:schemeClr val="accent1"/>
+          </a:fillRef>
+          <a:effectRef idx="2">
+            <a:schemeClr val="accent1"/>
+          </a:effectRef>
+          <a:fontRef idx="minor">
+            <a:schemeClr val="lt1"/>
+          </a:fontRef>
+        </p:style>
+        <p:txBody>
+          <a:bodyPr rtlCol="0" anchor="ctr" wrap="square"/>
+          <a:lstStyle/>
+          <a:p>
+            <a:pPr algn="l">
+              <a:defRPr sz="900" b="1">
+                <a:solidFill>
+                  <a:srgbClr val="FFFFFF"/>
+                </a:solidFill>
+              </a:defRPr>
+            </a:pPr>
+            <a:r>
+              <a:t>Prep</a:t>
+            </a:r>
+            <a:br/>
+            <a:r>
+              <a:t>cases</a:t>
+            </a:r>
+          </a:p>
+        </p:txBody>
+      </p:sp>
+      <p:sp>
+        <p:nvSpPr>
+          <p:cNvPr id="42" name="Rounded Rectangle 41"/>
+          <p:cNvSpPr/>
+          <p:nvPr/>
+        </p:nvSpPr>
+        <p:spPr>
+          <a:xfrm>
+            <a:off x="7713878" y="5023104"/>
+            <a:ext cx="1324965" cy="597408"/>
+          </a:xfrm>
+          <a:prstGeom prst="roundRect">
+            <a:avLst/>
+          </a:prstGeom>
+          <a:solidFill>
+            <a:srgbClr val="7030A0"/>
+          </a:solidFill>
+          <a:ln>
+            <a:solidFill>
+              <a:srgbClr val="FFFFFF"/>
+            </a:solidFill>
+          </a:ln>
+        </p:spPr>
+        <p:style>
+          <a:lnRef idx="1">
+            <a:schemeClr val="accent1"/>
+          </a:lnRef>
+          <a:fillRef idx="3">
+            <a:schemeClr val="accent1"/>
+          </a:fillRef>
+          <a:effectRef idx="2">
+            <a:schemeClr val="accent1"/>
+          </a:effectRef>
+          <a:fontRef idx="minor">
+            <a:schemeClr val="lt1"/>
+          </a:fontRef>
+        </p:style>
+        <p:txBody>
+          <a:bodyPr rtlCol="0" anchor="ctr" wrap="square"/>
+          <a:lstStyle/>
+          <a:p>
+            <a:pPr algn="l">
+              <a:defRPr sz="900" b="1">
+                <a:solidFill>
+                  <a:srgbClr val="FFFFFF"/>
+                </a:solidFill>
+              </a:defRPr>
+            </a:pPr>
+            <a:r>
+              <a:t>Run SIT</a:t>
+            </a:r>
+            <a:br/>
+            <a:r>
+              <a:t>+ regress</a:t>
+            </a:r>
+          </a:p>
+        </p:txBody>
+      </p:sp>
+      <p:sp>
+        <p:nvSpPr>
+          <p:cNvPr id="43" name="Rectangle 42"/>
+          <p:cNvSpPr/>
+          <p:nvPr/>
+        </p:nvSpPr>
+        <p:spPr>
+          <a:xfrm>
+            <a:off x="365760" y="5730240"/>
+            <a:ext cx="1554480" cy="707136"/>
+          </a:xfrm>
+          <a:prstGeom prst="rect">
+            <a:avLst/>
+          </a:prstGeom>
+          <a:solidFill>
+            <a:srgbClr val="C00000"/>
+          </a:solidFill>
+          <a:ln>
+            <a:solidFill>
+              <a:srgbClr val="FFFFFF"/>
+            </a:solidFill>
+          </a:ln>
+        </p:spPr>
+        <p:style>
+          <a:lnRef idx="1">
+            <a:schemeClr val="accent1"/>
+          </a:lnRef>
+          <a:fillRef idx="3">
+            <a:schemeClr val="accent1"/>
+          </a:fillRef>
+          <a:effectRef idx="2">
+            <a:schemeClr val="accent1"/>
+          </a:effectRef>
+          <a:fontRef idx="minor">
+            <a:schemeClr val="lt1"/>
+          </a:fontRef>
+        </p:style>
+        <p:txBody>
+          <a:bodyPr rtlCol="0" anchor="ctr" wrap="square"/>
+          <a:lstStyle/>
+          <a:p>
+            <a:pPr algn="l">
+              <a:defRPr sz="1100" b="1">
+                <a:solidFill>
+                  <a:srgbClr val="FFFFFF"/>
+                </a:solidFill>
+              </a:defRPr>
+            </a:pPr>
+            <a:r>
+              <a:t>IT Ops / Assurance</a:t>
+            </a:r>
+          </a:p>
+        </p:txBody>
+      </p:sp>
+      <p:sp>
+        <p:nvSpPr>
+          <p:cNvPr id="44" name="Rectangle 43"/>
+          <p:cNvSpPr/>
+          <p:nvPr/>
+        </p:nvSpPr>
+        <p:spPr>
+          <a:xfrm>
+            <a:off x="1920240" y="5730240"/>
+            <a:ext cx="10042855" cy="707136"/>
+          </a:xfrm>
+          <a:prstGeom prst="rect">
+            <a:avLst/>
+          </a:prstGeom>
+          <a:solidFill>
+            <a:srgbClr val="F2F2F2"/>
+          </a:solidFill>
+          <a:ln>
+            <a:solidFill>
+              <a:srgbClr val="D9D9D9"/>
+            </a:solidFill>
+          </a:ln>
+          <a:effectLst/>
+        </p:spPr>
+        <p:style>
+          <a:lnRef idx="1">
+            <a:schemeClr val="accent1"/>
+          </a:lnRef>
+          <a:fillRef idx="3">
+            <a:schemeClr val="accent1"/>
+          </a:fillRef>
+          <a:effectRef idx="2">
+            <a:schemeClr val="accent1"/>
+          </a:effectRef>
+          <a:fontRef idx="minor">
+            <a:schemeClr val="lt1"/>
+          </a:fontRef>
+        </p:style>
+        <p:txBody>
+          <a:bodyPr rtlCol="0" anchor="ctr"/>
+          <a:lstStyle/>
+          <a:p>
+            <a:pPr algn="ctr"/>
+          </a:p>
+        </p:txBody>
+      </p:sp>
+      <p:sp>
+        <p:nvSpPr>
+          <p:cNvPr id="45" name="Rounded Rectangle 44"/>
+          <p:cNvSpPr/>
+          <p:nvPr/>
+        </p:nvSpPr>
+        <p:spPr>
+          <a:xfrm>
+            <a:off x="1975104" y="5785104"/>
+            <a:ext cx="1324965" cy="597408"/>
+          </a:xfrm>
+          <a:prstGeom prst="roundRect">
+            <a:avLst/>
+          </a:prstGeom>
+          <a:solidFill>
+            <a:srgbClr val="C00000"/>
+          </a:solidFill>
+          <a:ln>
+            <a:solidFill>
+              <a:srgbClr val="FFFFFF"/>
+            </a:solidFill>
+          </a:ln>
+        </p:spPr>
+        <p:style>
+          <a:lnRef idx="1">
+            <a:schemeClr val="accent1"/>
+          </a:lnRef>
+          <a:fillRef idx="3">
+            <a:schemeClr val="accent1"/>
+          </a:fillRef>
+          <a:effectRef idx="2">
+            <a:schemeClr val="accent1"/>
+          </a:effectRef>
+          <a:fontRef idx="minor">
+            <a:schemeClr val="lt1"/>
+          </a:fontRef>
+        </p:style>
+        <p:txBody>
+          <a:bodyPr rtlCol="0" anchor="ctr" wrap="square"/>
+          <a:lstStyle/>
+          <a:p>
+            <a:pPr algn="l">
+              <a:defRPr sz="900" b="1">
+                <a:solidFill>
+                  <a:srgbClr val="FFFFFF"/>
+                </a:solidFill>
+              </a:defRPr>
+            </a:pPr>
+            <a:r>
+              <a:t>Route</a:t>
+            </a:r>
+            <a:br/>
+            <a:r>
+              <a:t>ticket</a:t>
+            </a:r>
+          </a:p>
+        </p:txBody>
+      </p:sp>
+      <p:sp>
+        <p:nvSpPr>
+          <p:cNvPr id="46" name="Rounded Rectangle 45"/>
+          <p:cNvSpPr/>
+          <p:nvPr/>
+        </p:nvSpPr>
+        <p:spPr>
+          <a:xfrm>
+            <a:off x="3409797" y="5785104"/>
+            <a:ext cx="1324965" cy="597408"/>
+          </a:xfrm>
+          <a:prstGeom prst="roundRect">
+            <a:avLst/>
+          </a:prstGeom>
+          <a:solidFill>
+            <a:srgbClr val="C00000"/>
+          </a:solidFill>
+          <a:ln>
+            <a:solidFill>
+              <a:srgbClr val="FFFFFF"/>
+            </a:solidFill>
+          </a:ln>
+        </p:spPr>
+        <p:style>
+          <a:lnRef idx="1">
+            <a:schemeClr val="accent1"/>
+          </a:lnRef>
+          <a:fillRef idx="3">
+            <a:schemeClr val="accent1"/>
+          </a:fillRef>
+          <a:effectRef idx="2">
+            <a:schemeClr val="accent1"/>
+          </a:effectRef>
+          <a:fontRef idx="minor">
+            <a:schemeClr val="lt1"/>
+          </a:fontRef>
+        </p:style>
+        <p:txBody>
+          <a:bodyPr rtlCol="0" anchor="ctr" wrap="square"/>
+          <a:lstStyle/>
+          <a:p>
+            <a:pPr algn="l">
+              <a:defRPr sz="900" b="1">
+                <a:solidFill>
+                  <a:srgbClr val="FFFFFF"/>
+                </a:solidFill>
+              </a:defRPr>
+            </a:pPr>
+            <a:r>
+              <a:t>Compliance</a:t>
+            </a:r>
+            <a:br/>
+            <a:r>
+              <a:t>routing</a:t>
+            </a:r>
+          </a:p>
+        </p:txBody>
+      </p:sp>
+      <p:sp>
+        <p:nvSpPr>
+          <p:cNvPr id="47" name="Rounded Rectangle 46"/>
+          <p:cNvSpPr/>
+          <p:nvPr/>
+        </p:nvSpPr>
+        <p:spPr>
+          <a:xfrm>
+            <a:off x="4844491" y="5785104"/>
+            <a:ext cx="1324965" cy="597408"/>
+          </a:xfrm>
+          <a:prstGeom prst="roundRect">
+            <a:avLst/>
+          </a:prstGeom>
+          <a:solidFill>
+            <a:srgbClr val="C00000"/>
+          </a:solidFill>
+          <a:ln>
+            <a:solidFill>
+              <a:srgbClr val="FFFFFF"/>
+            </a:solidFill>
+          </a:ln>
+        </p:spPr>
+        <p:style>
+          <a:lnRef idx="1">
+            <a:schemeClr val="accent1"/>
+          </a:lnRef>
+          <a:fillRef idx="3">
+            <a:schemeClr val="accent1"/>
+          </a:fillRef>
+          <a:effectRef idx="2">
+            <a:schemeClr val="accent1"/>
+          </a:effectRef>
+          <a:fontRef idx="minor">
+            <a:schemeClr val="lt1"/>
+          </a:fontRef>
+        </p:style>
+        <p:txBody>
+          <a:bodyPr rtlCol="0" anchor="ctr" wrap="square"/>
+          <a:lstStyle/>
+          <a:p>
+            <a:pPr algn="l">
+              <a:defRPr sz="900" b="1">
+                <a:solidFill>
+                  <a:srgbClr val="FFFFFF"/>
+                </a:solidFill>
+              </a:defRPr>
+            </a:pPr>
+            <a:r>
+              <a:t>ARB /</a:t>
+            </a:r>
+            <a:br/>
+            <a:r>
+              <a:t>Security</a:t>
+            </a:r>
+          </a:p>
+        </p:txBody>
+      </p:sp>
+      <p:sp>
+        <p:nvSpPr>
+          <p:cNvPr id="48" name="Rounded Rectangle 47"/>
+          <p:cNvSpPr/>
+          <p:nvPr/>
+        </p:nvSpPr>
+        <p:spPr>
+          <a:xfrm>
+            <a:off x="9148572" y="5785104"/>
+            <a:ext cx="1324965" cy="597408"/>
+          </a:xfrm>
+          <a:prstGeom prst="roundRect">
+            <a:avLst/>
+          </a:prstGeom>
+          <a:solidFill>
+            <a:srgbClr val="C00000"/>
+          </a:solidFill>
+          <a:ln>
+            <a:solidFill>
+              <a:srgbClr val="FFFFFF"/>
+            </a:solidFill>
+          </a:ln>
+        </p:spPr>
+        <p:style>
+          <a:lnRef idx="1">
+            <a:schemeClr val="accent1"/>
+          </a:lnRef>
+          <a:fillRef idx="3">
+            <a:schemeClr val="accent1"/>
+          </a:fillRef>
+          <a:effectRef idx="2">
+            <a:schemeClr val="accent1"/>
+          </a:effectRef>
+          <a:fontRef idx="minor">
+            <a:schemeClr val="lt1"/>
+          </a:fontRef>
+        </p:style>
+        <p:txBody>
+          <a:bodyPr rtlCol="0" anchor="ctr" wrap="square"/>
+          <a:lstStyle/>
+          <a:p>
+            <a:pPr algn="l">
+              <a:defRPr sz="900" b="1">
+                <a:solidFill>
+                  <a:srgbClr val="FFFFFF"/>
+                </a:solidFill>
+              </a:defRPr>
+            </a:pPr>
+            <a:r>
+              <a:t>CAB +</a:t>
+            </a:r>
+            <a:br/>
+            <a:r>
+              <a:t>verify</a:t>
+            </a:r>
+          </a:p>
+        </p:txBody>
+      </p:sp>
+      <p:sp>
+        <p:nvSpPr>
+          <p:cNvPr id="49" name="Rounded Rectangle 48"/>
+          <p:cNvSpPr/>
+          <p:nvPr/>
+        </p:nvSpPr>
+        <p:spPr>
+          <a:xfrm>
+            <a:off x="10583265" y="5785104"/>
+            <a:ext cx="1324965" cy="597408"/>
+          </a:xfrm>
+          <a:prstGeom prst="roundRect">
+            <a:avLst/>
+          </a:prstGeom>
+          <a:solidFill>
+            <a:srgbClr val="C00000"/>
+          </a:solidFill>
+          <a:ln>
+            <a:solidFill>
+              <a:srgbClr val="FFFFFF"/>
+            </a:solidFill>
+          </a:ln>
+        </p:spPr>
+        <p:style>
+          <a:lnRef idx="1">
+            <a:schemeClr val="accent1"/>
+          </a:lnRef>
+          <a:fillRef idx="3">
+            <a:schemeClr val="accent1"/>
+          </a:fillRef>
+          <a:effectRef idx="2">
+            <a:schemeClr val="accent1"/>
+          </a:effectRef>
+          <a:fontRef idx="minor">
+            <a:schemeClr val="lt1"/>
+          </a:fontRef>
+        </p:style>
+        <p:txBody>
+          <a:bodyPr rtlCol="0" anchor="ctr" wrap="square"/>
+          <a:lstStyle/>
+          <a:p>
+            <a:pPr algn="l">
+              <a:defRPr sz="900" b="1">
+                <a:solidFill>
+                  <a:srgbClr val="FFFFFF"/>
+                </a:solidFill>
+              </a:defRPr>
+            </a:pPr>
+            <a:r>
+              <a:t>Monitor /</a:t>
+            </a:r>
+            <a:br/>
+            <a:r>
+              <a:t>hypercare</a:t>
             </a:r>
           </a:p>
         </p:txBody>
@@ -7628,7 +11293,7 @@
           <a:lstStyle/>
           <a:p>
             <a:r>
-              <a:t>Three Lanes Operating Model</a:t>
+              <a:t>Document Chain — Who Owns What</a:t>
             </a:r>
           </a:p>
         </p:txBody>
@@ -7649,34 +11314,38 @@
           <a:lstStyle/>
           <a:p>
             <a:r>
-              <a:t>LANE 1 — DEMAND (Business + BA)</a:t>
-            </a:r>
-          </a:p>
-          <a:p>
-            <a:r>
-              <a:t>  Define need → BRD → Sponsor → BA quality ≥80% → compliance routing → triage</a:t>
+              <a:t>BRD (Business Requirements)     → Business writes, Sponsor signs</a:t>
+            </a:r>
+          </a:p>
+          <a:p>
+            <a:r>
+              <a:t>FSD / FRD (Functional Spec)     → BA + IT Product; derived from BRD</a:t>
+            </a:r>
+          </a:p>
+          <a:p>
+            <a:r>
+              <a:t>User Stories &amp; Tasks            → BA + Dev; traceable to FSD + BRD AC</a:t>
+            </a:r>
+          </a:p>
+          <a:p>
+            <a:r>
+              <a:t>Test Cases (SIT)                → QA; mapped to acceptance criteria</a:t>
+            </a:r>
+          </a:p>
+          <a:p>
+            <a:r>
+              <a:t>UAT Scripts                     → Business; from BRD Section M</a:t>
+            </a:r>
+          </a:p>
+          <a:p>
+            <a:r>
+              <a:t>Change Request (CR)             → IT Ops + IT-Governance (CAB)</a:t>
             </a:r>
           </a:p>
           <a:p/>
           <a:p>
             <a:r>
-              <a:t>LANE 2 — DELIVERY (IT Product + Dev + Ops)</a:t>
-            </a:r>
-          </a:p>
-          <a:p>
-            <a:r>
-              <a:t>  FSD → Scrum sprints → SIT → UAT support → CAB → Ship → Hypercare</a:t>
-            </a:r>
-          </a:p>
-          <a:p/>
-          <a:p>
-            <a:r>
-              <a:t>LANE 3 — ASSURANCE (IT-Gov + IT-Sec + GRC + Audit)</a:t>
-            </a:r>
-          </a:p>
-          <a:p>
-            <a:r>
-              <a:t>  Architecture standards, security review, regulatory control, evidence pack</a:t>
+              <a:t>Rule: each document links upward — full traceability for Audit</a:t>
             </a:r>
           </a:p>
         </p:txBody>
@@ -7715,7 +11384,7 @@
           <a:lstStyle/>
           <a:p>
             <a:r>
-              <a:t>Stakeholder Map</a:t>
+              <a:t>Three Lanes Operating Model</a:t>
             </a:r>
           </a:p>
         </p:txBody>
@@ -7736,32 +11405,34 @@
           <a:lstStyle/>
           <a:p>
             <a:r>
-              <a:t>BUSINESS          Sponsor, requesters, UAT owners</a:t>
-            </a:r>
-          </a:p>
-          <a:p>
-            <a:r>
-              <a:t>IT DELIVERY       Ops Manager, BA, IT Product, Dev, Service Desk</a:t>
-            </a:r>
-          </a:p>
-          <a:p>
-            <a:r>
-              <a:t>IT-GOVERNANCE     CAB, ARB, CMDB, intake policy, change control</a:t>
-            </a:r>
-          </a:p>
-          <a:p>
-            <a:r>
-              <a:t>IT-SECURITY       Security architecture, IAM, exceptions, secure SDLC</a:t>
-            </a:r>
-          </a:p>
-          <a:p>
-            <a:r>
-              <a:t>GRC / LEGAL       Business compliance, contracts, collections</a:t>
-            </a:r>
-          </a:p>
-          <a:p>
-            <a:r>
-              <a:t>AUDIT / BOD       Evidence, material risk reporting</a:t>
+              <a:t>LANE 1 — DEMAND (Business + BA)</a:t>
+            </a:r>
+          </a:p>
+          <a:p>
+            <a:r>
+              <a:t>  Define need → BRD → Sponsor → BA quality ≥80% → compliance routing → triage</a:t>
+            </a:r>
+          </a:p>
+          <a:p/>
+          <a:p>
+            <a:r>
+              <a:t>LANE 2 — DELIVERY (IT Product + Dev + Ops)</a:t>
+            </a:r>
+          </a:p>
+          <a:p>
+            <a:r>
+              <a:t>  FSD → Scrum sprints → SIT → UAT support → CAB → Ship → Hypercare</a:t>
+            </a:r>
+          </a:p>
+          <a:p/>
+          <a:p>
+            <a:r>
+              <a:t>LANE 3 — ASSURANCE (IT-Gov + IT-Sec + GRC + Audit)</a:t>
+            </a:r>
+          </a:p>
+          <a:p>
+            <a:r>
+              <a:t>  Architecture standards, security review, regulatory control, evidence pack</a:t>
             </a:r>
           </a:p>
         </p:txBody>
@@ -7800,7 +11471,7 @@
           <a:lstStyle/>
           <a:p>
             <a:r>
-              <a:t>Routing Rule — IT-Gov vs IT-Sec vs GRC</a:t>
+              <a:t>Stakeholder Map</a:t>
             </a:r>
           </a:p>
         </p:txBody>
@@ -7821,23 +11492,32 @@
           <a:lstStyle/>
           <a:p>
             <a:r>
-              <a:t>IT process &amp; change control     → IT-Governance</a:t>
-            </a:r>
-          </a:p>
-          <a:p>
-            <a:r>
-              <a:t>Security, access, data protection → IT-Security</a:t>
-            </a:r>
-          </a:p>
-          <a:p>
-            <a:r>
-              <a:t>Business &amp; regulatory controls  → Risk / GRC / Legal</a:t>
-            </a:r>
-          </a:p>
-          <a:p/>
-          <a:p>
-            <a:r>
-              <a:t>All three may apply to one BRD — route early, run in parallel</a:t>
+              <a:t>BUSINESS          Sponsor, requesters, UAT owners</a:t>
+            </a:r>
+          </a:p>
+          <a:p>
+            <a:r>
+              <a:t>IT DELIVERY       Ops Manager, BA, IT Product, Dev, Service Desk</a:t>
+            </a:r>
+          </a:p>
+          <a:p>
+            <a:r>
+              <a:t>IT-GOVERNANCE     CAB, ARB, CMDB, intake policy, change control</a:t>
+            </a:r>
+          </a:p>
+          <a:p>
+            <a:r>
+              <a:t>IT-SECURITY       Security architecture, IAM, exceptions, secure SDLC</a:t>
+            </a:r>
+          </a:p>
+          <a:p>
+            <a:r>
+              <a:t>GRC / LEGAL       Business compliance, contracts, collections</a:t>
+            </a:r>
+          </a:p>
+          <a:p>
+            <a:r>
+              <a:t>AUDIT / BOD       Evidence, material risk reporting</a:t>
             </a:r>
           </a:p>
         </p:txBody>
@@ -7876,7 +11556,7 @@
           <a:lstStyle/>
           <a:p>
             <a:r>
-              <a:t>Phase 1 — Receive Requirement</a:t>
+              <a:t>Routing Rule — IT-Gov vs IT-Sec vs GRC</a:t>
             </a:r>
           </a:p>
         </p:txBody>
@@ -7897,29 +11577,23 @@
           <a:lstStyle/>
           <a:p>
             <a:r>
-              <a:t>Channel: ServiceNow / Jira BRD catalog (not email for projects)</a:t>
+              <a:t>IT process &amp; change control     → IT-Governance</a:t>
+            </a:r>
+          </a:p>
+          <a:p>
+            <a:r>
+              <a:t>Security, access, data protection → IT-Security</a:t>
+            </a:r>
+          </a:p>
+          <a:p>
+            <a:r>
+              <a:t>Business &amp; regulatory controls  → Risk / GRC / Legal</a:t>
             </a:r>
           </a:p>
           <a:p/>
           <a:p>
             <a:r>
-              <a:t>1. Classify: standard IT ticket vs business change vs build request</a:t>
-            </a:r>
-          </a:p>
-          <a:p>
-            <a:r>
-              <a:t>2. Wrong bucket? → redirect to BRD (business must define first)</a:t>
-            </a:r>
-          </a:p>
-          <a:p>
-            <a:r>
-              <a:t>3. Assign: Service Desk | BA | IT Product</a:t>
-            </a:r>
-          </a:p>
-          <a:p/>
-          <a:p>
-            <a:r>
-              <a:t>Ops Manager: enforce one front door; log informal requests</a:t>
+              <a:t>All three may apply to one BRD — route early, run in parallel</a:t>
             </a:r>
           </a:p>
         </p:txBody>
@@ -7958,7 +11632,7 @@
           <a:lstStyle/>
           <a:p>
             <a:r>
-              <a:t>Phase 2 — BRD &amp; Quality Gate</a:t>
+              <a:t>Phase 1 — Receive Requirement</a:t>
             </a:r>
           </a:p>
         </p:txBody>
@@ -7979,32 +11653,29 @@
           <a:lstStyle/>
           <a:p>
             <a:r>
-              <a:t>Business drafts BRD → Sponsor (Director+) signs</a:t>
-            </a:r>
-          </a:p>
-          <a:p>
-            <a:r>
-              <a:t>BA quality review (≤2 business days)</a:t>
-            </a:r>
-          </a:p>
-          <a:p>
-            <a:r>
-              <a:t>  • Score ≥ 80% on quality rubric</a:t>
-            </a:r>
-          </a:p>
-          <a:p>
-            <a:r>
-              <a:t>  • Mandatory sections complete</a:t>
-            </a:r>
-          </a:p>
-          <a:p>
-            <a:r>
-              <a:t>  • Compliance Section N → auto-route GRC / IT-Security</a:t>
-            </a:r>
-          </a:p>
-          <a:p>
-            <a:r>
-              <a:t>Outcome: Accepted to triage | Returned | Deferred</a:t>
+              <a:t>Channel: ServiceNow / Jira BRD catalog (not email for projects)</a:t>
+            </a:r>
+          </a:p>
+          <a:p/>
+          <a:p>
+            <a:r>
+              <a:t>1. Classify: standard IT ticket vs business change vs build request</a:t>
+            </a:r>
+          </a:p>
+          <a:p>
+            <a:r>
+              <a:t>2. Wrong bucket? → redirect to BRD (business must define first)</a:t>
+            </a:r>
+          </a:p>
+          <a:p>
+            <a:r>
+              <a:t>3. Assign: Service Desk | BA | IT Product</a:t>
+            </a:r>
+          </a:p>
+          <a:p/>
+          <a:p>
+            <a:r>
+              <a:t>Ops Manager: enforce one front door; log informal requests</a:t>
             </a:r>
           </a:p>
         </p:txBody>
